--- a/Saguenay-Aujourdhui.pptx
+++ b/Saguenay-Aujourdhui.pptx
@@ -20,9 +20,10 @@
     <p:sldId id="268" r:id="rId14"/>
     <p:sldId id="269" r:id="rId15"/>
     <p:sldId id="270" r:id="rId16"/>
+    <p:sldId id="271" r:id="rId17"/>
   </p:sldIdLst>
   <p:notesMasterIdLst>
-    <p:notesMasterId r:id="rId17"/>
+    <p:notesMasterId r:id="rId18"/>
   </p:notesMasterIdLst>
   <p:sldSz cx="12192000" cy="6858000"/>
   <p:notesSz cx="6858000" cy="12192000"/>
@@ -121,39 +122,40 @@
   <p:extLst>
     <p:ext uri="{521415D9-36F7-43E2-AB2F-B90AF26B5E84}">
       <p14:sectionLst xmlns:p14="http://schemas.microsoft.com/office/powerpoint/2010/main">
-        <p14:section name="Le problème" id="{0800e183-90ae-8755-623c-1dd6c6ee40e6}">
+        <p14:section name="Le problème" id="{873b2929-70af-fc57-b55a-fd517a1abe11}">
           <p14:sldIdLst>
             <p14:sldId id="256"/>
             <p14:sldId id="257"/>
           </p14:sldIdLst>
         </p14:section>
-        <p14:section name="L’idée" id="{6b040510-b908-62ab-29f1-123104798d8a}">
+        <p14:section name="L’idée" id="{4d5bb290-77dd-25b6-b44b-2780edf1f81e}">
           <p14:sldIdLst>
             <p14:sldId id="258"/>
             <p14:sldId id="259"/>
             <p14:sldId id="260"/>
           </p14:sldIdLst>
         </p14:section>
-        <p14:section name="Au quotidien" id="{e8dc6ae1-0131-4ce9-4f0f-f5884bc4e07c}">
+        <p14:section name="Au quotidien" id="{38107ba2-2ada-367a-9fed-a3abe7907e74}">
           <p14:sldIdLst>
             <p14:sldId id="261"/>
             <p14:sldId id="262"/>
             <p14:sldId id="263"/>
             <p14:sldId id="264"/>
             <p14:sldId id="265"/>
+            <p14:sldId id="266"/>
           </p14:sldIdLst>
         </p14:section>
-        <p14:section name="Les partenaires" id="{b5ccd7a5-2a1f-28d3-4264-50f267920e6f}">
+        <p14:section name="Les partenaires" id="{b013ed42-765f-ff66-73a9-5362449ad24e}">
           <p14:sldIdLst>
-            <p14:sldId id="266"/>
             <p14:sldId id="267"/>
             <p14:sldId id="268"/>
+            <p14:sldId id="269"/>
           </p14:sldIdLst>
         </p14:section>
-        <p14:section name="La suite" id="{0304d561-a9ec-d6b0-c26c-74d6d24a1e59}">
+        <p14:section name="La suite" id="{ba4e04fb-bbeb-7f6b-323d-46b770103afa}">
           <p14:sldIdLst>
-            <p14:sldId id="269"/>
             <p14:sldId id="270"/>
+            <p14:sldId id="271"/>
           </p14:sldIdLst>
         </p14:section>
       </p14:sectionLst>
@@ -648,7 +650,7 @@
           <a:p>
             <a:r>
               <a:rPr lang="en-US" dirty="0"/>
-              <a:t>Voici où on en est : tout est branché et fonctionne aujourd’hui, en direct. Une partie vient de données déjà ouvertes, que je peux publier dès maintenant : le stationnement et les travaux, les urgences et les routes, la météo et l’électricité. Les collectes, les avis d’aqueduc et le bus marchent aussi, pour n’importe quelle adresse, mais je ne veux pas les publier sans votre accord : c’est ce que je viens vous demander. Et une chose n’est pas possible pour l’instant : savoir quand la déneigeuse passe dans sa rue. J’y reviens à la fin.</a:t>
+              <a:t>Un outil qu’on consulte tous les jours doit être fiable. Ce que l’app a déjà lu reste sur le téléphone : le stationnement, les collectes de l’adresse, trois semaines d’horaire du bus, les avis et les coupures déjà connus marchent sans réseau, et le widget connaît les sept prochains jours. La météo, les pannes en cours, les routes, les urgences et les retards du bus ont besoin du réseau : sans lui, l’app montre le dernier relevé avec son heure, sans faire semblant. Une vérification se fait chaque heure en arrière-plan, alors les alertes arrivent même quand l’app est fermée. Le projet compte 337 tests automatiques, dont plusieurs sur les vraies réponses enregistrées de chaque source, et je l’ai vérifié sur un téléphone Android en version finale. L’adresse ne quitte jamais le téléphone : pas de compte, pas de nuage.</a:t>
             </a:r>
             <a:endParaRPr lang="en-US" dirty="0"/>
           </a:p>
@@ -736,7 +738,7 @@
           <a:p>
             <a:r>
               <a:rPr lang="en-US" dirty="0"/>
-              <a:t>Pour la Ville, l’intérêt principal, c’est la portée des avis d’aqueduc. Aujourd’hui, ils rejoignent les gens inscrits aux appels automatisés. Dans votre propre carte des avis, ce matin, 2 734 résidences avaient été jointes sur 3 982 visées. Je lis peut-être mal ces champs, alors j’aimerais qu’on le vérifie ensemble. Tout est déjà branché sur vos pages publiques : le calendrier des collectes pour n’importe quelle adresse, et la carte des avis, zone par zone. Ce que je vous demande est simple : un accord écrit pour publier ces deux sources dans l’app, idéalement leur publication sur Données Québec comme le fait Repentigny, et votre accord sur le nom. Ça ne vous coûte rien, et je n’ai pas besoin d’intégration de votre côté.</a:t>
+              <a:t>Voici où on en est : tout est branché et fonctionne aujourd’hui, en direct. Une partie vient de données déjà ouvertes, que je peux publier dès maintenant : le stationnement et les travaux, les urgences et les routes, la météo, la qualité de l’air, les interdictions de feux, l’électricité et ses pointes d’hiver. Les collectes, les avis d’aqueduc et le bus marchent aussi, pour n’importe quelle adresse, mais je ne veux pas les publier sans votre accord : c’est ce que je viens vous demander. Et une chose n’est pas possible pour l’instant : savoir quand la déneigeuse passe dans sa rue. J’y reviens à la fin.</a:t>
             </a:r>
             <a:endParaRPr lang="en-US" dirty="0"/>
           </a:p>
@@ -824,7 +826,7 @@
           <a:p>
             <a:r>
               <a:rPr lang="en-US" dirty="0"/>
-              <a:t>Pour la STS, je veux d’abord dire que votre nouveau système publie des données de très bonne qualité. Les heures que vous voyez à droite sortent directement de votre flux, pour l’arrêt 150, Racine Est. Je ne veux pas remplacer Transit : pour planifier un trajet, l’app renvoie vers Transit. Ce que j’ajoute, c’est le prochain départ de son arrêt directement sur l’écran d’accueil, ce que Transit ne peut plus offrir sur iPhone. L’app lit déjà votre horaire et vos retards en temps réel, et elle les garde trois semaines pour marcher sans réseau. Il me manque seulement une licence, idéalement CC BY 4.0 comme à Montréal et à Laval.</a:t>
+              <a:t>Pour la Ville, l’intérêt principal, c’est la portée des avis d’aqueduc. Aujourd’hui, ils rejoignent les gens inscrits aux appels automatisés. Dans votre propre carte des avis, ce matin, 2 734 résidences avaient été jointes sur 3 982 visées. Je lis peut-être mal ces champs, alors j’aimerais qu’on le vérifie ensemble. Tout est déjà branché sur vos pages publiques : le calendrier des collectes pour n’importe quelle adresse, et la carte des avis, zone par zone. Ce que je vous demande est simple : un accord écrit pour publier ces deux sources dans l’app, idéalement leur publication sur Données Québec comme le fait Repentigny, et votre accord sur le nom. Ça ne vous coûte rien, et je n’ai pas besoin d’intégration de votre côté.</a:t>
             </a:r>
             <a:endParaRPr lang="en-US" dirty="0"/>
           </a:p>
@@ -912,7 +914,7 @@
           <a:p>
             <a:r>
               <a:rPr lang="en-US" dirty="0"/>
-              <a:t>D’autres partenaires peuvent aider. Promotion Saguenay a des fonds numériques ; je dois encore vérifier si un projet comme celui-ci est admissible. L’UQAC et les cégeps peuvent y trouver des projets étudiants concrets. Et SaguenayCollecte, qui fait déjà très bien les collectes : je préfère qu’on se renvoie les usagers plutôt que de se faire concurrence.</a:t>
+              <a:t>Pour la STS, je veux d’abord dire que votre nouveau système publie des données de très bonne qualité. Les heures que vous voyez à droite sortent directement de votre flux, pour l’arrêt 150, Racine Est. Je ne veux pas remplacer Transit : pour planifier un trajet, l’app renvoie vers Transit. Ce que j’ajoute, c’est le prochain départ de son arrêt directement sur l’écran d’accueil, ce que Transit ne peut plus offrir sur iPhone. L’app lit déjà votre horaire et vos retards en temps réel, et elle les garde trois semaines pour marcher sans réseau. Il me manque seulement une licence, idéalement CC BY 4.0 comme à Montréal et à Laval.</a:t>
             </a:r>
             <a:endParaRPr lang="en-US" dirty="0"/>
           </a:p>
@@ -1000,7 +1002,7 @@
           <a:p>
             <a:r>
               <a:rPr lang="en-US" dirty="0"/>
-              <a:t>Pour la suite, je vise une première version publique à la mi-décembre, avec les sources déjà ouvertes et celles pour lesquelles j’aurai reçu votre accord. Comme tout est déjà branché, le reste peut s’ajouter dès que les accords arrivent, idéalement en janvier, avec la version web. En avril, je ferai le bilan de l’hiver et je le partagerai avec la Ville, avec les chiffres d’utilisation.</a:t>
+              <a:t>D’autres partenaires peuvent aider. Promotion Saguenay a des fonds numériques ; je dois encore vérifier si un projet comme celui-ci est admissible. L’UQAC et les cégeps peuvent y trouver des projets étudiants concrets. Et SaguenayCollecte, qui fait déjà très bien les collectes : je préfère qu’on se renvoie les usagers plutôt que de se faire concurrence.</a:t>
             </a:r>
             <a:endParaRPr lang="en-US" dirty="0"/>
           </a:p>
@@ -1088,7 +1090,7 @@
           <a:p>
             <a:r>
               <a:rPr lang="en-US" dirty="0"/>
-              <a:t>Merci de votre temps. Si vous voulez, on peut regarder la démo ensemble maintenant : on choisit une adresse et une heure, et on voit le widget changer avec de vraies données. Je vous laisse aussi le lien pour la regarder de votre côté.</a:t>
+              <a:t>Pour la suite, je vise une première version publique à la mi-décembre, avec les sources déjà ouvertes et celles pour lesquelles j’aurai reçu votre accord. Comme tout est déjà branché, le reste peut s’ajouter dès que les accords arrivent, idéalement en janvier, avec la version web. En avril, je ferai le bilan de l’hiver et je le partagerai avec la Ville, avec les chiffres d’utilisation.</a:t>
             </a:r>
             <a:endParaRPr lang="en-US" dirty="0"/>
           </a:p>
@@ -1112,6 +1114,94 @@
             <a:fld id="{F7021451-1387-4CA6-816F-3879F97B5CBC}" type="slidenum">
               <a:rPr lang="en-US"/>
               <a:t>15</a:t>
+            </a:fld>
+            <a:endParaRPr lang="en-US"/>
+          </a:p>
+        </p:txBody>
+      </p:sp>
+    </p:spTree>
+    <p:extLst>
+      <p:ext uri="{BB962C8B-B14F-4D97-AF65-F5344CB8AC3E}">
+        <p14:creationId xmlns:p14="http://schemas.microsoft.com/office/powerpoint/2010/main" val="1024086991"/>
+      </p:ext>
+    </p:extLst>
+  </p:cSld>
+  <p:clrMapOvr>
+    <a:masterClrMapping/>
+  </p:clrMapOvr>
+</p:notes>
+</file>
+
+<file path=ppt/notesSlides/notesSlide16.xml><?xml version="1.0" encoding="utf-8"?>
+<p:notes xmlns:a="http://schemas.openxmlformats.org/drawingml/2006/main" xmlns:r="http://schemas.openxmlformats.org/officeDocument/2006/relationships" xmlns:p="http://schemas.openxmlformats.org/presentationml/2006/main">
+  <p:cSld>
+    <p:spTree>
+      <p:nvGrpSpPr>
+        <p:cNvPr id="1" name=""/>
+        <p:cNvGrpSpPr/>
+        <p:nvPr/>
+      </p:nvGrpSpPr>
+      <p:grpSpPr>
+        <a:xfrm>
+          <a:off x="0" y="0"/>
+          <a:ext cx="0" cy="0"/>
+          <a:chOff x="0" y="0"/>
+          <a:chExt cx="0" cy="0"/>
+        </a:xfrm>
+      </p:grpSpPr>
+      <p:sp>
+        <p:nvSpPr>
+          <p:cNvPr id="2" name="Slide Image Placeholder 1"/>
+          <p:cNvSpPr>
+            <a:spLocks noGrp="1" noRot="1" noChangeAspect="1"/>
+          </p:cNvSpPr>
+          <p:nvPr>
+            <p:ph type="sldImg"/>
+          </p:nvPr>
+        </p:nvSpPr>
+        <p:spPr/>
+      </p:sp>
+      <p:sp>
+        <p:nvSpPr>
+          <p:cNvPr id="3" name="Notes Placeholder 2"/>
+          <p:cNvSpPr>
+            <a:spLocks noGrp="1"/>
+          </p:cNvSpPr>
+          <p:nvPr>
+            <p:ph type="body" idx="1"/>
+          </p:nvPr>
+        </p:nvSpPr>
+        <p:spPr/>
+        <p:txBody>
+          <a:bodyPr/>
+          <a:lstStyle/>
+          <a:p>
+            <a:r>
+              <a:rPr lang="en-US" dirty="0"/>
+              <a:t>Merci de votre temps. Si vous voulez, on peut regarder la démo ensemble maintenant : on choisit une adresse et une heure, et on voit le widget changer avec de vraies données. Je vous laisse aussi le lien pour la regarder de votre côté.</a:t>
+            </a:r>
+            <a:endParaRPr lang="en-US" dirty="0"/>
+          </a:p>
+        </p:txBody>
+      </p:sp>
+      <p:sp>
+        <p:nvSpPr>
+          <p:cNvPr id="4" name="Slide Number Placeholder 3"/>
+          <p:cNvSpPr>
+            <a:spLocks noGrp="1"/>
+          </p:cNvSpPr>
+          <p:nvPr>
+            <p:ph type="sldNum" sz="quarter" idx="10"/>
+          </p:nvPr>
+        </p:nvSpPr>
+        <p:spPr/>
+        <p:txBody>
+          <a:bodyPr/>
+          <a:lstStyle/>
+          <a:p>
+            <a:fld id="{F7021451-1387-4CA6-816F-3879F97B5CBC}" type="slidenum">
+              <a:rPr lang="en-US"/>
+              <a:t>16</a:t>
             </a:fld>
             <a:endParaRPr lang="en-US"/>
           </a:p>
@@ -1352,7 +1442,7 @@
           <a:p>
             <a:r>
               <a:rPr lang="en-US" dirty="0"/>
-              <a:t>Voici ce que l’app réunit : neuf sources, toutes lues en direct. De la Ville : le calendrier des collectes pour l’adresse, le règlement du stationnement de nuit, la carte des avis d’eau, zone par zone, et la carte de circulation pour les travaux. Puis l’horaire et les retards de la STS, les urgences du ministère de la Santé, la météo et les alertes d’Environnement Canada, les pannes et coupures d’Hydro-Québec, et l’état des routes de Québec 511, avec les caméras. Avant, il fallait aller voir chacune de ces sources. Ici, l’app les lit pour ton adresse et ne garde en haut de l’écran que la plus importante à l’heure qu’il est.</a:t>
+              <a:t>Voici ce que l’app réunit : douze sources, toutes lues en direct. De la Ville : le calendrier des collectes pour l’adresse, le règlement du stationnement de nuit, la carte des avis d’eau, zone par zone, et la carte de circulation pour les travaux. Puis l’horaire et les retards de la STS, les urgences du ministère de la Santé, la météo et les alertes d’Environnement Canada, les pannes et coupures d’Hydro-Québec, et l’état des routes de Québec 511, avec les caméras. Trois sources se sont ajoutées : la qualité de l’air des deux stations de Saguenay, les interdictions de feux de la SOPFEU et les pointes d’hiver d’Hydro-Québec. Celles-là restent cachées tant qu’elles ne touchent pas l’adresse : un air bon ne prend aucune place. Avant, il fallait aller voir chacune de ces sources. Ici, l’app les lit pour ton adresse et ne garde en haut de l’écran que la plus importante à l’heure qu’il est.</a:t>
             </a:r>
             <a:endParaRPr lang="en-US" dirty="0"/>
           </a:p>
@@ -1792,7 +1882,7 @@
           <a:p>
             <a:r>
               <a:rPr lang="en-US" dirty="0"/>
-              <a:t>Un outil qu’on consulte tous les jours doit être fiable. Ce que l’app a déjà lu reste sur le téléphone : le stationnement, les collectes de l’adresse, trois semaines d’horaire du bus, les avis et les coupures déjà connus marchent sans réseau, et le widget connaît les sept prochains jours. La météo, les pannes en cours, les routes, les urgences et les retards du bus ont besoin du réseau : sans lui, l’app montre le dernier relevé avec son heure, sans faire semblant. Une vérification se fait chaque heure en arrière-plan, alors les alertes arrivent même quand l’app est fermée. Le projet compte 296 tests automatiques, dont plusieurs sur les vraies réponses enregistrées de chaque source, et je l’ai vérifié sur un téléphone Android en version finale. L’adresse ne quitte jamais le téléphone : pas de compte, pas de nuage.</a:t>
+              <a:t>Ce qu’on a appris en écoutant les gens : un avis d’eau doit atteindre toute une maisonnée, et pas seulement la personne qui a installé l’app. En 2025, les appels automatisés de la Ville ont joint 64,7 % des résidences visées par un avis d’eau, et le taux baisse d’une année à l’autre. Alors chaque adresse gardée peut porter un nom, comme « Chez maman » ou « Chalet », et l’app surveille ses avis d’eau et ses pannes en arrière-plan, toutes les heures, sans qu’on ait besoin de l’afficher. Pour la maisonnée, on partage l’adresse par texto : le lien l’ajoute chez l’autre, sans compte, après confirmation. Et pour quelqu’un qui n’a pas de téléphone intelligent, on écrit son adresse par texto, ou on la dit au téléphone, et on reçoit la journée en quelques phrases. Ni le numéro ni l’adresse ne sont conservés.</a:t>
             </a:r>
             <a:endParaRPr lang="en-US" dirty="0"/>
           </a:p>
@@ -3492,10 +3582,10 @@
             <a:r>
               <a:rPr lang="en-US" sz="3600" b="1" dirty="0">
                 <a:solidFill>
-                  <a:srgbClr val="121417"/>
-                </a:solidFill>
-              </a:rPr>
-              <a:t>Tout est branché aujourd’hui</a:t>
+                  <a:srgbClr val="F1F2F3"/>
+                </a:solidFill>
+              </a:rPr>
+              <a:t>Fiable, même sans réseau</a:t>
             </a:r>
             <a:endParaRPr lang="en-US" sz="3600" dirty="0"/>
           </a:p>
@@ -3503,25 +3593,42 @@
       </p:sp>
       <p:sp>
         <p:nvSpPr>
-          <p:cNvPr id="4" name="publiable"/>
-          <p:cNvSpPr/>
-          <p:nvPr/>
-        </p:nvSpPr>
-        <p:spPr>
-          <a:xfrm>
-            <a:off x="812800" y="1574800"/>
-            <a:ext cx="5194300" cy="2794000"/>
-          </a:xfrm>
-          <a:prstGeom prst="roundRect">
-            <a:avLst>
-              <a:gd name="adj" fmla="val 7273"/>
-            </a:avLst>
-          </a:prstGeom>
-          <a:solidFill>
-            <a:srgbClr val="FFFFFF"/>
-          </a:solidFill>
-          <a:ln/>
-        </p:spPr>
+          <p:cNvPr id="4" name="Text 1"/>
+          <p:cNvSpPr txBox="1"/>
+          <p:nvPr/>
+        </p:nvSpPr>
+        <p:spPr>
+          <a:xfrm>
+            <a:off x="812800" y="1600200"/>
+            <a:ext cx="2997200" cy="254000"/>
+          </a:xfrm>
+          <a:prstGeom prst="rect">
+            <a:avLst/>
+          </a:prstGeom>
+          <a:noFill/>
+          <a:ln/>
+        </p:spPr>
+        <p:txBody>
+          <a:bodyPr wrap="square" lIns="0" tIns="0" rIns="0" bIns="0" rtlCol="0" anchor="t"/>
+          <a:lstStyle/>
+          <a:p>
+            <a:pPr algn="l" indent="0" marL="0">
+              <a:lnSpc>
+                <a:spcPct val="120000"/>
+              </a:lnSpc>
+              <a:buNone/>
+            </a:pPr>
+            <a:r>
+              <a:rPr lang="en-US" sz="1600" b="1" dirty="0">
+                <a:solidFill>
+                  <a:srgbClr val="FFD02B"/>
+                </a:solidFill>
+              </a:rPr>
+              <a:t>Marche sans réseau</a:t>
+            </a:r>
+            <a:endParaRPr lang="en-US" sz="1600" dirty="0"/>
+          </a:p>
+        </p:txBody>
       </p:sp>
       <p:sp>
         <p:nvSpPr>
@@ -3531,8 +3638,135 @@
         </p:nvSpPr>
         <p:spPr>
           <a:xfrm>
-            <a:off x="1117600" y="1879600"/>
-            <a:ext cx="4584700" cy="215900"/>
+            <a:off x="812800" y="1955800"/>
+            <a:ext cx="2997200" cy="2032000"/>
+          </a:xfrm>
+          <a:prstGeom prst="rect">
+            <a:avLst/>
+          </a:prstGeom>
+          <a:noFill/>
+          <a:ln/>
+        </p:spPr>
+        <p:txBody>
+          <a:bodyPr wrap="square" lIns="0" tIns="0" rIns="0" bIns="0" rtlCol="0" anchor="t"/>
+          <a:lstStyle/>
+          <a:p>
+            <a:pPr marL="228600" indent="-228600">
+              <a:lnSpc>
+                <a:spcPct val="125000"/>
+              </a:lnSpc>
+              <a:spcAft>
+                <a:spcPts val="400"/>
+              </a:spcAft>
+              <a:buSzPct val="100000"/>
+              <a:buChar char="•"/>
+            </a:pPr>
+            <a:r>
+              <a:rPr lang="en-US" sz="1400" dirty="0">
+                <a:solidFill>
+                  <a:srgbClr val="D6DADE"/>
+                </a:solidFill>
+              </a:rPr>
+              <a:t>Stationnement et collectes</a:t>
+            </a:r>
+            <a:endParaRPr lang="en-US" sz="1400" dirty="0"/>
+          </a:p>
+          <a:p>
+            <a:pPr marL="228600" indent="-228600">
+              <a:lnSpc>
+                <a:spcPct val="125000"/>
+              </a:lnSpc>
+              <a:spcAft>
+                <a:spcPts val="400"/>
+              </a:spcAft>
+              <a:buSzPct val="100000"/>
+              <a:buChar char="•"/>
+            </a:pPr>
+            <a:r>
+              <a:rPr lang="en-US" sz="1400" dirty="0">
+                <a:solidFill>
+                  <a:srgbClr val="D6DADE"/>
+                </a:solidFill>
+              </a:rPr>
+              <a:t>Trois semaines d’horaire du bus</a:t>
+            </a:r>
+            <a:endParaRPr lang="en-US" sz="1400" dirty="0"/>
+          </a:p>
+          <a:p>
+            <a:pPr marL="228600" indent="-228600">
+              <a:lnSpc>
+                <a:spcPct val="125000"/>
+              </a:lnSpc>
+              <a:spcAft>
+                <a:spcPts val="400"/>
+              </a:spcAft>
+              <a:buSzPct val="100000"/>
+              <a:buChar char="•"/>
+            </a:pPr>
+            <a:r>
+              <a:rPr lang="en-US" sz="1400" dirty="0">
+                <a:solidFill>
+                  <a:srgbClr val="D6DADE"/>
+                </a:solidFill>
+              </a:rPr>
+              <a:t>Avis et coupures déjà connus</a:t>
+            </a:r>
+            <a:endParaRPr lang="en-US" sz="1400" dirty="0"/>
+          </a:p>
+          <a:p>
+            <a:pPr marL="228600" indent="-228600">
+              <a:lnSpc>
+                <a:spcPct val="125000"/>
+              </a:lnSpc>
+              <a:spcAft>
+                <a:spcPts val="400"/>
+              </a:spcAft>
+              <a:buSzPct val="100000"/>
+              <a:buChar char="•"/>
+            </a:pPr>
+            <a:r>
+              <a:rPr lang="en-US" sz="1400" dirty="0">
+                <a:solidFill>
+                  <a:srgbClr val="D6DADE"/>
+                </a:solidFill>
+              </a:rPr>
+              <a:t>Le widget, pour sept jours</a:t>
+            </a:r>
+            <a:endParaRPr lang="en-US" sz="1400" dirty="0"/>
+          </a:p>
+          <a:p>
+            <a:pPr marL="228600" indent="-228600">
+              <a:lnSpc>
+                <a:spcPct val="125000"/>
+              </a:lnSpc>
+              <a:spcAft>
+                <a:spcPts val="400"/>
+              </a:spcAft>
+              <a:buSzPct val="100000"/>
+              <a:buChar char="•"/>
+            </a:pPr>
+            <a:r>
+              <a:rPr lang="en-US" sz="1400" dirty="0">
+                <a:solidFill>
+                  <a:srgbClr val="D6DADE"/>
+                </a:solidFill>
+              </a:rPr>
+              <a:t>Les rappels et les réponses de l’app</a:t>
+            </a:r>
+            <a:endParaRPr lang="en-US" sz="1400" dirty="0"/>
+          </a:p>
+        </p:txBody>
+      </p:sp>
+      <p:sp>
+        <p:nvSpPr>
+          <p:cNvPr id="6" name="Text 3"/>
+          <p:cNvSpPr txBox="1"/>
+          <p:nvPr/>
+        </p:nvSpPr>
+        <p:spPr>
+          <a:xfrm>
+            <a:off x="4064000" y="1600200"/>
+            <a:ext cx="2997200" cy="254000"/>
           </a:xfrm>
           <a:prstGeom prst="rect">
             <a:avLst/>
@@ -3551,12 +3785,157 @@
               <a:buNone/>
             </a:pPr>
             <a:r>
-              <a:rPr lang="en-US" sz="1200" b="1" dirty="0">
-                <a:solidFill>
-                  <a:srgbClr val="167A4B"/>
-                </a:solidFill>
-              </a:rPr>
-              <a:t>Données ouvertes, publiables dès maintenant</a:t>
+              <a:rPr lang="en-US" sz="1600" b="1" dirty="0">
+                <a:solidFill>
+                  <a:srgbClr val="B3B9BF"/>
+                </a:solidFill>
+              </a:rPr>
+              <a:t>A besoin du réseau</a:t>
+            </a:r>
+            <a:endParaRPr lang="en-US" sz="1600" dirty="0"/>
+          </a:p>
+        </p:txBody>
+      </p:sp>
+      <p:sp>
+        <p:nvSpPr>
+          <p:cNvPr id="7" name="Text 4"/>
+          <p:cNvSpPr txBox="1"/>
+          <p:nvPr/>
+        </p:nvSpPr>
+        <p:spPr>
+          <a:xfrm>
+            <a:off x="4064000" y="1955800"/>
+            <a:ext cx="2997200" cy="1587500"/>
+          </a:xfrm>
+          <a:prstGeom prst="rect">
+            <a:avLst/>
+          </a:prstGeom>
+          <a:noFill/>
+          <a:ln/>
+        </p:spPr>
+        <p:txBody>
+          <a:bodyPr wrap="square" lIns="0" tIns="0" rIns="0" bIns="0" rtlCol="0" anchor="t"/>
+          <a:lstStyle/>
+          <a:p>
+            <a:pPr marL="228600" indent="-228600">
+              <a:lnSpc>
+                <a:spcPct val="125000"/>
+              </a:lnSpc>
+              <a:spcAft>
+                <a:spcPts val="400"/>
+              </a:spcAft>
+              <a:buSzPct val="100000"/>
+              <a:buChar char="•"/>
+            </a:pPr>
+            <a:r>
+              <a:rPr lang="en-US" sz="1400" dirty="0">
+                <a:solidFill>
+                  <a:srgbClr val="D6DADE"/>
+                </a:solidFill>
+              </a:rPr>
+              <a:t>Météo et alertes</a:t>
+            </a:r>
+            <a:endParaRPr lang="en-US" sz="1400" dirty="0"/>
+          </a:p>
+          <a:p>
+            <a:pPr marL="228600" indent="-228600">
+              <a:lnSpc>
+                <a:spcPct val="125000"/>
+              </a:lnSpc>
+              <a:spcAft>
+                <a:spcPts val="400"/>
+              </a:spcAft>
+              <a:buSzPct val="100000"/>
+              <a:buChar char="•"/>
+            </a:pPr>
+            <a:r>
+              <a:rPr lang="en-US" sz="1400" dirty="0">
+                <a:solidFill>
+                  <a:srgbClr val="D6DADE"/>
+                </a:solidFill>
+              </a:rPr>
+              <a:t>Pannes, routes, urgences</a:t>
+            </a:r>
+            <a:endParaRPr lang="en-US" sz="1400" dirty="0"/>
+          </a:p>
+          <a:p>
+            <a:pPr marL="228600" indent="-228600">
+              <a:lnSpc>
+                <a:spcPct val="125000"/>
+              </a:lnSpc>
+              <a:spcAft>
+                <a:spcPts val="400"/>
+              </a:spcAft>
+              <a:buSzPct val="100000"/>
+              <a:buChar char="•"/>
+            </a:pPr>
+            <a:r>
+              <a:rPr lang="en-US" sz="1400" dirty="0">
+                <a:solidFill>
+                  <a:srgbClr val="D6DADE"/>
+                </a:solidFill>
+              </a:rPr>
+              <a:t>Retards du bus</a:t>
+            </a:r>
+            <a:endParaRPr lang="en-US" sz="1400" dirty="0"/>
+          </a:p>
+          <a:p>
+            <a:pPr marL="228600" indent="-228600">
+              <a:lnSpc>
+                <a:spcPct val="125000"/>
+              </a:lnSpc>
+              <a:spcAft>
+                <a:spcPts val="400"/>
+              </a:spcAft>
+              <a:buSzPct val="100000"/>
+              <a:buChar char="•"/>
+            </a:pPr>
+            <a:r>
+              <a:rPr lang="en-US" sz="1400" dirty="0">
+                <a:solidFill>
+                  <a:srgbClr val="D6DADE"/>
+                </a:solidFill>
+              </a:rPr>
+              <a:t>Assistant en ligne</a:t>
+            </a:r>
+            <a:endParaRPr lang="en-US" sz="1400" dirty="0"/>
+          </a:p>
+        </p:txBody>
+      </p:sp>
+      <p:sp>
+        <p:nvSpPr>
+          <p:cNvPr id="8" name="Text 5"/>
+          <p:cNvSpPr txBox="1"/>
+          <p:nvPr/>
+        </p:nvSpPr>
+        <p:spPr>
+          <a:xfrm>
+            <a:off x="4064000" y="3644900"/>
+            <a:ext cx="2997200" cy="444500"/>
+          </a:xfrm>
+          <a:prstGeom prst="rect">
+            <a:avLst/>
+          </a:prstGeom>
+          <a:noFill/>
+          <a:ln/>
+        </p:spPr>
+        <p:txBody>
+          <a:bodyPr wrap="square" lIns="0" tIns="0" rIns="0" bIns="0" rtlCol="0" anchor="t"/>
+          <a:lstStyle/>
+          <a:p>
+            <a:pPr algn="l" indent="0" marL="0">
+              <a:lnSpc>
+                <a:spcPct val="135000"/>
+              </a:lnSpc>
+              <a:buNone/>
+            </a:pPr>
+            <a:r>
+              <a:rPr lang="en-US" sz="1200" dirty="0">
+                <a:solidFill>
+                  <a:srgbClr val="B3B9BF"/>
+                </a:solidFill>
+              </a:rPr>
+              <a:t>Sans réseau, l’app montre le dernier relevé et son heure.</a:t>
             </a:r>
             <a:endParaRPr lang="en-US" sz="1200" dirty="0"/>
           </a:p>
@@ -3564,157 +3943,40 @@
       </p:sp>
       <p:sp>
         <p:nvSpPr>
-          <p:cNvPr id="6" name="Text 3"/>
-          <p:cNvSpPr txBox="1"/>
-          <p:nvPr/>
-        </p:nvSpPr>
-        <p:spPr>
-          <a:xfrm>
-            <a:off x="1117600" y="2286000"/>
-            <a:ext cx="4584700" cy="266700"/>
-          </a:xfrm>
-          <a:prstGeom prst="rect">
-            <a:avLst/>
-          </a:prstGeom>
-          <a:noFill/>
-          <a:ln/>
-        </p:spPr>
-        <p:txBody>
-          <a:bodyPr wrap="square" lIns="0" tIns="0" rIns="0" bIns="0" rtlCol="0" anchor="t"/>
-          <a:lstStyle/>
-          <a:p>
-            <a:pPr algn="l" indent="0" marL="0">
-              <a:lnSpc>
-                <a:spcPct val="120000"/>
-              </a:lnSpc>
-              <a:buNone/>
-            </a:pPr>
-            <a:r>
-              <a:rPr lang="en-US" sz="1600" b="1" dirty="0">
-                <a:solidFill>
-                  <a:srgbClr val="121417"/>
-                </a:solidFill>
-              </a:rPr>
-              <a:t>Stationnement et travaux</a:t>
-            </a:r>
-            <a:endParaRPr lang="en-US" sz="1600" dirty="0"/>
-          </a:p>
-        </p:txBody>
-      </p:sp>
-      <p:sp>
-        <p:nvSpPr>
-          <p:cNvPr id="7" name="Text 4"/>
-          <p:cNvSpPr txBox="1"/>
-          <p:nvPr/>
-        </p:nvSpPr>
-        <p:spPr>
-          <a:xfrm>
-            <a:off x="1117600" y="2578100"/>
-            <a:ext cx="4584700" cy="228600"/>
-          </a:xfrm>
-          <a:prstGeom prst="rect">
-            <a:avLst/>
-          </a:prstGeom>
-          <a:noFill/>
-          <a:ln/>
-        </p:spPr>
-        <p:txBody>
-          <a:bodyPr wrap="square" lIns="0" tIns="0" rIns="0" bIns="0" rtlCol="0" anchor="t"/>
-          <a:lstStyle/>
-          <a:p>
-            <a:pPr algn="l" indent="0" marL="0">
-              <a:lnSpc>
-                <a:spcPct val="120000"/>
-              </a:lnSpc>
-              <a:buNone/>
-            </a:pPr>
-            <a:r>
-              <a:rPr lang="en-US" sz="1200" dirty="0">
-                <a:solidFill>
-                  <a:srgbClr val="4A5056"/>
-                </a:solidFill>
-              </a:rPr>
-              <a:t>Règlement et carte de circulation de la Ville</a:t>
-            </a:r>
-            <a:endParaRPr lang="en-US" sz="1200" dirty="0"/>
-          </a:p>
-        </p:txBody>
-      </p:sp>
-      <p:sp>
-        <p:nvSpPr>
-          <p:cNvPr id="8" name="Text 5"/>
-          <p:cNvSpPr txBox="1"/>
-          <p:nvPr/>
-        </p:nvSpPr>
-        <p:spPr>
-          <a:xfrm>
-            <a:off x="1117600" y="2921000"/>
-            <a:ext cx="4584700" cy="266700"/>
-          </a:xfrm>
-          <a:prstGeom prst="rect">
-            <a:avLst/>
-          </a:prstGeom>
-          <a:noFill/>
-          <a:ln/>
-        </p:spPr>
-        <p:txBody>
-          <a:bodyPr wrap="square" lIns="0" tIns="0" rIns="0" bIns="0" rtlCol="0" anchor="t"/>
-          <a:lstStyle/>
-          <a:p>
-            <a:pPr algn="l" indent="0" marL="0">
-              <a:lnSpc>
-                <a:spcPct val="120000"/>
-              </a:lnSpc>
-              <a:buNone/>
-            </a:pPr>
-            <a:r>
-              <a:rPr lang="en-US" sz="1600" b="1" dirty="0">
-                <a:solidFill>
-                  <a:srgbClr val="121417"/>
-                </a:solidFill>
-              </a:rPr>
-              <a:t>Urgences et routes</a:t>
-            </a:r>
-            <a:endParaRPr lang="en-US" sz="1600" dirty="0"/>
-          </a:p>
-        </p:txBody>
-      </p:sp>
-      <p:sp>
-        <p:nvSpPr>
           <p:cNvPr id="9" name="Text 6"/>
           <p:cNvSpPr txBox="1"/>
           <p:nvPr/>
         </p:nvSpPr>
         <p:spPr>
           <a:xfrm>
-            <a:off x="1117600" y="3213100"/>
-            <a:ext cx="4584700" cy="228600"/>
-          </a:xfrm>
-          <a:prstGeom prst="rect">
-            <a:avLst/>
-          </a:prstGeom>
-          <a:noFill/>
-          <a:ln/>
-        </p:spPr>
-        <p:txBody>
-          <a:bodyPr wrap="square" lIns="0" tIns="0" rIns="0" bIns="0" rtlCol="0" anchor="t"/>
-          <a:lstStyle/>
-          <a:p>
-            <a:pPr algn="l" indent="0" marL="0">
-              <a:lnSpc>
-                <a:spcPct val="120000"/>
-              </a:lnSpc>
-              <a:buNone/>
-            </a:pPr>
-            <a:r>
-              <a:rPr lang="en-US" sz="1200" dirty="0">
-                <a:solidFill>
-                  <a:srgbClr val="4A5056"/>
-                </a:solidFill>
-              </a:rPr>
-              <a:t>Ministère de la Santé, Québec 511</a:t>
-            </a:r>
-            <a:endParaRPr lang="en-US" sz="1200" dirty="0"/>
+            <a:off x="7315200" y="1600200"/>
+            <a:ext cx="4064000" cy="508000"/>
+          </a:xfrm>
+          <a:prstGeom prst="rect">
+            <a:avLst/>
+          </a:prstGeom>
+          <a:noFill/>
+          <a:ln/>
+        </p:spPr>
+        <p:txBody>
+          <a:bodyPr wrap="square" lIns="0" tIns="0" rIns="0" bIns="0" rtlCol="0" anchor="t"/>
+          <a:lstStyle/>
+          <a:p>
+            <a:pPr algn="l" indent="0" marL="0">
+              <a:lnSpc>
+                <a:spcPct val="100000"/>
+              </a:lnSpc>
+              <a:buNone/>
+            </a:pPr>
+            <a:r>
+              <a:rPr lang="en-US" sz="3600" b="1" dirty="0">
+                <a:solidFill>
+                  <a:srgbClr val="FFD02B"/>
+                </a:solidFill>
+              </a:rPr>
+              <a:t>337</a:t>
+            </a:r>
+            <a:endParaRPr lang="en-US" sz="3600" dirty="0"/>
           </a:p>
         </p:txBody>
       </p:sp>
@@ -3726,34 +3988,34 @@
         </p:nvSpPr>
         <p:spPr>
           <a:xfrm>
-            <a:off x="1117600" y="3556000"/>
-            <a:ext cx="4584700" cy="266700"/>
-          </a:xfrm>
-          <a:prstGeom prst="rect">
-            <a:avLst/>
-          </a:prstGeom>
-          <a:noFill/>
-          <a:ln/>
-        </p:spPr>
-        <p:txBody>
-          <a:bodyPr wrap="square" lIns="0" tIns="0" rIns="0" bIns="0" rtlCol="0" anchor="t"/>
-          <a:lstStyle/>
-          <a:p>
-            <a:pPr algn="l" indent="0" marL="0">
-              <a:lnSpc>
-                <a:spcPct val="120000"/>
-              </a:lnSpc>
-              <a:buNone/>
-            </a:pPr>
-            <a:r>
-              <a:rPr lang="en-US" sz="1600" b="1" dirty="0">
-                <a:solidFill>
-                  <a:srgbClr val="121417"/>
-                </a:solidFill>
-              </a:rPr>
-              <a:t>Météo et électricité</a:t>
-            </a:r>
-            <a:endParaRPr lang="en-US" sz="1600" dirty="0"/>
+            <a:off x="7315200" y="2146300"/>
+            <a:ext cx="4064000" cy="508000"/>
+          </a:xfrm>
+          <a:prstGeom prst="rect">
+            <a:avLst/>
+          </a:prstGeom>
+          <a:noFill/>
+          <a:ln/>
+        </p:spPr>
+        <p:txBody>
+          <a:bodyPr wrap="square" lIns="0" tIns="0" rIns="0" bIns="0" rtlCol="0" anchor="t"/>
+          <a:lstStyle/>
+          <a:p>
+            <a:pPr algn="l" indent="0" marL="0">
+              <a:lnSpc>
+                <a:spcPct val="130000"/>
+              </a:lnSpc>
+              <a:buNone/>
+            </a:pPr>
+            <a:r>
+              <a:rPr lang="en-US" sz="1400" dirty="0">
+                <a:solidFill>
+                  <a:srgbClr val="D6DADE"/>
+                </a:solidFill>
+              </a:rPr>
+              <a:t>tests automatiques, dont les vraies réponses de chaque source</a:t>
+            </a:r>
+            <a:endParaRPr lang="en-US" sz="1400" dirty="0"/>
           </a:p>
         </p:txBody>
       </p:sp>
@@ -3765,58 +4027,75 @@
         </p:nvSpPr>
         <p:spPr>
           <a:xfrm>
-            <a:off x="1117600" y="3848100"/>
-            <a:ext cx="4584700" cy="228600"/>
-          </a:xfrm>
-          <a:prstGeom prst="rect">
-            <a:avLst/>
-          </a:prstGeom>
-          <a:noFill/>
-          <a:ln/>
-        </p:spPr>
-        <p:txBody>
-          <a:bodyPr wrap="square" lIns="0" tIns="0" rIns="0" bIns="0" rtlCol="0" anchor="t"/>
-          <a:lstStyle/>
-          <a:p>
-            <a:pPr algn="l" indent="0" marL="0">
-              <a:lnSpc>
-                <a:spcPct val="120000"/>
-              </a:lnSpc>
-              <a:buNone/>
-            </a:pPr>
-            <a:r>
-              <a:rPr lang="en-US" sz="1200" dirty="0">
-                <a:solidFill>
-                  <a:srgbClr val="4A5056"/>
-                </a:solidFill>
-              </a:rPr>
-              <a:t>Environnement Canada et Hydro-Québec</a:t>
-            </a:r>
-            <a:endParaRPr lang="en-US" sz="1200" dirty="0"/>
-          </a:p>
-        </p:txBody>
-      </p:sp>
-      <p:sp>
-        <p:nvSpPr>
-          <p:cNvPr id="12" name="à publier avec accord"/>
-          <p:cNvSpPr/>
-          <p:nvPr/>
-        </p:nvSpPr>
-        <p:spPr>
-          <a:xfrm>
-            <a:off x="6184900" y="1574800"/>
-            <a:ext cx="5194300" cy="2794000"/>
-          </a:xfrm>
-          <a:prstGeom prst="roundRect">
-            <a:avLst>
-              <a:gd name="adj" fmla="val 7273"/>
-            </a:avLst>
-          </a:prstGeom>
-          <a:solidFill>
-            <a:srgbClr val="FFFFFF"/>
-          </a:solidFill>
-          <a:ln/>
-        </p:spPr>
+            <a:off x="7315200" y="2870200"/>
+            <a:ext cx="4064000" cy="330200"/>
+          </a:xfrm>
+          <a:prstGeom prst="rect">
+            <a:avLst/>
+          </a:prstGeom>
+          <a:noFill/>
+          <a:ln/>
+        </p:spPr>
+        <p:txBody>
+          <a:bodyPr wrap="square" lIns="0" tIns="0" rIns="0" bIns="0" rtlCol="0" anchor="t"/>
+          <a:lstStyle/>
+          <a:p>
+            <a:pPr algn="l" indent="0" marL="0">
+              <a:lnSpc>
+                <a:spcPct val="100000"/>
+              </a:lnSpc>
+              <a:buNone/>
+            </a:pPr>
+            <a:r>
+              <a:rPr lang="en-US" sz="2200" b="1" dirty="0">
+                <a:solidFill>
+                  <a:srgbClr val="F1F2F3"/>
+                </a:solidFill>
+              </a:rPr>
+              <a:t>Vérifiée sur Android</a:t>
+            </a:r>
+            <a:endParaRPr lang="en-US" sz="2200" dirty="0"/>
+          </a:p>
+        </p:txBody>
+      </p:sp>
+      <p:sp>
+        <p:nvSpPr>
+          <p:cNvPr id="12" name="Text 9"/>
+          <p:cNvSpPr txBox="1"/>
+          <p:nvPr/>
+        </p:nvSpPr>
+        <p:spPr>
+          <a:xfrm>
+            <a:off x="7315200" y="3238500"/>
+            <a:ext cx="4064000" cy="508000"/>
+          </a:xfrm>
+          <a:prstGeom prst="rect">
+            <a:avLst/>
+          </a:prstGeom>
+          <a:noFill/>
+          <a:ln/>
+        </p:spPr>
+        <p:txBody>
+          <a:bodyPr wrap="square" lIns="0" tIns="0" rIns="0" bIns="0" rtlCol="0" anchor="t"/>
+          <a:lstStyle/>
+          <a:p>
+            <a:pPr algn="l" indent="0" marL="0">
+              <a:lnSpc>
+                <a:spcPct val="130000"/>
+              </a:lnSpc>
+              <a:buNone/>
+            </a:pPr>
+            <a:r>
+              <a:rPr lang="en-US" sz="1400" dirty="0">
+                <a:solidFill>
+                  <a:srgbClr val="D6DADE"/>
+                </a:solidFill>
+              </a:rPr>
+              <a:t>en version finale : widget, alertes même app fermée</a:t>
+            </a:r>
+            <a:endParaRPr lang="en-US" sz="1400" dirty="0"/>
+          </a:p>
+        </p:txBody>
       </p:sp>
       <p:sp>
         <p:nvSpPr>
@@ -3826,34 +4105,34 @@
         </p:nvSpPr>
         <p:spPr>
           <a:xfrm>
-            <a:off x="6489700" y="1879600"/>
-            <a:ext cx="4584700" cy="215900"/>
-          </a:xfrm>
-          <a:prstGeom prst="rect">
-            <a:avLst/>
-          </a:prstGeom>
-          <a:noFill/>
-          <a:ln/>
-        </p:spPr>
-        <p:txBody>
-          <a:bodyPr wrap="square" lIns="0" tIns="0" rIns="0" bIns="0" rtlCol="0" anchor="t"/>
-          <a:lstStyle/>
-          <a:p>
-            <a:pPr algn="l" indent="0" marL="0">
-              <a:lnSpc>
-                <a:spcPct val="120000"/>
-              </a:lnSpc>
-              <a:buNone/>
-            </a:pPr>
-            <a:r>
-              <a:rPr lang="en-US" sz="1200" b="1" dirty="0">
-                <a:solidFill>
-                  <a:srgbClr val="8F6200"/>
-                </a:solidFill>
-              </a:rPr>
-              <a:t>Déjà branché, à publier avec votre accord</a:t>
-            </a:r>
-            <a:endParaRPr lang="en-US" sz="1200" dirty="0"/>
+            <a:off x="7315200" y="3911600"/>
+            <a:ext cx="4064000" cy="330200"/>
+          </a:xfrm>
+          <a:prstGeom prst="rect">
+            <a:avLst/>
+          </a:prstGeom>
+          <a:noFill/>
+          <a:ln/>
+        </p:spPr>
+        <p:txBody>
+          <a:bodyPr wrap="square" lIns="0" tIns="0" rIns="0" bIns="0" rtlCol="0" anchor="t"/>
+          <a:lstStyle/>
+          <a:p>
+            <a:pPr algn="l" indent="0" marL="0">
+              <a:lnSpc>
+                <a:spcPct val="100000"/>
+              </a:lnSpc>
+              <a:buNone/>
+            </a:pPr>
+            <a:r>
+              <a:rPr lang="en-US" sz="2200" b="1" dirty="0">
+                <a:solidFill>
+                  <a:srgbClr val="F1F2F3"/>
+                </a:solidFill>
+              </a:rPr>
+              <a:t>Rien ne sort</a:t>
+            </a:r>
+            <a:endParaRPr lang="en-US" sz="2200" dirty="0"/>
           </a:p>
         </p:txBody>
       </p:sp>
@@ -3865,266 +4144,32 @@
         </p:nvSpPr>
         <p:spPr>
           <a:xfrm>
-            <a:off x="6489700" y="2286000"/>
-            <a:ext cx="4584700" cy="266700"/>
-          </a:xfrm>
-          <a:prstGeom prst="rect">
-            <a:avLst/>
-          </a:prstGeom>
-          <a:noFill/>
-          <a:ln/>
-        </p:spPr>
-        <p:txBody>
-          <a:bodyPr wrap="square" lIns="0" tIns="0" rIns="0" bIns="0" rtlCol="0" anchor="t"/>
-          <a:lstStyle/>
-          <a:p>
-            <a:pPr algn="l" indent="0" marL="0">
-              <a:lnSpc>
-                <a:spcPct val="120000"/>
-              </a:lnSpc>
-              <a:buNone/>
-            </a:pPr>
-            <a:r>
-              <a:rPr lang="en-US" sz="1600" b="1" dirty="0">
-                <a:solidFill>
-                  <a:srgbClr val="121417"/>
-                </a:solidFill>
-              </a:rPr>
-              <a:t>Collectes</a:t>
-            </a:r>
-            <a:endParaRPr lang="en-US" sz="1600" dirty="0"/>
-          </a:p>
-        </p:txBody>
-      </p:sp>
-      <p:sp>
-        <p:nvSpPr>
-          <p:cNvPr id="15" name="Text 12"/>
-          <p:cNvSpPr txBox="1"/>
-          <p:nvPr/>
-        </p:nvSpPr>
-        <p:spPr>
-          <a:xfrm>
-            <a:off x="6489700" y="2578100"/>
-            <a:ext cx="4584700" cy="228600"/>
-          </a:xfrm>
-          <a:prstGeom prst="rect">
-            <a:avLst/>
-          </a:prstGeom>
-          <a:noFill/>
-          <a:ln/>
-        </p:spPr>
-        <p:txBody>
-          <a:bodyPr wrap="square" lIns="0" tIns="0" rIns="0" bIns="0" rtlCol="0" anchor="t"/>
-          <a:lstStyle/>
-          <a:p>
-            <a:pPr algn="l" indent="0" marL="0">
-              <a:lnSpc>
-                <a:spcPct val="120000"/>
-              </a:lnSpc>
-              <a:buNone/>
-            </a:pPr>
-            <a:r>
-              <a:rPr lang="en-US" sz="1200" dirty="0">
-                <a:solidFill>
-                  <a:srgbClr val="4A5056"/>
-                </a:solidFill>
-              </a:rPr>
-              <a:t>Le calendrier de la Ville, pour n’importe quelle adresse</a:t>
-            </a:r>
-            <a:endParaRPr lang="en-US" sz="1200" dirty="0"/>
-          </a:p>
-        </p:txBody>
-      </p:sp>
-      <p:sp>
-        <p:nvSpPr>
-          <p:cNvPr id="16" name="Text 13"/>
-          <p:cNvSpPr txBox="1"/>
-          <p:nvPr/>
-        </p:nvSpPr>
-        <p:spPr>
-          <a:xfrm>
-            <a:off x="6489700" y="2921000"/>
-            <a:ext cx="4584700" cy="266700"/>
-          </a:xfrm>
-          <a:prstGeom prst="rect">
-            <a:avLst/>
-          </a:prstGeom>
-          <a:noFill/>
-          <a:ln/>
-        </p:spPr>
-        <p:txBody>
-          <a:bodyPr wrap="square" lIns="0" tIns="0" rIns="0" bIns="0" rtlCol="0" anchor="t"/>
-          <a:lstStyle/>
-          <a:p>
-            <a:pPr algn="l" indent="0" marL="0">
-              <a:lnSpc>
-                <a:spcPct val="120000"/>
-              </a:lnSpc>
-              <a:buNone/>
-            </a:pPr>
-            <a:r>
-              <a:rPr lang="en-US" sz="1600" b="1" dirty="0">
-                <a:solidFill>
-                  <a:srgbClr val="121417"/>
-                </a:solidFill>
-              </a:rPr>
-              <a:t>Avis d’aqueduc</a:t>
-            </a:r>
-            <a:endParaRPr lang="en-US" sz="1600" dirty="0"/>
-          </a:p>
-        </p:txBody>
-      </p:sp>
-      <p:sp>
-        <p:nvSpPr>
-          <p:cNvPr id="17" name="Text 14"/>
-          <p:cNvSpPr txBox="1"/>
-          <p:nvPr/>
-        </p:nvSpPr>
-        <p:spPr>
-          <a:xfrm>
-            <a:off x="6489700" y="3213100"/>
-            <a:ext cx="4584700" cy="228600"/>
-          </a:xfrm>
-          <a:prstGeom prst="rect">
-            <a:avLst/>
-          </a:prstGeom>
-          <a:noFill/>
-          <a:ln/>
-        </p:spPr>
-        <p:txBody>
-          <a:bodyPr wrap="square" lIns="0" tIns="0" rIns="0" bIns="0" rtlCol="0" anchor="t"/>
-          <a:lstStyle/>
-          <a:p>
-            <a:pPr algn="l" indent="0" marL="0">
-              <a:lnSpc>
-                <a:spcPct val="120000"/>
-              </a:lnSpc>
-              <a:buNone/>
-            </a:pPr>
-            <a:r>
-              <a:rPr lang="en-US" sz="1200" dirty="0">
-                <a:solidFill>
-                  <a:srgbClr val="4A5056"/>
-                </a:solidFill>
-              </a:rPr>
-              <a:t>La carte de la Ville, zone par zone</a:t>
-            </a:r>
-            <a:endParaRPr lang="en-US" sz="1200" dirty="0"/>
-          </a:p>
-        </p:txBody>
-      </p:sp>
-      <p:sp>
-        <p:nvSpPr>
-          <p:cNvPr id="18" name="Text 15"/>
-          <p:cNvSpPr txBox="1"/>
-          <p:nvPr/>
-        </p:nvSpPr>
-        <p:spPr>
-          <a:xfrm>
-            <a:off x="6489700" y="3556000"/>
-            <a:ext cx="4584700" cy="266700"/>
-          </a:xfrm>
-          <a:prstGeom prst="rect">
-            <a:avLst/>
-          </a:prstGeom>
-          <a:noFill/>
-          <a:ln/>
-        </p:spPr>
-        <p:txBody>
-          <a:bodyPr wrap="square" lIns="0" tIns="0" rIns="0" bIns="0" rtlCol="0" anchor="t"/>
-          <a:lstStyle/>
-          <a:p>
-            <a:pPr algn="l" indent="0" marL="0">
-              <a:lnSpc>
-                <a:spcPct val="120000"/>
-              </a:lnSpc>
-              <a:buNone/>
-            </a:pPr>
-            <a:r>
-              <a:rPr lang="en-US" sz="1600" b="1" dirty="0">
-                <a:solidFill>
-                  <a:srgbClr val="121417"/>
-                </a:solidFill>
-              </a:rPr>
-              <a:t>Bus</a:t>
-            </a:r>
-            <a:endParaRPr lang="en-US" sz="1600" dirty="0"/>
-          </a:p>
-        </p:txBody>
-      </p:sp>
-      <p:sp>
-        <p:nvSpPr>
-          <p:cNvPr id="19" name="Text 16"/>
-          <p:cNvSpPr txBox="1"/>
-          <p:nvPr/>
-        </p:nvSpPr>
-        <p:spPr>
-          <a:xfrm>
-            <a:off x="6489700" y="3848100"/>
-            <a:ext cx="4584700" cy="228600"/>
-          </a:xfrm>
-          <a:prstGeom prst="rect">
-            <a:avLst/>
-          </a:prstGeom>
-          <a:noFill/>
-          <a:ln/>
-        </p:spPr>
-        <p:txBody>
-          <a:bodyPr wrap="square" lIns="0" tIns="0" rIns="0" bIns="0" rtlCol="0" anchor="t"/>
-          <a:lstStyle/>
-          <a:p>
-            <a:pPr algn="l" indent="0" marL="0">
-              <a:lnSpc>
-                <a:spcPct val="120000"/>
-              </a:lnSpc>
-              <a:buNone/>
-            </a:pPr>
-            <a:r>
-              <a:rPr lang="en-US" sz="1200" dirty="0">
-                <a:solidFill>
-                  <a:srgbClr val="4A5056"/>
-                </a:solidFill>
-              </a:rPr>
-              <a:t>L’horaire et les retards en temps réel de la STS</a:t>
-            </a:r>
-            <a:endParaRPr lang="en-US" sz="1200" dirty="0"/>
-          </a:p>
-        </p:txBody>
-      </p:sp>
-      <p:sp>
-        <p:nvSpPr>
-          <p:cNvPr id="20" name="Text 17"/>
-          <p:cNvSpPr txBox="1"/>
-          <p:nvPr/>
-        </p:nvSpPr>
-        <p:spPr>
-          <a:xfrm>
-            <a:off x="812800" y="4648200"/>
-            <a:ext cx="10566400" cy="533400"/>
-          </a:xfrm>
-          <a:prstGeom prst="rect">
-            <a:avLst/>
-          </a:prstGeom>
-          <a:noFill/>
-          <a:ln/>
-        </p:spPr>
-        <p:txBody>
-          <a:bodyPr wrap="square" lIns="0" tIns="0" rIns="0" bIns="0" rtlCol="0" anchor="t"/>
-          <a:lstStyle/>
-          <a:p>
-            <a:pPr algn="l" indent="0" marL="0">
-              <a:lnSpc>
-                <a:spcPct val="135000"/>
+            <a:off x="7315200" y="4279900"/>
+            <a:ext cx="4064000" cy="508000"/>
+          </a:xfrm>
+          <a:prstGeom prst="rect">
+            <a:avLst/>
+          </a:prstGeom>
+          <a:noFill/>
+          <a:ln/>
+        </p:spPr>
+        <p:txBody>
+          <a:bodyPr wrap="square" lIns="0" tIns="0" rIns="0" bIns="0" rtlCol="0" anchor="t"/>
+          <a:lstStyle/>
+          <a:p>
+            <a:pPr algn="l" indent="0" marL="0">
+              <a:lnSpc>
+                <a:spcPct val="130000"/>
               </a:lnSpc>
               <a:buNone/>
             </a:pPr>
             <a:r>
               <a:rPr lang="en-US" sz="1400" dirty="0">
                 <a:solidFill>
-                  <a:srgbClr val="4A5056"/>
-                </a:solidFill>
-              </a:rPr>
-              <a:t>Pas encore possible : savoir quand la déneigeuse passe dans ta rue. Rien n’est public là-dessus pour l’instant.</a:t>
+                  <a:srgbClr val="D6DADE"/>
+                </a:solidFill>
+              </a:rPr>
+              <a:t>l’adresse reste sur le téléphone, sans compte ni nuage</a:t>
             </a:r>
             <a:endParaRPr lang="en-US" sz="1400" dirty="0"/>
           </a:p>
@@ -4160,7 +4205,7 @@
             <a:lvl1pPr>
               <a:defRPr sz="1200">
                 <a:solidFill>
-                  <a:srgbClr val="868C92"/>
+                  <a:srgbClr val="8A9198"/>
                 </a:solidFill>
               </a:defRPr>
             </a:lvl1pPr>
@@ -4210,7 +4255,7 @@
         </p:nvSpPr>
         <p:spPr>
           <a:xfrm>
-            <a:off x="812800" y="1092200"/>
+            <a:off x="812800" y="762000"/>
             <a:ext cx="10566400" cy="635000"/>
           </a:xfrm>
           <a:prstGeom prst="rect">
@@ -4235,7 +4280,7 @@
                   <a:srgbClr val="121417"/>
                 </a:solidFill>
               </a:rPr>
-              <a:t>Quand l’eau est touchée, prévenir tout le monde</a:t>
+              <a:t>Tout est branché aujourd’hui</a:t>
             </a:r>
             <a:endParaRPr lang="en-US" sz="3600" dirty="0"/>
           </a:p>
@@ -4243,267 +4288,218 @@
       </p:sp>
       <p:sp>
         <p:nvSpPr>
-          <p:cNvPr id="4" name="Text 1"/>
-          <p:cNvSpPr txBox="1"/>
-          <p:nvPr/>
-        </p:nvSpPr>
-        <p:spPr>
-          <a:xfrm>
-            <a:off x="812800" y="812800"/>
-            <a:ext cx="10566400" cy="215900"/>
-          </a:xfrm>
-          <a:prstGeom prst="rect">
-            <a:avLst/>
-          </a:prstGeom>
-          <a:noFill/>
-          <a:ln/>
-        </p:spPr>
-        <p:txBody>
-          <a:bodyPr wrap="square" lIns="0" tIns="0" rIns="0" bIns="0" rtlCol="0" anchor="t"/>
-          <a:lstStyle/>
-          <a:p>
-            <a:pPr algn="l" indent="0" marL="0">
-              <a:lnSpc>
-                <a:spcPct val="120000"/>
-              </a:lnSpc>
-              <a:buNone/>
-            </a:pPr>
-            <a:r>
-              <a:rPr lang="en-US" sz="1200" b="1" dirty="0">
-                <a:solidFill>
-                  <a:srgbClr val="4A5056"/>
-                </a:solidFill>
-              </a:rPr>
-              <a:t>Pour la Ville de Saguenay</a:t>
-            </a:r>
-            <a:endParaRPr lang="en-US" sz="1200" dirty="0"/>
-          </a:p>
-        </p:txBody>
-      </p:sp>
-      <p:sp>
-        <p:nvSpPr>
-          <p:cNvPr id="5" name="Text 2"/>
-          <p:cNvSpPr txBox="1"/>
-          <p:nvPr/>
-        </p:nvSpPr>
-        <p:spPr>
-          <a:xfrm>
-            <a:off x="812800" y="1905000"/>
-            <a:ext cx="6604000" cy="952500"/>
-          </a:xfrm>
-          <a:prstGeom prst="rect">
-            <a:avLst/>
-          </a:prstGeom>
-          <a:noFill/>
-          <a:ln/>
-        </p:spPr>
-        <p:txBody>
-          <a:bodyPr wrap="square" lIns="0" tIns="0" rIns="0" bIns="0" rtlCol="0" anchor="t"/>
-          <a:lstStyle/>
-          <a:p>
-            <a:pPr algn="l" indent="0" marL="0">
-              <a:lnSpc>
-                <a:spcPct val="140000"/>
-              </a:lnSpc>
-              <a:buNone/>
-            </a:pPr>
-            <a:r>
-              <a:rPr lang="en-US" sz="1600" dirty="0">
-                <a:solidFill>
-                  <a:srgbClr val="4A5056"/>
-                </a:solidFill>
-              </a:rPr>
-              <a:t>Vos avis d’aqueduc rejoignent les personnes inscrites aux appels automatisés. L’app les montrerait aussi à tous ceux qui ont entré leur adresse, dès que l’avis tombe.</a:t>
-            </a:r>
-            <a:endParaRPr lang="en-US" sz="1600" dirty="0"/>
-          </a:p>
-        </p:txBody>
-      </p:sp>
-      <p:sp>
-        <p:nvSpPr>
-          <p:cNvPr id="6" name="Text 3"/>
-          <p:cNvSpPr txBox="1"/>
-          <p:nvPr/>
-        </p:nvSpPr>
-        <p:spPr>
-          <a:xfrm>
-            <a:off x="812800" y="3200400"/>
-            <a:ext cx="6604000" cy="266700"/>
-          </a:xfrm>
-          <a:prstGeom prst="rect">
-            <a:avLst/>
-          </a:prstGeom>
-          <a:noFill/>
-          <a:ln/>
-        </p:spPr>
-        <p:txBody>
-          <a:bodyPr wrap="square" lIns="0" tIns="0" rIns="0" bIns="0" rtlCol="0" anchor="t"/>
-          <a:lstStyle/>
-          <a:p>
-            <a:pPr algn="l" indent="0" marL="0">
-              <a:lnSpc>
-                <a:spcPct val="120000"/>
-              </a:lnSpc>
-              <a:buNone/>
-            </a:pPr>
-            <a:r>
-              <a:rPr lang="en-US" sz="1600" b="1" dirty="0">
-                <a:solidFill>
-                  <a:srgbClr val="121417"/>
-                </a:solidFill>
-              </a:rPr>
-              <a:t>Ce que je vous demande</a:t>
-            </a:r>
-            <a:endParaRPr lang="en-US" sz="1600" dirty="0"/>
-          </a:p>
-        </p:txBody>
-      </p:sp>
-      <p:sp>
-        <p:nvSpPr>
-          <p:cNvPr id="7" name="Text 4"/>
-          <p:cNvSpPr txBox="1"/>
-          <p:nvPr/>
-        </p:nvSpPr>
-        <p:spPr>
-          <a:xfrm>
-            <a:off x="812800" y="3581400"/>
-            <a:ext cx="6604000" cy="1270000"/>
-          </a:xfrm>
-          <a:prstGeom prst="rect">
-            <a:avLst/>
-          </a:prstGeom>
-          <a:noFill/>
-          <a:ln/>
-        </p:spPr>
-        <p:txBody>
-          <a:bodyPr wrap="square" lIns="0" tIns="0" rIns="0" bIns="0" rtlCol="0" anchor="t"/>
-          <a:lstStyle/>
-          <a:p>
-            <a:pPr marL="279400" indent="-279400">
-              <a:lnSpc>
-                <a:spcPct val="125000"/>
-              </a:lnSpc>
-              <a:spcAft>
-                <a:spcPts val="400"/>
-              </a:spcAft>
-              <a:buSzPct val="100000"/>
-              <a:buFont typeface="+mj-lt"/>
-              <a:buAutoNum type="arabicPeriod" startAt="1"/>
-            </a:pPr>
-            <a:r>
-              <a:rPr lang="en-US" sz="1400" dirty="0">
-                <a:solidFill>
-                  <a:srgbClr val="121417"/>
-                </a:solidFill>
-              </a:rPr>
-              <a:t>Votre accord écrit pour publier les collectes et les avis, déjà branchés.</a:t>
-            </a:r>
-            <a:endParaRPr lang="en-US" sz="1400" dirty="0"/>
-          </a:p>
-          <a:p>
-            <a:pPr marL="279400" indent="-279400">
-              <a:lnSpc>
-                <a:spcPct val="125000"/>
-              </a:lnSpc>
-              <a:spcAft>
-                <a:spcPts val="400"/>
-              </a:spcAft>
-              <a:buSzPct val="100000"/>
-              <a:buFont typeface="+mj-lt"/>
-              <a:buAutoNum type="arabicPeriod" startAt="1"/>
-            </a:pPr>
-            <a:r>
-              <a:rPr lang="en-US" sz="1400" dirty="0">
-                <a:solidFill>
-                  <a:srgbClr val="121417"/>
-                </a:solidFill>
-              </a:rPr>
-              <a:t>Si possible, les avis sur Données Québec, comme à Repentigny.</a:t>
-            </a:r>
-            <a:endParaRPr lang="en-US" sz="1400" dirty="0"/>
-          </a:p>
-          <a:p>
-            <a:pPr marL="279400" indent="-279400">
-              <a:lnSpc>
-                <a:spcPct val="125000"/>
-              </a:lnSpc>
-              <a:spcAft>
-                <a:spcPts val="400"/>
-              </a:spcAft>
-              <a:buSzPct val="100000"/>
-              <a:buFont typeface="+mj-lt"/>
-              <a:buAutoNum type="arabicPeriod" startAt="1"/>
-            </a:pPr>
-            <a:r>
-              <a:rPr lang="en-US" sz="1400" dirty="0">
-                <a:solidFill>
-                  <a:srgbClr val="121417"/>
-                </a:solidFill>
-              </a:rPr>
-              <a:t>Votre OK pour le nom, sans logo de la Ville.</a:t>
-            </a:r>
-            <a:endParaRPr lang="en-US" sz="1400" dirty="0"/>
-          </a:p>
-        </p:txBody>
-      </p:sp>
-      <p:sp>
-        <p:nvSpPr>
-          <p:cNvPr id="8" name="chiffre"/>
+          <p:cNvPr id="4" name="publiable"/>
           <p:cNvSpPr/>
           <p:nvPr/>
         </p:nvSpPr>
         <p:spPr>
           <a:xfrm>
-            <a:off x="7823200" y="1905000"/>
-            <a:ext cx="3556000" cy="2603500"/>
+            <a:off x="812800" y="1574800"/>
+            <a:ext cx="5194300" cy="2794000"/>
           </a:xfrm>
           <a:prstGeom prst="roundRect">
             <a:avLst>
-              <a:gd name="adj" fmla="val 7805"/>
+              <a:gd name="adj" fmla="val 7273"/>
             </a:avLst>
           </a:prstGeom>
           <a:solidFill>
-            <a:srgbClr val="FFD02B"/>
+            <a:srgbClr val="FFFFFF"/>
           </a:solidFill>
           <a:ln/>
         </p:spPr>
       </p:sp>
       <p:sp>
         <p:nvSpPr>
+          <p:cNvPr id="5" name="Text 2"/>
+          <p:cNvSpPr txBox="1"/>
+          <p:nvPr/>
+        </p:nvSpPr>
+        <p:spPr>
+          <a:xfrm>
+            <a:off x="1117600" y="1879600"/>
+            <a:ext cx="4584700" cy="215900"/>
+          </a:xfrm>
+          <a:prstGeom prst="rect">
+            <a:avLst/>
+          </a:prstGeom>
+          <a:noFill/>
+          <a:ln/>
+        </p:spPr>
+        <p:txBody>
+          <a:bodyPr wrap="square" lIns="0" tIns="0" rIns="0" bIns="0" rtlCol="0" anchor="t"/>
+          <a:lstStyle/>
+          <a:p>
+            <a:pPr algn="l" indent="0" marL="0">
+              <a:lnSpc>
+                <a:spcPct val="120000"/>
+              </a:lnSpc>
+              <a:buNone/>
+            </a:pPr>
+            <a:r>
+              <a:rPr lang="en-US" sz="1200" b="1" dirty="0">
+                <a:solidFill>
+                  <a:srgbClr val="167A4B"/>
+                </a:solidFill>
+              </a:rPr>
+              <a:t>Données ouvertes, publiables dès maintenant</a:t>
+            </a:r>
+            <a:endParaRPr lang="en-US" sz="1200" dirty="0"/>
+          </a:p>
+        </p:txBody>
+      </p:sp>
+      <p:sp>
+        <p:nvSpPr>
+          <p:cNvPr id="6" name="Text 3"/>
+          <p:cNvSpPr txBox="1"/>
+          <p:nvPr/>
+        </p:nvSpPr>
+        <p:spPr>
+          <a:xfrm>
+            <a:off x="1117600" y="2286000"/>
+            <a:ext cx="4584700" cy="266700"/>
+          </a:xfrm>
+          <a:prstGeom prst="rect">
+            <a:avLst/>
+          </a:prstGeom>
+          <a:noFill/>
+          <a:ln/>
+        </p:spPr>
+        <p:txBody>
+          <a:bodyPr wrap="square" lIns="0" tIns="0" rIns="0" bIns="0" rtlCol="0" anchor="t"/>
+          <a:lstStyle/>
+          <a:p>
+            <a:pPr algn="l" indent="0" marL="0">
+              <a:lnSpc>
+                <a:spcPct val="120000"/>
+              </a:lnSpc>
+              <a:buNone/>
+            </a:pPr>
+            <a:r>
+              <a:rPr lang="en-US" sz="1600" b="1" dirty="0">
+                <a:solidFill>
+                  <a:srgbClr val="121417"/>
+                </a:solidFill>
+              </a:rPr>
+              <a:t>Stationnement et travaux</a:t>
+            </a:r>
+            <a:endParaRPr lang="en-US" sz="1600" dirty="0"/>
+          </a:p>
+        </p:txBody>
+      </p:sp>
+      <p:sp>
+        <p:nvSpPr>
+          <p:cNvPr id="7" name="Text 4"/>
+          <p:cNvSpPr txBox="1"/>
+          <p:nvPr/>
+        </p:nvSpPr>
+        <p:spPr>
+          <a:xfrm>
+            <a:off x="1117600" y="2578100"/>
+            <a:ext cx="4584700" cy="228600"/>
+          </a:xfrm>
+          <a:prstGeom prst="rect">
+            <a:avLst/>
+          </a:prstGeom>
+          <a:noFill/>
+          <a:ln/>
+        </p:spPr>
+        <p:txBody>
+          <a:bodyPr wrap="square" lIns="0" tIns="0" rIns="0" bIns="0" rtlCol="0" anchor="t"/>
+          <a:lstStyle/>
+          <a:p>
+            <a:pPr algn="l" indent="0" marL="0">
+              <a:lnSpc>
+                <a:spcPct val="120000"/>
+              </a:lnSpc>
+              <a:buNone/>
+            </a:pPr>
+            <a:r>
+              <a:rPr lang="en-US" sz="1200" dirty="0">
+                <a:solidFill>
+                  <a:srgbClr val="4A5056"/>
+                </a:solidFill>
+              </a:rPr>
+              <a:t>Règlement et carte de circulation de la Ville</a:t>
+            </a:r>
+            <a:endParaRPr lang="en-US" sz="1200" dirty="0"/>
+          </a:p>
+        </p:txBody>
+      </p:sp>
+      <p:sp>
+        <p:nvSpPr>
+          <p:cNvPr id="8" name="Text 5"/>
+          <p:cNvSpPr txBox="1"/>
+          <p:nvPr/>
+        </p:nvSpPr>
+        <p:spPr>
+          <a:xfrm>
+            <a:off x="1117600" y="2921000"/>
+            <a:ext cx="4584700" cy="266700"/>
+          </a:xfrm>
+          <a:prstGeom prst="rect">
+            <a:avLst/>
+          </a:prstGeom>
+          <a:noFill/>
+          <a:ln/>
+        </p:spPr>
+        <p:txBody>
+          <a:bodyPr wrap="square" lIns="0" tIns="0" rIns="0" bIns="0" rtlCol="0" anchor="t"/>
+          <a:lstStyle/>
+          <a:p>
+            <a:pPr algn="l" indent="0" marL="0">
+              <a:lnSpc>
+                <a:spcPct val="120000"/>
+              </a:lnSpc>
+              <a:buNone/>
+            </a:pPr>
+            <a:r>
+              <a:rPr lang="en-US" sz="1600" b="1" dirty="0">
+                <a:solidFill>
+                  <a:srgbClr val="121417"/>
+                </a:solidFill>
+              </a:rPr>
+              <a:t>Urgences et routes</a:t>
+            </a:r>
+            <a:endParaRPr lang="en-US" sz="1600" dirty="0"/>
+          </a:p>
+        </p:txBody>
+      </p:sp>
+      <p:sp>
+        <p:nvSpPr>
           <p:cNvPr id="9" name="Text 6"/>
           <p:cNvSpPr txBox="1"/>
           <p:nvPr/>
         </p:nvSpPr>
         <p:spPr>
           <a:xfrm>
-            <a:off x="8077200" y="2159000"/>
-            <a:ext cx="3048000" cy="787400"/>
-          </a:xfrm>
-          <a:prstGeom prst="rect">
-            <a:avLst/>
-          </a:prstGeom>
-          <a:noFill/>
-          <a:ln/>
-        </p:spPr>
-        <p:txBody>
-          <a:bodyPr wrap="square" lIns="0" tIns="0" rIns="0" bIns="0" rtlCol="0" anchor="t"/>
-          <a:lstStyle/>
-          <a:p>
-            <a:pPr algn="l" indent="0" marL="0">
-              <a:lnSpc>
-                <a:spcPct val="100000"/>
-              </a:lnSpc>
-              <a:buNone/>
-            </a:pPr>
-            <a:r>
-              <a:rPr lang="en-US" sz="6000" b="1" dirty="0">
-                <a:solidFill>
-                  <a:srgbClr val="1A1906"/>
-                </a:solidFill>
-              </a:rPr>
-              <a:t>1 248</a:t>
-            </a:r>
-            <a:endParaRPr lang="en-US" sz="6000" dirty="0"/>
+            <a:off x="1117600" y="3213100"/>
+            <a:ext cx="4584700" cy="228600"/>
+          </a:xfrm>
+          <a:prstGeom prst="rect">
+            <a:avLst/>
+          </a:prstGeom>
+          <a:noFill/>
+          <a:ln/>
+        </p:spPr>
+        <p:txBody>
+          <a:bodyPr wrap="square" lIns="0" tIns="0" rIns="0" bIns="0" rtlCol="0" anchor="t"/>
+          <a:lstStyle/>
+          <a:p>
+            <a:pPr algn="l" indent="0" marL="0">
+              <a:lnSpc>
+                <a:spcPct val="120000"/>
+              </a:lnSpc>
+              <a:buNone/>
+            </a:pPr>
+            <a:r>
+              <a:rPr lang="en-US" sz="1200" dirty="0">
+                <a:solidFill>
+                  <a:srgbClr val="4A5056"/>
+                </a:solidFill>
+              </a:rPr>
+              <a:t>Ministère de la Santé, Québec 511</a:t>
+            </a:r>
+            <a:endParaRPr lang="en-US" sz="1200" dirty="0"/>
           </a:p>
         </p:txBody>
       </p:sp>
@@ -4515,112 +4511,407 @@
         </p:nvSpPr>
         <p:spPr>
           <a:xfrm>
-            <a:off x="8077200" y="3009900"/>
-            <a:ext cx="3048000" cy="787400"/>
-          </a:xfrm>
-          <a:prstGeom prst="rect">
-            <a:avLst/>
-          </a:prstGeom>
-          <a:noFill/>
-          <a:ln/>
-        </p:spPr>
-        <p:txBody>
-          <a:bodyPr wrap="square" lIns="0" tIns="0" rIns="0" bIns="0" rtlCol="0" anchor="t"/>
-          <a:lstStyle/>
-          <a:p>
-            <a:pPr algn="l" indent="0" marL="0">
-              <a:lnSpc>
-                <a:spcPct val="130000"/>
+            <a:off x="1117600" y="3556000"/>
+            <a:ext cx="4584700" cy="266700"/>
+          </a:xfrm>
+          <a:prstGeom prst="rect">
+            <a:avLst/>
+          </a:prstGeom>
+          <a:noFill/>
+          <a:ln/>
+        </p:spPr>
+        <p:txBody>
+          <a:bodyPr wrap="square" lIns="0" tIns="0" rIns="0" bIns="0" rtlCol="0" anchor="t"/>
+          <a:lstStyle/>
+          <a:p>
+            <a:pPr algn="l" indent="0" marL="0">
+              <a:lnSpc>
+                <a:spcPct val="120000"/>
+              </a:lnSpc>
+              <a:buNone/>
+            </a:pPr>
+            <a:r>
+              <a:rPr lang="en-US" sz="1600" b="1" dirty="0">
+                <a:solidFill>
+                  <a:srgbClr val="121417"/>
+                </a:solidFill>
+              </a:rPr>
+              <a:t>Météo, air et électricité</a:t>
+            </a:r>
+            <a:endParaRPr lang="en-US" sz="1600" dirty="0"/>
+          </a:p>
+        </p:txBody>
+      </p:sp>
+      <p:sp>
+        <p:nvSpPr>
+          <p:cNvPr id="11" name="Text 8"/>
+          <p:cNvSpPr txBox="1"/>
+          <p:nvPr/>
+        </p:nvSpPr>
+        <p:spPr>
+          <a:xfrm>
+            <a:off x="1117600" y="3848100"/>
+            <a:ext cx="4584700" cy="228600"/>
+          </a:xfrm>
+          <a:prstGeom prst="rect">
+            <a:avLst/>
+          </a:prstGeom>
+          <a:noFill/>
+          <a:ln/>
+        </p:spPr>
+        <p:txBody>
+          <a:bodyPr wrap="square" lIns="0" tIns="0" rIns="0" bIns="0" rtlCol="0" anchor="t"/>
+          <a:lstStyle/>
+          <a:p>
+            <a:pPr algn="l" indent="0" marL="0">
+              <a:lnSpc>
+                <a:spcPct val="120000"/>
+              </a:lnSpc>
+              <a:buNone/>
+            </a:pPr>
+            <a:r>
+              <a:rPr lang="en-US" sz="1200" dirty="0">
+                <a:solidFill>
+                  <a:srgbClr val="4A5056"/>
+                </a:solidFill>
+              </a:rPr>
+              <a:t>Environnement Canada, Hydro-Québec, qualité de l’air, feux</a:t>
+            </a:r>
+            <a:endParaRPr lang="en-US" sz="1200" dirty="0"/>
+          </a:p>
+        </p:txBody>
+      </p:sp>
+      <p:sp>
+        <p:nvSpPr>
+          <p:cNvPr id="12" name="à publier avec accord"/>
+          <p:cNvSpPr/>
+          <p:nvPr/>
+        </p:nvSpPr>
+        <p:spPr>
+          <a:xfrm>
+            <a:off x="6184900" y="1574800"/>
+            <a:ext cx="5194300" cy="2794000"/>
+          </a:xfrm>
+          <a:prstGeom prst="roundRect">
+            <a:avLst>
+              <a:gd name="adj" fmla="val 7273"/>
+            </a:avLst>
+          </a:prstGeom>
+          <a:solidFill>
+            <a:srgbClr val="FFFFFF"/>
+          </a:solidFill>
+          <a:ln/>
+        </p:spPr>
+      </p:sp>
+      <p:sp>
+        <p:nvSpPr>
+          <p:cNvPr id="13" name="Text 10"/>
+          <p:cNvSpPr txBox="1"/>
+          <p:nvPr/>
+        </p:nvSpPr>
+        <p:spPr>
+          <a:xfrm>
+            <a:off x="6489700" y="1879600"/>
+            <a:ext cx="4584700" cy="215900"/>
+          </a:xfrm>
+          <a:prstGeom prst="rect">
+            <a:avLst/>
+          </a:prstGeom>
+          <a:noFill/>
+          <a:ln/>
+        </p:spPr>
+        <p:txBody>
+          <a:bodyPr wrap="square" lIns="0" tIns="0" rIns="0" bIns="0" rtlCol="0" anchor="t"/>
+          <a:lstStyle/>
+          <a:p>
+            <a:pPr algn="l" indent="0" marL="0">
+              <a:lnSpc>
+                <a:spcPct val="120000"/>
+              </a:lnSpc>
+              <a:buNone/>
+            </a:pPr>
+            <a:r>
+              <a:rPr lang="en-US" sz="1200" b="1" dirty="0">
+                <a:solidFill>
+                  <a:srgbClr val="8F6200"/>
+                </a:solidFill>
+              </a:rPr>
+              <a:t>Déjà branché, à publier avec votre accord</a:t>
+            </a:r>
+            <a:endParaRPr lang="en-US" sz="1200" dirty="0"/>
+          </a:p>
+        </p:txBody>
+      </p:sp>
+      <p:sp>
+        <p:nvSpPr>
+          <p:cNvPr id="14" name="Text 11"/>
+          <p:cNvSpPr txBox="1"/>
+          <p:nvPr/>
+        </p:nvSpPr>
+        <p:spPr>
+          <a:xfrm>
+            <a:off x="6489700" y="2286000"/>
+            <a:ext cx="4584700" cy="266700"/>
+          </a:xfrm>
+          <a:prstGeom prst="rect">
+            <a:avLst/>
+          </a:prstGeom>
+          <a:noFill/>
+          <a:ln/>
+        </p:spPr>
+        <p:txBody>
+          <a:bodyPr wrap="square" lIns="0" tIns="0" rIns="0" bIns="0" rtlCol="0" anchor="t"/>
+          <a:lstStyle/>
+          <a:p>
+            <a:pPr algn="l" indent="0" marL="0">
+              <a:lnSpc>
+                <a:spcPct val="120000"/>
+              </a:lnSpc>
+              <a:buNone/>
+            </a:pPr>
+            <a:r>
+              <a:rPr lang="en-US" sz="1600" b="1" dirty="0">
+                <a:solidFill>
+                  <a:srgbClr val="121417"/>
+                </a:solidFill>
+              </a:rPr>
+              <a:t>Collectes</a:t>
+            </a:r>
+            <a:endParaRPr lang="en-US" sz="1600" dirty="0"/>
+          </a:p>
+        </p:txBody>
+      </p:sp>
+      <p:sp>
+        <p:nvSpPr>
+          <p:cNvPr id="15" name="Text 12"/>
+          <p:cNvSpPr txBox="1"/>
+          <p:nvPr/>
+        </p:nvSpPr>
+        <p:spPr>
+          <a:xfrm>
+            <a:off x="6489700" y="2578100"/>
+            <a:ext cx="4584700" cy="228600"/>
+          </a:xfrm>
+          <a:prstGeom prst="rect">
+            <a:avLst/>
+          </a:prstGeom>
+          <a:noFill/>
+          <a:ln/>
+        </p:spPr>
+        <p:txBody>
+          <a:bodyPr wrap="square" lIns="0" tIns="0" rIns="0" bIns="0" rtlCol="0" anchor="t"/>
+          <a:lstStyle/>
+          <a:p>
+            <a:pPr algn="l" indent="0" marL="0">
+              <a:lnSpc>
+                <a:spcPct val="120000"/>
+              </a:lnSpc>
+              <a:buNone/>
+            </a:pPr>
+            <a:r>
+              <a:rPr lang="en-US" sz="1200" dirty="0">
+                <a:solidFill>
+                  <a:srgbClr val="4A5056"/>
+                </a:solidFill>
+              </a:rPr>
+              <a:t>Le calendrier de la Ville, pour n’importe quelle adresse</a:t>
+            </a:r>
+            <a:endParaRPr lang="en-US" sz="1200" dirty="0"/>
+          </a:p>
+        </p:txBody>
+      </p:sp>
+      <p:sp>
+        <p:nvSpPr>
+          <p:cNvPr id="16" name="Text 13"/>
+          <p:cNvSpPr txBox="1"/>
+          <p:nvPr/>
+        </p:nvSpPr>
+        <p:spPr>
+          <a:xfrm>
+            <a:off x="6489700" y="2921000"/>
+            <a:ext cx="4584700" cy="266700"/>
+          </a:xfrm>
+          <a:prstGeom prst="rect">
+            <a:avLst/>
+          </a:prstGeom>
+          <a:noFill/>
+          <a:ln/>
+        </p:spPr>
+        <p:txBody>
+          <a:bodyPr wrap="square" lIns="0" tIns="0" rIns="0" bIns="0" rtlCol="0" anchor="t"/>
+          <a:lstStyle/>
+          <a:p>
+            <a:pPr algn="l" indent="0" marL="0">
+              <a:lnSpc>
+                <a:spcPct val="120000"/>
+              </a:lnSpc>
+              <a:buNone/>
+            </a:pPr>
+            <a:r>
+              <a:rPr lang="en-US" sz="1600" b="1" dirty="0">
+                <a:solidFill>
+                  <a:srgbClr val="121417"/>
+                </a:solidFill>
+              </a:rPr>
+              <a:t>Avis d’aqueduc</a:t>
+            </a:r>
+            <a:endParaRPr lang="en-US" sz="1600" dirty="0"/>
+          </a:p>
+        </p:txBody>
+      </p:sp>
+      <p:sp>
+        <p:nvSpPr>
+          <p:cNvPr id="17" name="Text 14"/>
+          <p:cNvSpPr txBox="1"/>
+          <p:nvPr/>
+        </p:nvSpPr>
+        <p:spPr>
+          <a:xfrm>
+            <a:off x="6489700" y="3213100"/>
+            <a:ext cx="4584700" cy="228600"/>
+          </a:xfrm>
+          <a:prstGeom prst="rect">
+            <a:avLst/>
+          </a:prstGeom>
+          <a:noFill/>
+          <a:ln/>
+        </p:spPr>
+        <p:txBody>
+          <a:bodyPr wrap="square" lIns="0" tIns="0" rIns="0" bIns="0" rtlCol="0" anchor="t"/>
+          <a:lstStyle/>
+          <a:p>
+            <a:pPr algn="l" indent="0" marL="0">
+              <a:lnSpc>
+                <a:spcPct val="120000"/>
+              </a:lnSpc>
+              <a:buNone/>
+            </a:pPr>
+            <a:r>
+              <a:rPr lang="en-US" sz="1200" dirty="0">
+                <a:solidFill>
+                  <a:srgbClr val="4A5056"/>
+                </a:solidFill>
+              </a:rPr>
+              <a:t>La carte de la Ville, zone par zone</a:t>
+            </a:r>
+            <a:endParaRPr lang="en-US" sz="1200" dirty="0"/>
+          </a:p>
+        </p:txBody>
+      </p:sp>
+      <p:sp>
+        <p:nvSpPr>
+          <p:cNvPr id="18" name="Text 15"/>
+          <p:cNvSpPr txBox="1"/>
+          <p:nvPr/>
+        </p:nvSpPr>
+        <p:spPr>
+          <a:xfrm>
+            <a:off x="6489700" y="3556000"/>
+            <a:ext cx="4584700" cy="266700"/>
+          </a:xfrm>
+          <a:prstGeom prst="rect">
+            <a:avLst/>
+          </a:prstGeom>
+          <a:noFill/>
+          <a:ln/>
+        </p:spPr>
+        <p:txBody>
+          <a:bodyPr wrap="square" lIns="0" tIns="0" rIns="0" bIns="0" rtlCol="0" anchor="t"/>
+          <a:lstStyle/>
+          <a:p>
+            <a:pPr algn="l" indent="0" marL="0">
+              <a:lnSpc>
+                <a:spcPct val="120000"/>
+              </a:lnSpc>
+              <a:buNone/>
+            </a:pPr>
+            <a:r>
+              <a:rPr lang="en-US" sz="1600" b="1" dirty="0">
+                <a:solidFill>
+                  <a:srgbClr val="121417"/>
+                </a:solidFill>
+              </a:rPr>
+              <a:t>Bus</a:t>
+            </a:r>
+            <a:endParaRPr lang="en-US" sz="1600" dirty="0"/>
+          </a:p>
+        </p:txBody>
+      </p:sp>
+      <p:sp>
+        <p:nvSpPr>
+          <p:cNvPr id="19" name="Text 16"/>
+          <p:cNvSpPr txBox="1"/>
+          <p:nvPr/>
+        </p:nvSpPr>
+        <p:spPr>
+          <a:xfrm>
+            <a:off x="6489700" y="3848100"/>
+            <a:ext cx="4584700" cy="228600"/>
+          </a:xfrm>
+          <a:prstGeom prst="rect">
+            <a:avLst/>
+          </a:prstGeom>
+          <a:noFill/>
+          <a:ln/>
+        </p:spPr>
+        <p:txBody>
+          <a:bodyPr wrap="square" lIns="0" tIns="0" rIns="0" bIns="0" rtlCol="0" anchor="t"/>
+          <a:lstStyle/>
+          <a:p>
+            <a:pPr algn="l" indent="0" marL="0">
+              <a:lnSpc>
+                <a:spcPct val="120000"/>
+              </a:lnSpc>
+              <a:buNone/>
+            </a:pPr>
+            <a:r>
+              <a:rPr lang="en-US" sz="1200" dirty="0">
+                <a:solidFill>
+                  <a:srgbClr val="4A5056"/>
+                </a:solidFill>
+              </a:rPr>
+              <a:t>L’horaire et les retards en temps réel de la STS</a:t>
+            </a:r>
+            <a:endParaRPr lang="en-US" sz="1200" dirty="0"/>
+          </a:p>
+        </p:txBody>
+      </p:sp>
+      <p:sp>
+        <p:nvSpPr>
+          <p:cNvPr id="20" name="Text 17"/>
+          <p:cNvSpPr txBox="1"/>
+          <p:nvPr/>
+        </p:nvSpPr>
+        <p:spPr>
+          <a:xfrm>
+            <a:off x="812800" y="4648200"/>
+            <a:ext cx="10566400" cy="533400"/>
+          </a:xfrm>
+          <a:prstGeom prst="rect">
+            <a:avLst/>
+          </a:prstGeom>
+          <a:noFill/>
+          <a:ln/>
+        </p:spPr>
+        <p:txBody>
+          <a:bodyPr wrap="square" lIns="0" tIns="0" rIns="0" bIns="0" rtlCol="0" anchor="t"/>
+          <a:lstStyle/>
+          <a:p>
+            <a:pPr algn="l" indent="0" marL="0">
+              <a:lnSpc>
+                <a:spcPct val="135000"/>
               </a:lnSpc>
               <a:buNone/>
             </a:pPr>
             <a:r>
               <a:rPr lang="en-US" sz="1400" dirty="0">
                 <a:solidFill>
-                  <a:srgbClr val="1A1906"/>
-                </a:solidFill>
-              </a:rPr>
-              <a:t>résidences visées par les avis de ce matin n’avaient pas été jointes par téléphone.</a:t>
+                  <a:srgbClr val="4A5056"/>
+                </a:solidFill>
+              </a:rPr>
+              <a:t>Pas encore possible : savoir quand la déneigeuse passe dans ta rue. Rien n’est public là-dessus pour l’instant.</a:t>
             </a:r>
             <a:endParaRPr lang="en-US" sz="1400" dirty="0"/>
-          </a:p>
-        </p:txBody>
-      </p:sp>
-      <p:sp>
-        <p:nvSpPr>
-          <p:cNvPr id="11" name="Text 8"/>
-          <p:cNvSpPr txBox="1"/>
-          <p:nvPr/>
-        </p:nvSpPr>
-        <p:spPr>
-          <a:xfrm>
-            <a:off x="8077200" y="3860800"/>
-            <a:ext cx="3048000" cy="444500"/>
-          </a:xfrm>
-          <a:prstGeom prst="rect">
-            <a:avLst/>
-          </a:prstGeom>
-          <a:noFill/>
-          <a:ln/>
-        </p:spPr>
-        <p:txBody>
-          <a:bodyPr wrap="square" lIns="0" tIns="0" rIns="0" bIns="0" rtlCol="0" anchor="t"/>
-          <a:lstStyle/>
-          <a:p>
-            <a:pPr algn="l" indent="0" marL="0">
-              <a:lnSpc>
-                <a:spcPct val="130000"/>
-              </a:lnSpc>
-              <a:buNone/>
-            </a:pPr>
-            <a:r>
-              <a:rPr lang="en-US" sz="1200" dirty="0">
-                <a:solidFill>
-                  <a:srgbClr val="1A1906"/>
-                </a:solidFill>
-              </a:rPr>
-              <a:t>2 734 sur 3 982, selon votre carte des avis. À vérifier ensemble.</a:t>
-            </a:r>
-            <a:endParaRPr lang="en-US" sz="1200" dirty="0"/>
-          </a:p>
-        </p:txBody>
-      </p:sp>
-      <p:sp>
-        <p:nvSpPr>
-          <p:cNvPr id="12" name="Text 9"/>
-          <p:cNvSpPr txBox="1"/>
-          <p:nvPr/>
-        </p:nvSpPr>
-        <p:spPr>
-          <a:xfrm>
-            <a:off x="1041400" y="6286500"/>
-            <a:ext cx="5080000" cy="190500"/>
-          </a:xfrm>
-          <a:prstGeom prst="rect">
-            <a:avLst/>
-          </a:prstGeom>
-          <a:noFill/>
-          <a:ln/>
-        </p:spPr>
-        <p:txBody>
-          <a:bodyPr wrap="square" lIns="0" tIns="0" rIns="0" bIns="0" rtlCol="0" anchor="t"/>
-          <a:lstStyle/>
-          <a:p>
-            <a:pPr algn="l" indent="0" marL="0">
-              <a:lnSpc>
-                <a:spcPct val="120000"/>
-              </a:lnSpc>
-              <a:buNone/>
-            </a:pPr>
-            <a:r>
-              <a:rPr lang="en-US" sz="1200" dirty="0">
-                <a:solidFill>
-                  <a:srgbClr val="868C92"/>
-                </a:solidFill>
-              </a:rPr>
-              <a:t>· donneesouvertes@ville.saguenay.qc.ca</a:t>
-            </a:r>
-            <a:endParaRPr lang="en-US" sz="1200" dirty="0"/>
           </a:p>
         </p:txBody>
       </p:sp>
@@ -4729,7 +5020,7 @@
                   <a:srgbClr val="121417"/>
                 </a:solidFill>
               </a:rPr>
-              <a:t>Le prochain départ, sur l’écran d’accueil</a:t>
+              <a:t>Quand l’eau est touchée, prévenir tout le monde</a:t>
             </a:r>
             <a:endParaRPr lang="en-US" sz="3600" dirty="0"/>
           </a:p>
@@ -4768,7 +5059,7 @@
                   <a:srgbClr val="4A5056"/>
                 </a:solidFill>
               </a:rPr>
-              <a:t>Pour la Société de transport du Saguenay</a:t>
+              <a:t>Pour la Ville de Saguenay</a:t>
             </a:r>
             <a:endParaRPr lang="en-US" sz="1200" dirty="0"/>
           </a:p>
@@ -4783,7 +5074,7 @@
         <p:spPr>
           <a:xfrm>
             <a:off x="812800" y="1905000"/>
-            <a:ext cx="6350000" cy="1270000"/>
+            <a:ext cx="6604000" cy="952500"/>
           </a:xfrm>
           <a:prstGeom prst="rect">
             <a:avLst/>
@@ -4807,7 +5098,7 @@
                   <a:srgbClr val="4A5056"/>
                 </a:solidFill>
               </a:rPr>
-              <a:t>Votre nouveau système publie des horaires et du temps réel de très bonne qualité. L’app les lit déjà, retards compris. Il manque seulement une licence pour la publier. Pour planifier un trajet, l’app renvoie vers Transit.</a:t>
+              <a:t>Vos avis d’aqueduc rejoignent les personnes inscrites aux appels automatisés. L’app les montrerait aussi à tous ceux qui ont entré leur adresse, dès que l’avis tombe.</a:t>
             </a:r>
             <a:endParaRPr lang="en-US" sz="1600" dirty="0"/>
           </a:p>
@@ -4821,8 +5112,8 @@
         </p:nvSpPr>
         <p:spPr>
           <a:xfrm>
-            <a:off x="812800" y="3556000"/>
-            <a:ext cx="6350000" cy="266700"/>
+            <a:off x="812800" y="3200400"/>
+            <a:ext cx="6604000" cy="266700"/>
           </a:xfrm>
           <a:prstGeom prst="rect">
             <a:avLst/>
@@ -4860,8 +5151,8 @@
         </p:nvSpPr>
         <p:spPr>
           <a:xfrm>
-            <a:off x="812800" y="3937000"/>
-            <a:ext cx="6350000" cy="1079500"/>
+            <a:off x="812800" y="3581400"/>
+            <a:ext cx="6604000" cy="1270000"/>
           </a:xfrm>
           <a:prstGeom prst="rect">
             <a:avLst/>
@@ -4890,7 +5181,7 @@
                   <a:srgbClr val="121417"/>
                 </a:solidFill>
               </a:rPr>
-              <a:t>Une licence CC BY 4.0, comme la STM et la STL.</a:t>
+              <a:t>Votre accord écrit pour publier les collectes et les avis, déjà branchés.</a:t>
             </a:r>
             <a:endParaRPr lang="en-US" sz="1400" dirty="0"/>
           </a:p>
@@ -4912,7 +5203,7 @@
                   <a:srgbClr val="121417"/>
                 </a:solidFill>
               </a:rPr>
-              <a:t>Une adresse de flux qui ne change pas sans avertissement.</a:t>
+              <a:t>Si possible, les avis sur Données Québec, comme à Repentigny.</a:t>
             </a:r>
             <a:endParaRPr lang="en-US" sz="1400" dirty="0"/>
           </a:p>
@@ -4934,7 +5225,7 @@
                   <a:srgbClr val="121417"/>
                 </a:solidFill>
               </a:rPr>
-              <a:t>Le lien entre vos numéros d’arrêt (SMS au 22237) et le flux.</a:t>
+              <a:t>Votre OK pour le nom, sans logo de la Ville.</a:t>
             </a:r>
             <a:endParaRPr lang="en-US" sz="1400" dirty="0"/>
           </a:p>
@@ -4942,22 +5233,22 @@
       </p:sp>
       <p:sp>
         <p:nvSpPr>
-          <p:cNvPr id="8" name="horaire"/>
+          <p:cNvPr id="8" name="chiffre"/>
           <p:cNvSpPr/>
           <p:nvPr/>
         </p:nvSpPr>
         <p:spPr>
           <a:xfrm>
-            <a:off x="7569200" y="1905000"/>
-            <a:ext cx="3810000" cy="2476500"/>
+            <a:off x="7823200" y="1905000"/>
+            <a:ext cx="3556000" cy="2603500"/>
           </a:xfrm>
           <a:prstGeom prst="roundRect">
             <a:avLst>
-              <a:gd name="adj" fmla="val 8205"/>
+              <a:gd name="adj" fmla="val 7805"/>
             </a:avLst>
           </a:prstGeom>
           <a:solidFill>
-            <a:srgbClr val="FFFFFF"/>
+            <a:srgbClr val="FFD02B"/>
           </a:solidFill>
           <a:ln/>
         </p:spPr>
@@ -4970,32 +5261,110 @@
         </p:nvSpPr>
         <p:spPr>
           <a:xfrm>
-            <a:off x="7823200" y="2159000"/>
-            <a:ext cx="3302000" cy="215900"/>
-          </a:xfrm>
-          <a:prstGeom prst="rect">
-            <a:avLst/>
-          </a:prstGeom>
-          <a:noFill/>
-          <a:ln/>
-        </p:spPr>
-        <p:txBody>
-          <a:bodyPr wrap="square" lIns="0" tIns="0" rIns="0" bIns="0" rtlCol="0" anchor="t"/>
-          <a:lstStyle/>
-          <a:p>
-            <a:pPr algn="l" indent="0" marL="0">
-              <a:lnSpc>
-                <a:spcPct val="120000"/>
-              </a:lnSpc>
-              <a:buNone/>
-            </a:pPr>
-            <a:r>
-              <a:rPr lang="en-US" sz="1200" b="1" dirty="0">
-                <a:solidFill>
-                  <a:srgbClr val="868C92"/>
-                </a:solidFill>
-              </a:rPr>
-              <a:t>Arrêt 150, Racine Est</a:t>
+            <a:off x="8077200" y="2159000"/>
+            <a:ext cx="3048000" cy="787400"/>
+          </a:xfrm>
+          <a:prstGeom prst="rect">
+            <a:avLst/>
+          </a:prstGeom>
+          <a:noFill/>
+          <a:ln/>
+        </p:spPr>
+        <p:txBody>
+          <a:bodyPr wrap="square" lIns="0" tIns="0" rIns="0" bIns="0" rtlCol="0" anchor="t"/>
+          <a:lstStyle/>
+          <a:p>
+            <a:pPr algn="l" indent="0" marL="0">
+              <a:lnSpc>
+                <a:spcPct val="100000"/>
+              </a:lnSpc>
+              <a:buNone/>
+            </a:pPr>
+            <a:r>
+              <a:rPr lang="en-US" sz="6000" b="1" dirty="0">
+                <a:solidFill>
+                  <a:srgbClr val="1A1906"/>
+                </a:solidFill>
+              </a:rPr>
+              <a:t>1 248</a:t>
+            </a:r>
+            <a:endParaRPr lang="en-US" sz="6000" dirty="0"/>
+          </a:p>
+        </p:txBody>
+      </p:sp>
+      <p:sp>
+        <p:nvSpPr>
+          <p:cNvPr id="10" name="Text 7"/>
+          <p:cNvSpPr txBox="1"/>
+          <p:nvPr/>
+        </p:nvSpPr>
+        <p:spPr>
+          <a:xfrm>
+            <a:off x="8077200" y="3009900"/>
+            <a:ext cx="3048000" cy="787400"/>
+          </a:xfrm>
+          <a:prstGeom prst="rect">
+            <a:avLst/>
+          </a:prstGeom>
+          <a:noFill/>
+          <a:ln/>
+        </p:spPr>
+        <p:txBody>
+          <a:bodyPr wrap="square" lIns="0" tIns="0" rIns="0" bIns="0" rtlCol="0" anchor="t"/>
+          <a:lstStyle/>
+          <a:p>
+            <a:pPr algn="l" indent="0" marL="0">
+              <a:lnSpc>
+                <a:spcPct val="130000"/>
+              </a:lnSpc>
+              <a:buNone/>
+            </a:pPr>
+            <a:r>
+              <a:rPr lang="en-US" sz="1400" dirty="0">
+                <a:solidFill>
+                  <a:srgbClr val="1A1906"/>
+                </a:solidFill>
+              </a:rPr>
+              <a:t>résidences visées par les avis de ce matin n’avaient pas été jointes par téléphone.</a:t>
+            </a:r>
+            <a:endParaRPr lang="en-US" sz="1400" dirty="0"/>
+          </a:p>
+        </p:txBody>
+      </p:sp>
+      <p:sp>
+        <p:nvSpPr>
+          <p:cNvPr id="11" name="Text 8"/>
+          <p:cNvSpPr txBox="1"/>
+          <p:nvPr/>
+        </p:nvSpPr>
+        <p:spPr>
+          <a:xfrm>
+            <a:off x="8077200" y="3860800"/>
+            <a:ext cx="3048000" cy="444500"/>
+          </a:xfrm>
+          <a:prstGeom prst="rect">
+            <a:avLst/>
+          </a:prstGeom>
+          <a:noFill/>
+          <a:ln/>
+        </p:spPr>
+        <p:txBody>
+          <a:bodyPr wrap="square" lIns="0" tIns="0" rIns="0" bIns="0" rtlCol="0" anchor="t"/>
+          <a:lstStyle/>
+          <a:p>
+            <a:pPr algn="l" indent="0" marL="0">
+              <a:lnSpc>
+                <a:spcPct val="130000"/>
+              </a:lnSpc>
+              <a:buNone/>
+            </a:pPr>
+            <a:r>
+              <a:rPr lang="en-US" sz="1200" dirty="0">
+                <a:solidFill>
+                  <a:srgbClr val="1A1906"/>
+                </a:solidFill>
+              </a:rPr>
+              <a:t>2 734 sur 3 982, selon votre carte des avis. À vérifier ensemble.</a:t>
             </a:r>
             <a:endParaRPr lang="en-US" sz="1200" dirty="0"/>
           </a:p>
@@ -5003,463 +5372,7 @@
       </p:sp>
       <p:sp>
         <p:nvSpPr>
-          <p:cNvPr id="10" name="Shape 7"/>
-          <p:cNvSpPr/>
-          <p:nvPr/>
-        </p:nvSpPr>
-        <p:spPr>
-          <a:xfrm>
-            <a:off x="7823200" y="2540000"/>
-            <a:ext cx="457200" cy="241300"/>
-          </a:xfrm>
-          <a:prstGeom prst="roundRect">
-            <a:avLst>
-              <a:gd name="adj" fmla="val 26316"/>
-            </a:avLst>
-          </a:prstGeom>
-          <a:solidFill>
-            <a:srgbClr val="2F6BEB"/>
-          </a:solidFill>
-          <a:ln/>
-        </p:spPr>
-      </p:sp>
-      <p:sp>
-        <p:nvSpPr>
-          <p:cNvPr id="11" name="Text 8"/>
-          <p:cNvSpPr txBox="1"/>
-          <p:nvPr/>
-        </p:nvSpPr>
-        <p:spPr>
-          <a:xfrm>
-            <a:off x="7823200" y="2540000"/>
-            <a:ext cx="457200" cy="241300"/>
-          </a:xfrm>
-          <a:prstGeom prst="rect">
-            <a:avLst/>
-          </a:prstGeom>
-          <a:noFill/>
-          <a:ln/>
-        </p:spPr>
-        <p:txBody>
-          <a:bodyPr wrap="square" lIns="0" tIns="0" rIns="0" bIns="0" rtlCol="0" anchor="ctr"/>
-          <a:lstStyle/>
-          <a:p>
-            <a:pPr algn="ctr" indent="0" marL="0">
-              <a:lnSpc>
-                <a:spcPct val="120000"/>
-              </a:lnSpc>
-              <a:buNone/>
-            </a:pPr>
-            <a:r>
-              <a:rPr lang="en-US" sz="1200" b="1" dirty="0">
-                <a:solidFill>
-                  <a:srgbClr val="FFFFFF"/>
-                </a:solidFill>
-              </a:rPr>
-              <a:t>105</a:t>
-            </a:r>
-            <a:endParaRPr lang="en-US" sz="1200" dirty="0"/>
-          </a:p>
-        </p:txBody>
-      </p:sp>
-      <p:sp>
-        <p:nvSpPr>
           <p:cNvPr id="12" name="Text 9"/>
-          <p:cNvSpPr txBox="1"/>
-          <p:nvPr/>
-        </p:nvSpPr>
-        <p:spPr>
-          <a:xfrm>
-            <a:off x="8394700" y="2514600"/>
-            <a:ext cx="1905000" cy="292100"/>
-          </a:xfrm>
-          <a:prstGeom prst="rect">
-            <a:avLst/>
-          </a:prstGeom>
-          <a:noFill/>
-          <a:ln/>
-        </p:spPr>
-        <p:txBody>
-          <a:bodyPr wrap="square" lIns="0" tIns="0" rIns="0" bIns="0" rtlCol="0" anchor="ctr"/>
-          <a:lstStyle/>
-          <a:p>
-            <a:pPr algn="l" indent="0" marL="0">
-              <a:lnSpc>
-                <a:spcPct val="120000"/>
-              </a:lnSpc>
-              <a:buNone/>
-            </a:pPr>
-            <a:r>
-              <a:rPr lang="en-US" sz="1200" dirty="0">
-                <a:solidFill>
-                  <a:srgbClr val="121417"/>
-                </a:solidFill>
-              </a:rPr>
-              <a:t>La Baie</a:t>
-            </a:r>
-            <a:endParaRPr lang="en-US" sz="1200" dirty="0"/>
-          </a:p>
-        </p:txBody>
-      </p:sp>
-      <p:sp>
-        <p:nvSpPr>
-          <p:cNvPr id="13" name="Text 10"/>
-          <p:cNvSpPr txBox="1"/>
-          <p:nvPr/>
-        </p:nvSpPr>
-        <p:spPr>
-          <a:xfrm>
-            <a:off x="10236200" y="2514600"/>
-            <a:ext cx="889000" cy="292100"/>
-          </a:xfrm>
-          <a:prstGeom prst="rect">
-            <a:avLst/>
-          </a:prstGeom>
-          <a:noFill/>
-          <a:ln/>
-        </p:spPr>
-        <p:txBody>
-          <a:bodyPr wrap="square" lIns="0" tIns="0" rIns="0" bIns="0" rtlCol="0" anchor="ctr"/>
-          <a:lstStyle/>
-          <a:p>
-            <a:pPr algn="r" indent="0" marL="0">
-              <a:lnSpc>
-                <a:spcPct val="120000"/>
-              </a:lnSpc>
-              <a:buNone/>
-            </a:pPr>
-            <a:r>
-              <a:rPr lang="en-US" sz="1600" b="1" dirty="0">
-                <a:solidFill>
-                  <a:srgbClr val="121417"/>
-                </a:solidFill>
-              </a:rPr>
-              <a:t>7 h 46</a:t>
-            </a:r>
-            <a:endParaRPr lang="en-US" sz="1600" dirty="0"/>
-          </a:p>
-        </p:txBody>
-      </p:sp>
-      <p:sp>
-        <p:nvSpPr>
-          <p:cNvPr id="14" name="Shape 11"/>
-          <p:cNvSpPr/>
-          <p:nvPr/>
-        </p:nvSpPr>
-        <p:spPr>
-          <a:xfrm>
-            <a:off x="7823200" y="2933700"/>
-            <a:ext cx="457200" cy="241300"/>
-          </a:xfrm>
-          <a:prstGeom prst="roundRect">
-            <a:avLst>
-              <a:gd name="adj" fmla="val 26316"/>
-            </a:avLst>
-          </a:prstGeom>
-          <a:solidFill>
-            <a:srgbClr val="2F6BEB"/>
-          </a:solidFill>
-          <a:ln/>
-        </p:spPr>
-      </p:sp>
-      <p:sp>
-        <p:nvSpPr>
-          <p:cNvPr id="15" name="Text 12"/>
-          <p:cNvSpPr txBox="1"/>
-          <p:nvPr/>
-        </p:nvSpPr>
-        <p:spPr>
-          <a:xfrm>
-            <a:off x="7823200" y="2933700"/>
-            <a:ext cx="457200" cy="241300"/>
-          </a:xfrm>
-          <a:prstGeom prst="rect">
-            <a:avLst/>
-          </a:prstGeom>
-          <a:noFill/>
-          <a:ln/>
-        </p:spPr>
-        <p:txBody>
-          <a:bodyPr wrap="square" lIns="0" tIns="0" rIns="0" bIns="0" rtlCol="0" anchor="ctr"/>
-          <a:lstStyle/>
-          <a:p>
-            <a:pPr algn="ctr" indent="0" marL="0">
-              <a:lnSpc>
-                <a:spcPct val="120000"/>
-              </a:lnSpc>
-              <a:buNone/>
-            </a:pPr>
-            <a:r>
-              <a:rPr lang="en-US" sz="1200" b="1" dirty="0">
-                <a:solidFill>
-                  <a:srgbClr val="FFFFFF"/>
-                </a:solidFill>
-              </a:rPr>
-              <a:t>10</a:t>
-            </a:r>
-            <a:endParaRPr lang="en-US" sz="1200" dirty="0"/>
-          </a:p>
-        </p:txBody>
-      </p:sp>
-      <p:sp>
-        <p:nvSpPr>
-          <p:cNvPr id="16" name="Text 13"/>
-          <p:cNvSpPr txBox="1"/>
-          <p:nvPr/>
-        </p:nvSpPr>
-        <p:spPr>
-          <a:xfrm>
-            <a:off x="8394700" y="2908300"/>
-            <a:ext cx="1905000" cy="292100"/>
-          </a:xfrm>
-          <a:prstGeom prst="rect">
-            <a:avLst/>
-          </a:prstGeom>
-          <a:noFill/>
-          <a:ln/>
-        </p:spPr>
-        <p:txBody>
-          <a:bodyPr wrap="square" lIns="0" tIns="0" rIns="0" bIns="0" rtlCol="0" anchor="ctr"/>
-          <a:lstStyle/>
-          <a:p>
-            <a:pPr algn="l" indent="0" marL="0">
-              <a:lnSpc>
-                <a:spcPct val="120000"/>
-              </a:lnSpc>
-              <a:buNone/>
-            </a:pPr>
-            <a:r>
-              <a:rPr lang="en-US" sz="1200" dirty="0">
-                <a:solidFill>
-                  <a:srgbClr val="121417"/>
-                </a:solidFill>
-              </a:rPr>
-              <a:t>UQAC</a:t>
-            </a:r>
-            <a:endParaRPr lang="en-US" sz="1200" dirty="0"/>
-          </a:p>
-        </p:txBody>
-      </p:sp>
-      <p:sp>
-        <p:nvSpPr>
-          <p:cNvPr id="17" name="Text 14"/>
-          <p:cNvSpPr txBox="1"/>
-          <p:nvPr/>
-        </p:nvSpPr>
-        <p:spPr>
-          <a:xfrm>
-            <a:off x="10236200" y="2908300"/>
-            <a:ext cx="889000" cy="292100"/>
-          </a:xfrm>
-          <a:prstGeom prst="rect">
-            <a:avLst/>
-          </a:prstGeom>
-          <a:noFill/>
-          <a:ln/>
-        </p:spPr>
-        <p:txBody>
-          <a:bodyPr wrap="square" lIns="0" tIns="0" rIns="0" bIns="0" rtlCol="0" anchor="ctr"/>
-          <a:lstStyle/>
-          <a:p>
-            <a:pPr algn="r" indent="0" marL="0">
-              <a:lnSpc>
-                <a:spcPct val="120000"/>
-              </a:lnSpc>
-              <a:buNone/>
-            </a:pPr>
-            <a:r>
-              <a:rPr lang="en-US" sz="1600" b="1" dirty="0">
-                <a:solidFill>
-                  <a:srgbClr val="121417"/>
-                </a:solidFill>
-              </a:rPr>
-              <a:t>7 h 47</a:t>
-            </a:r>
-            <a:endParaRPr lang="en-US" sz="1600" dirty="0"/>
-          </a:p>
-        </p:txBody>
-      </p:sp>
-      <p:sp>
-        <p:nvSpPr>
-          <p:cNvPr id="18" name="Shape 15"/>
-          <p:cNvSpPr/>
-          <p:nvPr/>
-        </p:nvSpPr>
-        <p:spPr>
-          <a:xfrm>
-            <a:off x="7823200" y="3327400"/>
-            <a:ext cx="457200" cy="241300"/>
-          </a:xfrm>
-          <a:prstGeom prst="roundRect">
-            <a:avLst>
-              <a:gd name="adj" fmla="val 26316"/>
-            </a:avLst>
-          </a:prstGeom>
-          <a:solidFill>
-            <a:srgbClr val="2F6BEB"/>
-          </a:solidFill>
-          <a:ln/>
-        </p:spPr>
-      </p:sp>
-      <p:sp>
-        <p:nvSpPr>
-          <p:cNvPr id="19" name="Text 16"/>
-          <p:cNvSpPr txBox="1"/>
-          <p:nvPr/>
-        </p:nvSpPr>
-        <p:spPr>
-          <a:xfrm>
-            <a:off x="7823200" y="3327400"/>
-            <a:ext cx="457200" cy="241300"/>
-          </a:xfrm>
-          <a:prstGeom prst="rect">
-            <a:avLst/>
-          </a:prstGeom>
-          <a:noFill/>
-          <a:ln/>
-        </p:spPr>
-        <p:txBody>
-          <a:bodyPr wrap="square" lIns="0" tIns="0" rIns="0" bIns="0" rtlCol="0" anchor="ctr"/>
-          <a:lstStyle/>
-          <a:p>
-            <a:pPr algn="ctr" indent="0" marL="0">
-              <a:lnSpc>
-                <a:spcPct val="120000"/>
-              </a:lnSpc>
-              <a:buNone/>
-            </a:pPr>
-            <a:r>
-              <a:rPr lang="en-US" sz="1200" b="1" dirty="0">
-                <a:solidFill>
-                  <a:srgbClr val="FFFFFF"/>
-                </a:solidFill>
-              </a:rPr>
-              <a:t>106</a:t>
-            </a:r>
-            <a:endParaRPr lang="en-US" sz="1200" dirty="0"/>
-          </a:p>
-        </p:txBody>
-      </p:sp>
-      <p:sp>
-        <p:nvSpPr>
-          <p:cNvPr id="20" name="Text 17"/>
-          <p:cNvSpPr txBox="1"/>
-          <p:nvPr/>
-        </p:nvSpPr>
-        <p:spPr>
-          <a:xfrm>
-            <a:off x="8394700" y="3302000"/>
-            <a:ext cx="1905000" cy="292100"/>
-          </a:xfrm>
-          <a:prstGeom prst="rect">
-            <a:avLst/>
-          </a:prstGeom>
-          <a:noFill/>
-          <a:ln/>
-        </p:spPr>
-        <p:txBody>
-          <a:bodyPr wrap="square" lIns="0" tIns="0" rIns="0" bIns="0" rtlCol="0" anchor="ctr"/>
-          <a:lstStyle/>
-          <a:p>
-            <a:pPr algn="l" indent="0" marL="0">
-              <a:lnSpc>
-                <a:spcPct val="120000"/>
-              </a:lnSpc>
-              <a:buNone/>
-            </a:pPr>
-            <a:r>
-              <a:rPr lang="en-US" sz="1200" dirty="0">
-                <a:solidFill>
-                  <a:srgbClr val="121417"/>
-                </a:solidFill>
-              </a:rPr>
-              <a:t>La Baie par Bagotville</a:t>
-            </a:r>
-            <a:endParaRPr lang="en-US" sz="1200" dirty="0"/>
-          </a:p>
-        </p:txBody>
-      </p:sp>
-      <p:sp>
-        <p:nvSpPr>
-          <p:cNvPr id="21" name="Text 18"/>
-          <p:cNvSpPr txBox="1"/>
-          <p:nvPr/>
-        </p:nvSpPr>
-        <p:spPr>
-          <a:xfrm>
-            <a:off x="10236200" y="3302000"/>
-            <a:ext cx="889000" cy="292100"/>
-          </a:xfrm>
-          <a:prstGeom prst="rect">
-            <a:avLst/>
-          </a:prstGeom>
-          <a:noFill/>
-          <a:ln/>
-        </p:spPr>
-        <p:txBody>
-          <a:bodyPr wrap="square" lIns="0" tIns="0" rIns="0" bIns="0" rtlCol="0" anchor="ctr"/>
-          <a:lstStyle/>
-          <a:p>
-            <a:pPr algn="r" indent="0" marL="0">
-              <a:lnSpc>
-                <a:spcPct val="120000"/>
-              </a:lnSpc>
-              <a:buNone/>
-            </a:pPr>
-            <a:r>
-              <a:rPr lang="en-US" sz="1600" b="1" dirty="0">
-                <a:solidFill>
-                  <a:srgbClr val="121417"/>
-                </a:solidFill>
-              </a:rPr>
-              <a:t>8 h 16</a:t>
-            </a:r>
-            <a:endParaRPr lang="en-US" sz="1600" dirty="0"/>
-          </a:p>
-        </p:txBody>
-      </p:sp>
-      <p:sp>
-        <p:nvSpPr>
-          <p:cNvPr id="22" name="Text 19"/>
-          <p:cNvSpPr txBox="1"/>
-          <p:nvPr/>
-        </p:nvSpPr>
-        <p:spPr>
-          <a:xfrm>
-            <a:off x="7823200" y="3810000"/>
-            <a:ext cx="3302000" cy="381000"/>
-          </a:xfrm>
-          <a:prstGeom prst="rect">
-            <a:avLst/>
-          </a:prstGeom>
-          <a:noFill/>
-          <a:ln/>
-        </p:spPr>
-        <p:txBody>
-          <a:bodyPr wrap="square" lIns="0" tIns="0" rIns="0" bIns="0" rtlCol="0" anchor="t"/>
-          <a:lstStyle/>
-          <a:p>
-            <a:pPr algn="l" indent="0" marL="0">
-              <a:lnSpc>
-                <a:spcPct val="130000"/>
-              </a:lnSpc>
-              <a:buNone/>
-            </a:pPr>
-            <a:r>
-              <a:rPr lang="en-US" sz="1200" dirty="0">
-                <a:solidFill>
-                  <a:srgbClr val="868C92"/>
-                </a:solidFill>
-              </a:rPr>
-              <a:t>Mercredi 18 novembre. Heures tirées de votre flux public.</a:t>
-            </a:r>
-            <a:endParaRPr lang="en-US" sz="1200" dirty="0"/>
-          </a:p>
-        </p:txBody>
-      </p:sp>
-      <p:sp>
-        <p:nvSpPr>
-          <p:cNvPr id="23" name="Text 20"/>
           <p:cNvSpPr txBox="1"/>
           <p:nvPr/>
         </p:nvSpPr>
@@ -5490,7 +5403,7 @@
                   <a:srgbClr val="868C92"/>
                 </a:solidFill>
               </a:rPr>
-              <a:t>· sts@stsaguenay.com</a:t>
+              <a:t>· donneesouvertes@ville.saguenay.qc.ca</a:t>
             </a:r>
             <a:endParaRPr lang="en-US" sz="1200" dirty="0"/>
           </a:p>
@@ -5576,7 +5489,7 @@
         </p:nvSpPr>
         <p:spPr>
           <a:xfrm>
-            <a:off x="812800" y="762000"/>
+            <a:off x="812800" y="1092200"/>
             <a:ext cx="10566400" cy="635000"/>
           </a:xfrm>
           <a:prstGeom prst="rect">
@@ -5601,7 +5514,7 @@
                   <a:srgbClr val="121417"/>
                 </a:solidFill>
               </a:rPr>
-              <a:t>D’autres coups de main</a:t>
+              <a:t>Le prochain départ, sur l’écran d’accueil</a:t>
             </a:r>
             <a:endParaRPr lang="en-US" sz="3600" dirty="0"/>
           </a:p>
@@ -5609,36 +5522,241 @@
       </p:sp>
       <p:sp>
         <p:nvSpPr>
-          <p:cNvPr id="4" name="Promotion Saguenay"/>
+          <p:cNvPr id="4" name="Text 1"/>
+          <p:cNvSpPr txBox="1"/>
+          <p:nvPr/>
+        </p:nvSpPr>
+        <p:spPr>
+          <a:xfrm>
+            <a:off x="812800" y="812800"/>
+            <a:ext cx="10566400" cy="215900"/>
+          </a:xfrm>
+          <a:prstGeom prst="rect">
+            <a:avLst/>
+          </a:prstGeom>
+          <a:noFill/>
+          <a:ln/>
+        </p:spPr>
+        <p:txBody>
+          <a:bodyPr wrap="square" lIns="0" tIns="0" rIns="0" bIns="0" rtlCol="0" anchor="t"/>
+          <a:lstStyle/>
+          <a:p>
+            <a:pPr algn="l" indent="0" marL="0">
+              <a:lnSpc>
+                <a:spcPct val="120000"/>
+              </a:lnSpc>
+              <a:buNone/>
+            </a:pPr>
+            <a:r>
+              <a:rPr lang="en-US" sz="1200" b="1" dirty="0">
+                <a:solidFill>
+                  <a:srgbClr val="4A5056"/>
+                </a:solidFill>
+              </a:rPr>
+              <a:t>Pour la Société de transport du Saguenay</a:t>
+            </a:r>
+            <a:endParaRPr lang="en-US" sz="1200" dirty="0"/>
+          </a:p>
+        </p:txBody>
+      </p:sp>
+      <p:sp>
+        <p:nvSpPr>
+          <p:cNvPr id="5" name="Text 2"/>
+          <p:cNvSpPr txBox="1"/>
+          <p:nvPr/>
+        </p:nvSpPr>
+        <p:spPr>
+          <a:xfrm>
+            <a:off x="812800" y="1905000"/>
+            <a:ext cx="6350000" cy="1270000"/>
+          </a:xfrm>
+          <a:prstGeom prst="rect">
+            <a:avLst/>
+          </a:prstGeom>
+          <a:noFill/>
+          <a:ln/>
+        </p:spPr>
+        <p:txBody>
+          <a:bodyPr wrap="square" lIns="0" tIns="0" rIns="0" bIns="0" rtlCol="0" anchor="t"/>
+          <a:lstStyle/>
+          <a:p>
+            <a:pPr algn="l" indent="0" marL="0">
+              <a:lnSpc>
+                <a:spcPct val="140000"/>
+              </a:lnSpc>
+              <a:buNone/>
+            </a:pPr>
+            <a:r>
+              <a:rPr lang="en-US" sz="1600" dirty="0">
+                <a:solidFill>
+                  <a:srgbClr val="4A5056"/>
+                </a:solidFill>
+              </a:rPr>
+              <a:t>Votre nouveau système publie des horaires et du temps réel de très bonne qualité. L’app les lit déjà, retards compris. Il manque seulement une licence pour la publier. Pour planifier un trajet, l’app renvoie vers Transit.</a:t>
+            </a:r>
+            <a:endParaRPr lang="en-US" sz="1600" dirty="0"/>
+          </a:p>
+        </p:txBody>
+      </p:sp>
+      <p:sp>
+        <p:nvSpPr>
+          <p:cNvPr id="6" name="Text 3"/>
+          <p:cNvSpPr txBox="1"/>
+          <p:nvPr/>
+        </p:nvSpPr>
+        <p:spPr>
+          <a:xfrm>
+            <a:off x="812800" y="3556000"/>
+            <a:ext cx="6350000" cy="266700"/>
+          </a:xfrm>
+          <a:prstGeom prst="rect">
+            <a:avLst/>
+          </a:prstGeom>
+          <a:noFill/>
+          <a:ln/>
+        </p:spPr>
+        <p:txBody>
+          <a:bodyPr wrap="square" lIns="0" tIns="0" rIns="0" bIns="0" rtlCol="0" anchor="t"/>
+          <a:lstStyle/>
+          <a:p>
+            <a:pPr algn="l" indent="0" marL="0">
+              <a:lnSpc>
+                <a:spcPct val="120000"/>
+              </a:lnSpc>
+              <a:buNone/>
+            </a:pPr>
+            <a:r>
+              <a:rPr lang="en-US" sz="1600" b="1" dirty="0">
+                <a:solidFill>
+                  <a:srgbClr val="121417"/>
+                </a:solidFill>
+              </a:rPr>
+              <a:t>Ce que je vous demande</a:t>
+            </a:r>
+            <a:endParaRPr lang="en-US" sz="1600" dirty="0"/>
+          </a:p>
+        </p:txBody>
+      </p:sp>
+      <p:sp>
+        <p:nvSpPr>
+          <p:cNvPr id="7" name="Text 4"/>
+          <p:cNvSpPr txBox="1"/>
+          <p:nvPr/>
+        </p:nvSpPr>
+        <p:spPr>
+          <a:xfrm>
+            <a:off x="812800" y="3937000"/>
+            <a:ext cx="6350000" cy="1079500"/>
+          </a:xfrm>
+          <a:prstGeom prst="rect">
+            <a:avLst/>
+          </a:prstGeom>
+          <a:noFill/>
+          <a:ln/>
+        </p:spPr>
+        <p:txBody>
+          <a:bodyPr wrap="square" lIns="0" tIns="0" rIns="0" bIns="0" rtlCol="0" anchor="t"/>
+          <a:lstStyle/>
+          <a:p>
+            <a:pPr marL="279400" indent="-279400">
+              <a:lnSpc>
+                <a:spcPct val="125000"/>
+              </a:lnSpc>
+              <a:spcAft>
+                <a:spcPts val="400"/>
+              </a:spcAft>
+              <a:buSzPct val="100000"/>
+              <a:buFont typeface="+mj-lt"/>
+              <a:buAutoNum type="arabicPeriod" startAt="1"/>
+            </a:pPr>
+            <a:r>
+              <a:rPr lang="en-US" sz="1400" dirty="0">
+                <a:solidFill>
+                  <a:srgbClr val="121417"/>
+                </a:solidFill>
+              </a:rPr>
+              <a:t>Une licence CC BY 4.0, comme la STM et la STL.</a:t>
+            </a:r>
+            <a:endParaRPr lang="en-US" sz="1400" dirty="0"/>
+          </a:p>
+          <a:p>
+            <a:pPr marL="279400" indent="-279400">
+              <a:lnSpc>
+                <a:spcPct val="125000"/>
+              </a:lnSpc>
+              <a:spcAft>
+                <a:spcPts val="400"/>
+              </a:spcAft>
+              <a:buSzPct val="100000"/>
+              <a:buFont typeface="+mj-lt"/>
+              <a:buAutoNum type="arabicPeriod" startAt="1"/>
+            </a:pPr>
+            <a:r>
+              <a:rPr lang="en-US" sz="1400" dirty="0">
+                <a:solidFill>
+                  <a:srgbClr val="121417"/>
+                </a:solidFill>
+              </a:rPr>
+              <a:t>Une adresse de flux qui ne change pas sans avertissement.</a:t>
+            </a:r>
+            <a:endParaRPr lang="en-US" sz="1400" dirty="0"/>
+          </a:p>
+          <a:p>
+            <a:pPr marL="279400" indent="-279400">
+              <a:lnSpc>
+                <a:spcPct val="125000"/>
+              </a:lnSpc>
+              <a:spcAft>
+                <a:spcPts val="400"/>
+              </a:spcAft>
+              <a:buSzPct val="100000"/>
+              <a:buFont typeface="+mj-lt"/>
+              <a:buAutoNum type="arabicPeriod" startAt="1"/>
+            </a:pPr>
+            <a:r>
+              <a:rPr lang="en-US" sz="1400" dirty="0">
+                <a:solidFill>
+                  <a:srgbClr val="121417"/>
+                </a:solidFill>
+              </a:rPr>
+              <a:t>Le lien entre vos numéros d’arrêt (SMS au 22237) et le flux.</a:t>
+            </a:r>
+            <a:endParaRPr lang="en-US" sz="1400" dirty="0"/>
+          </a:p>
+        </p:txBody>
+      </p:sp>
+      <p:sp>
+        <p:nvSpPr>
+          <p:cNvPr id="8" name="horaire"/>
           <p:cNvSpPr/>
           <p:nvPr/>
         </p:nvSpPr>
         <p:spPr>
           <a:xfrm>
-            <a:off x="812800" y="1574800"/>
-            <a:ext cx="3403600" cy="2032000"/>
+            <a:off x="7569200" y="1905000"/>
+            <a:ext cx="3810000" cy="2476500"/>
           </a:xfrm>
           <a:prstGeom prst="roundRect">
             <a:avLst>
-              <a:gd name="adj" fmla="val 10000"/>
+              <a:gd name="adj" fmla="val 8205"/>
             </a:avLst>
           </a:prstGeom>
           <a:solidFill>
-            <a:srgbClr val="F1F2EF"/>
+            <a:srgbClr val="FFFFFF"/>
           </a:solidFill>
           <a:ln/>
         </p:spPr>
       </p:sp>
       <p:sp>
         <p:nvSpPr>
-          <p:cNvPr id="5" name="Text 2"/>
-          <p:cNvSpPr txBox="1"/>
-          <p:nvPr/>
-        </p:nvSpPr>
-        <p:spPr>
-          <a:xfrm>
-            <a:off x="1066800" y="1828800"/>
-            <a:ext cx="2895600" cy="279400"/>
+          <p:cNvPr id="9" name="Text 6"/>
+          <p:cNvSpPr txBox="1"/>
+          <p:nvPr/>
+        </p:nvSpPr>
+        <p:spPr>
+          <a:xfrm>
+            <a:off x="7823200" y="2159000"/>
+            <a:ext cx="3302000" cy="215900"/>
           </a:xfrm>
           <a:prstGeom prst="rect">
             <a:avLst/>
@@ -5657,112 +5775,151 @@
               <a:buNone/>
             </a:pPr>
             <a:r>
-              <a:rPr lang="en-US" sz="1600" b="1" dirty="0">
-                <a:solidFill>
-                  <a:srgbClr val="121417"/>
-                </a:solidFill>
-              </a:rPr>
-              <a:t>Promotion Saguenay</a:t>
-            </a:r>
-            <a:endParaRPr lang="en-US" sz="1600" dirty="0"/>
-          </a:p>
-        </p:txBody>
-      </p:sp>
-      <p:sp>
-        <p:nvSpPr>
-          <p:cNvPr id="6" name="Text 3"/>
-          <p:cNvSpPr txBox="1"/>
-          <p:nvPr/>
-        </p:nvSpPr>
-        <p:spPr>
-          <a:xfrm>
-            <a:off x="1066800" y="2197100"/>
-            <a:ext cx="2895600" cy="1206500"/>
-          </a:xfrm>
-          <a:prstGeom prst="rect">
-            <a:avLst/>
-          </a:prstGeom>
-          <a:noFill/>
-          <a:ln/>
-        </p:spPr>
-        <p:txBody>
-          <a:bodyPr wrap="square" lIns="0" tIns="0" rIns="0" bIns="0" rtlCol="0" anchor="t"/>
-          <a:lstStyle/>
-          <a:p>
-            <a:pPr algn="l" indent="0" marL="0">
-              <a:lnSpc>
-                <a:spcPct val="135000"/>
-              </a:lnSpc>
-              <a:buNone/>
-            </a:pPr>
-            <a:r>
-              <a:rPr lang="en-US" sz="1400" dirty="0">
-                <a:solidFill>
-                  <a:srgbClr val="4A5056"/>
-                </a:solidFill>
-              </a:rPr>
-              <a:t>Ses fonds numériques pourraient payer le développement et des tests avec des citoyens. L’admissibilité reste à vérifier.</a:t>
-            </a:r>
-            <a:endParaRPr lang="en-US" sz="1400" dirty="0"/>
-          </a:p>
-        </p:txBody>
-      </p:sp>
-      <p:sp>
-        <p:nvSpPr>
-          <p:cNvPr id="7" name="UQAC et cégeps"/>
+              <a:rPr lang="en-US" sz="1200" b="1" dirty="0">
+                <a:solidFill>
+                  <a:srgbClr val="868C92"/>
+                </a:solidFill>
+              </a:rPr>
+              <a:t>Arrêt 150, Racine Est</a:t>
+            </a:r>
+            <a:endParaRPr lang="en-US" sz="1200" dirty="0"/>
+          </a:p>
+        </p:txBody>
+      </p:sp>
+      <p:sp>
+        <p:nvSpPr>
+          <p:cNvPr id="10" name="Shape 7"/>
           <p:cNvSpPr/>
           <p:nvPr/>
         </p:nvSpPr>
         <p:spPr>
           <a:xfrm>
-            <a:off x="4394200" y="1574800"/>
-            <a:ext cx="3403600" cy="2032000"/>
+            <a:off x="7823200" y="2540000"/>
+            <a:ext cx="457200" cy="241300"/>
           </a:xfrm>
           <a:prstGeom prst="roundRect">
             <a:avLst>
-              <a:gd name="adj" fmla="val 10000"/>
+              <a:gd name="adj" fmla="val 26316"/>
             </a:avLst>
           </a:prstGeom>
           <a:solidFill>
-            <a:srgbClr val="F1F2EF"/>
+            <a:srgbClr val="2F6BEB"/>
           </a:solidFill>
           <a:ln/>
         </p:spPr>
       </p:sp>
       <p:sp>
         <p:nvSpPr>
-          <p:cNvPr id="8" name="Text 5"/>
-          <p:cNvSpPr txBox="1"/>
-          <p:nvPr/>
-        </p:nvSpPr>
-        <p:spPr>
-          <a:xfrm>
-            <a:off x="4648200" y="1828800"/>
-            <a:ext cx="2895600" cy="279400"/>
-          </a:xfrm>
-          <a:prstGeom prst="rect">
-            <a:avLst/>
-          </a:prstGeom>
-          <a:noFill/>
-          <a:ln/>
-        </p:spPr>
-        <p:txBody>
-          <a:bodyPr wrap="square" lIns="0" tIns="0" rIns="0" bIns="0" rtlCol="0" anchor="t"/>
-          <a:lstStyle/>
-          <a:p>
-            <a:pPr algn="l" indent="0" marL="0">
+          <p:cNvPr id="11" name="Text 8"/>
+          <p:cNvSpPr txBox="1"/>
+          <p:nvPr/>
+        </p:nvSpPr>
+        <p:spPr>
+          <a:xfrm>
+            <a:off x="7823200" y="2540000"/>
+            <a:ext cx="457200" cy="241300"/>
+          </a:xfrm>
+          <a:prstGeom prst="rect">
+            <a:avLst/>
+          </a:prstGeom>
+          <a:noFill/>
+          <a:ln/>
+        </p:spPr>
+        <p:txBody>
+          <a:bodyPr wrap="square" lIns="0" tIns="0" rIns="0" bIns="0" rtlCol="0" anchor="ctr"/>
+          <a:lstStyle/>
+          <a:p>
+            <a:pPr algn="ctr" indent="0" marL="0">
               <a:lnSpc>
                 <a:spcPct val="120000"/>
               </a:lnSpc>
               <a:buNone/>
             </a:pPr>
             <a:r>
+              <a:rPr lang="en-US" sz="1200" b="1" dirty="0">
+                <a:solidFill>
+                  <a:srgbClr val="FFFFFF"/>
+                </a:solidFill>
+              </a:rPr>
+              <a:t>105</a:t>
+            </a:r>
+            <a:endParaRPr lang="en-US" sz="1200" dirty="0"/>
+          </a:p>
+        </p:txBody>
+      </p:sp>
+      <p:sp>
+        <p:nvSpPr>
+          <p:cNvPr id="12" name="Text 9"/>
+          <p:cNvSpPr txBox="1"/>
+          <p:nvPr/>
+        </p:nvSpPr>
+        <p:spPr>
+          <a:xfrm>
+            <a:off x="8394700" y="2514600"/>
+            <a:ext cx="1905000" cy="292100"/>
+          </a:xfrm>
+          <a:prstGeom prst="rect">
+            <a:avLst/>
+          </a:prstGeom>
+          <a:noFill/>
+          <a:ln/>
+        </p:spPr>
+        <p:txBody>
+          <a:bodyPr wrap="square" lIns="0" tIns="0" rIns="0" bIns="0" rtlCol="0" anchor="ctr"/>
+          <a:lstStyle/>
+          <a:p>
+            <a:pPr algn="l" indent="0" marL="0">
+              <a:lnSpc>
+                <a:spcPct val="120000"/>
+              </a:lnSpc>
+              <a:buNone/>
+            </a:pPr>
+            <a:r>
+              <a:rPr lang="en-US" sz="1200" dirty="0">
+                <a:solidFill>
+                  <a:srgbClr val="121417"/>
+                </a:solidFill>
+              </a:rPr>
+              <a:t>La Baie</a:t>
+            </a:r>
+            <a:endParaRPr lang="en-US" sz="1200" dirty="0"/>
+          </a:p>
+        </p:txBody>
+      </p:sp>
+      <p:sp>
+        <p:nvSpPr>
+          <p:cNvPr id="13" name="Text 10"/>
+          <p:cNvSpPr txBox="1"/>
+          <p:nvPr/>
+        </p:nvSpPr>
+        <p:spPr>
+          <a:xfrm>
+            <a:off x="10236200" y="2514600"/>
+            <a:ext cx="889000" cy="292100"/>
+          </a:xfrm>
+          <a:prstGeom prst="rect">
+            <a:avLst/>
+          </a:prstGeom>
+          <a:noFill/>
+          <a:ln/>
+        </p:spPr>
+        <p:txBody>
+          <a:bodyPr wrap="square" lIns="0" tIns="0" rIns="0" bIns="0" rtlCol="0" anchor="ctr"/>
+          <a:lstStyle/>
+          <a:p>
+            <a:pPr algn="r" indent="0" marL="0">
+              <a:lnSpc>
+                <a:spcPct val="120000"/>
+              </a:lnSpc>
+              <a:buNone/>
+            </a:pPr>
+            <a:r>
               <a:rPr lang="en-US" sz="1600" b="1" dirty="0">
                 <a:solidFill>
                   <a:srgbClr val="121417"/>
                 </a:solidFill>
               </a:rPr>
-              <a:t>UQAC et cégeps</a:t>
+              <a:t>7 h 46</a:t>
             </a:r>
             <a:endParaRPr lang="en-US" sz="1600" dirty="0"/>
           </a:p>
@@ -5770,99 +5927,138 @@
       </p:sp>
       <p:sp>
         <p:nvSpPr>
-          <p:cNvPr id="9" name="Text 6"/>
-          <p:cNvSpPr txBox="1"/>
-          <p:nvPr/>
-        </p:nvSpPr>
-        <p:spPr>
-          <a:xfrm>
-            <a:off x="4648200" y="2197100"/>
-            <a:ext cx="2895600" cy="1206500"/>
-          </a:xfrm>
-          <a:prstGeom prst="rect">
-            <a:avLst/>
-          </a:prstGeom>
-          <a:noFill/>
-          <a:ln/>
-        </p:spPr>
-        <p:txBody>
-          <a:bodyPr wrap="square" lIns="0" tIns="0" rIns="0" bIns="0" rtlCol="0" anchor="t"/>
-          <a:lstStyle/>
-          <a:p>
-            <a:pPr algn="l" indent="0" marL="0">
-              <a:lnSpc>
-                <a:spcPct val="135000"/>
-              </a:lnSpc>
-              <a:buNone/>
-            </a:pPr>
-            <a:r>
-              <a:rPr lang="en-US" sz="1400" dirty="0">
-                <a:solidFill>
-                  <a:srgbClr val="4A5056"/>
-                </a:solidFill>
-              </a:rPr>
-              <a:t>Des projets étudiants : tests d’accessibilité, qualité des données, essais avec de vrais usagers.</a:t>
-            </a:r>
-            <a:endParaRPr lang="en-US" sz="1400" dirty="0"/>
-          </a:p>
-        </p:txBody>
-      </p:sp>
-      <p:sp>
-        <p:nvSpPr>
-          <p:cNvPr id="10" name="SaguenayCollecte"/>
+          <p:cNvPr id="14" name="Shape 11"/>
           <p:cNvSpPr/>
           <p:nvPr/>
         </p:nvSpPr>
         <p:spPr>
           <a:xfrm>
-            <a:off x="7975600" y="1574800"/>
-            <a:ext cx="3403600" cy="2032000"/>
+            <a:off x="7823200" y="2933700"/>
+            <a:ext cx="457200" cy="241300"/>
           </a:xfrm>
           <a:prstGeom prst="roundRect">
             <a:avLst>
-              <a:gd name="adj" fmla="val 10000"/>
+              <a:gd name="adj" fmla="val 26316"/>
             </a:avLst>
           </a:prstGeom>
           <a:solidFill>
-            <a:srgbClr val="F1F2EF"/>
+            <a:srgbClr val="2F6BEB"/>
           </a:solidFill>
           <a:ln/>
         </p:spPr>
       </p:sp>
       <p:sp>
         <p:nvSpPr>
-          <p:cNvPr id="11" name="Text 8"/>
-          <p:cNvSpPr txBox="1"/>
-          <p:nvPr/>
-        </p:nvSpPr>
-        <p:spPr>
-          <a:xfrm>
-            <a:off x="8229600" y="1828800"/>
-            <a:ext cx="2895600" cy="279400"/>
-          </a:xfrm>
-          <a:prstGeom prst="rect">
-            <a:avLst/>
-          </a:prstGeom>
-          <a:noFill/>
-          <a:ln/>
-        </p:spPr>
-        <p:txBody>
-          <a:bodyPr wrap="square" lIns="0" tIns="0" rIns="0" bIns="0" rtlCol="0" anchor="t"/>
-          <a:lstStyle/>
-          <a:p>
-            <a:pPr algn="l" indent="0" marL="0">
+          <p:cNvPr id="15" name="Text 12"/>
+          <p:cNvSpPr txBox="1"/>
+          <p:nvPr/>
+        </p:nvSpPr>
+        <p:spPr>
+          <a:xfrm>
+            <a:off x="7823200" y="2933700"/>
+            <a:ext cx="457200" cy="241300"/>
+          </a:xfrm>
+          <a:prstGeom prst="rect">
+            <a:avLst/>
+          </a:prstGeom>
+          <a:noFill/>
+          <a:ln/>
+        </p:spPr>
+        <p:txBody>
+          <a:bodyPr wrap="square" lIns="0" tIns="0" rIns="0" bIns="0" rtlCol="0" anchor="ctr"/>
+          <a:lstStyle/>
+          <a:p>
+            <a:pPr algn="ctr" indent="0" marL="0">
               <a:lnSpc>
                 <a:spcPct val="120000"/>
               </a:lnSpc>
               <a:buNone/>
             </a:pPr>
             <a:r>
+              <a:rPr lang="en-US" sz="1200" b="1" dirty="0">
+                <a:solidFill>
+                  <a:srgbClr val="FFFFFF"/>
+                </a:solidFill>
+              </a:rPr>
+              <a:t>10</a:t>
+            </a:r>
+            <a:endParaRPr lang="en-US" sz="1200" dirty="0"/>
+          </a:p>
+        </p:txBody>
+      </p:sp>
+      <p:sp>
+        <p:nvSpPr>
+          <p:cNvPr id="16" name="Text 13"/>
+          <p:cNvSpPr txBox="1"/>
+          <p:nvPr/>
+        </p:nvSpPr>
+        <p:spPr>
+          <a:xfrm>
+            <a:off x="8394700" y="2908300"/>
+            <a:ext cx="1905000" cy="292100"/>
+          </a:xfrm>
+          <a:prstGeom prst="rect">
+            <a:avLst/>
+          </a:prstGeom>
+          <a:noFill/>
+          <a:ln/>
+        </p:spPr>
+        <p:txBody>
+          <a:bodyPr wrap="square" lIns="0" tIns="0" rIns="0" bIns="0" rtlCol="0" anchor="ctr"/>
+          <a:lstStyle/>
+          <a:p>
+            <a:pPr algn="l" indent="0" marL="0">
+              <a:lnSpc>
+                <a:spcPct val="120000"/>
+              </a:lnSpc>
+              <a:buNone/>
+            </a:pPr>
+            <a:r>
+              <a:rPr lang="en-US" sz="1200" dirty="0">
+                <a:solidFill>
+                  <a:srgbClr val="121417"/>
+                </a:solidFill>
+              </a:rPr>
+              <a:t>UQAC</a:t>
+            </a:r>
+            <a:endParaRPr lang="en-US" sz="1200" dirty="0"/>
+          </a:p>
+        </p:txBody>
+      </p:sp>
+      <p:sp>
+        <p:nvSpPr>
+          <p:cNvPr id="17" name="Text 14"/>
+          <p:cNvSpPr txBox="1"/>
+          <p:nvPr/>
+        </p:nvSpPr>
+        <p:spPr>
+          <a:xfrm>
+            <a:off x="10236200" y="2908300"/>
+            <a:ext cx="889000" cy="292100"/>
+          </a:xfrm>
+          <a:prstGeom prst="rect">
+            <a:avLst/>
+          </a:prstGeom>
+          <a:noFill/>
+          <a:ln/>
+        </p:spPr>
+        <p:txBody>
+          <a:bodyPr wrap="square" lIns="0" tIns="0" rIns="0" bIns="0" rtlCol="0" anchor="ctr"/>
+          <a:lstStyle/>
+          <a:p>
+            <a:pPr algn="r" indent="0" marL="0">
+              <a:lnSpc>
+                <a:spcPct val="120000"/>
+              </a:lnSpc>
+              <a:buNone/>
+            </a:pPr>
+            <a:r>
               <a:rPr lang="en-US" sz="1600" b="1" dirty="0">
                 <a:solidFill>
                   <a:srgbClr val="121417"/>
                 </a:solidFill>
               </a:rPr>
-              <a:t>SaguenayCollecte</a:t>
+              <a:t>7 h 47</a:t>
             </a:r>
             <a:endParaRPr lang="en-US" sz="1600" dirty="0"/>
           </a:p>
@@ -5870,40 +6066,218 @@
       </p:sp>
       <p:sp>
         <p:nvSpPr>
-          <p:cNvPr id="12" name="Text 9"/>
-          <p:cNvSpPr txBox="1"/>
-          <p:nvPr/>
-        </p:nvSpPr>
-        <p:spPr>
-          <a:xfrm>
-            <a:off x="8229600" y="2197100"/>
-            <a:ext cx="2895600" cy="1206500"/>
-          </a:xfrm>
-          <a:prstGeom prst="rect">
-            <a:avLst/>
-          </a:prstGeom>
-          <a:noFill/>
-          <a:ln/>
-        </p:spPr>
-        <p:txBody>
-          <a:bodyPr wrap="square" lIns="0" tIns="0" rIns="0" bIns="0" rtlCol="0" anchor="t"/>
-          <a:lstStyle/>
-          <a:p>
-            <a:pPr algn="l" indent="0" marL="0">
-              <a:lnSpc>
-                <a:spcPct val="135000"/>
-              </a:lnSpc>
-              <a:buNone/>
-            </a:pPr>
-            <a:r>
-              <a:rPr lang="en-US" sz="1400" dirty="0">
-                <a:solidFill>
-                  <a:srgbClr val="4A5056"/>
-                </a:solidFill>
-              </a:rPr>
-              <a:t>Leur app fait déjà très bien les collectes. On se renvoie les usagers au lieu de se faire concurrence.</a:t>
-            </a:r>
-            <a:endParaRPr lang="en-US" sz="1400" dirty="0"/>
+          <p:cNvPr id="18" name="Shape 15"/>
+          <p:cNvSpPr/>
+          <p:nvPr/>
+        </p:nvSpPr>
+        <p:spPr>
+          <a:xfrm>
+            <a:off x="7823200" y="3327400"/>
+            <a:ext cx="457200" cy="241300"/>
+          </a:xfrm>
+          <a:prstGeom prst="roundRect">
+            <a:avLst>
+              <a:gd name="adj" fmla="val 26316"/>
+            </a:avLst>
+          </a:prstGeom>
+          <a:solidFill>
+            <a:srgbClr val="2F6BEB"/>
+          </a:solidFill>
+          <a:ln/>
+        </p:spPr>
+      </p:sp>
+      <p:sp>
+        <p:nvSpPr>
+          <p:cNvPr id="19" name="Text 16"/>
+          <p:cNvSpPr txBox="1"/>
+          <p:nvPr/>
+        </p:nvSpPr>
+        <p:spPr>
+          <a:xfrm>
+            <a:off x="7823200" y="3327400"/>
+            <a:ext cx="457200" cy="241300"/>
+          </a:xfrm>
+          <a:prstGeom prst="rect">
+            <a:avLst/>
+          </a:prstGeom>
+          <a:noFill/>
+          <a:ln/>
+        </p:spPr>
+        <p:txBody>
+          <a:bodyPr wrap="square" lIns="0" tIns="0" rIns="0" bIns="0" rtlCol="0" anchor="ctr"/>
+          <a:lstStyle/>
+          <a:p>
+            <a:pPr algn="ctr" indent="0" marL="0">
+              <a:lnSpc>
+                <a:spcPct val="120000"/>
+              </a:lnSpc>
+              <a:buNone/>
+            </a:pPr>
+            <a:r>
+              <a:rPr lang="en-US" sz="1200" b="1" dirty="0">
+                <a:solidFill>
+                  <a:srgbClr val="FFFFFF"/>
+                </a:solidFill>
+              </a:rPr>
+              <a:t>106</a:t>
+            </a:r>
+            <a:endParaRPr lang="en-US" sz="1200" dirty="0"/>
+          </a:p>
+        </p:txBody>
+      </p:sp>
+      <p:sp>
+        <p:nvSpPr>
+          <p:cNvPr id="20" name="Text 17"/>
+          <p:cNvSpPr txBox="1"/>
+          <p:nvPr/>
+        </p:nvSpPr>
+        <p:spPr>
+          <a:xfrm>
+            <a:off x="8394700" y="3302000"/>
+            <a:ext cx="1905000" cy="292100"/>
+          </a:xfrm>
+          <a:prstGeom prst="rect">
+            <a:avLst/>
+          </a:prstGeom>
+          <a:noFill/>
+          <a:ln/>
+        </p:spPr>
+        <p:txBody>
+          <a:bodyPr wrap="square" lIns="0" tIns="0" rIns="0" bIns="0" rtlCol="0" anchor="ctr"/>
+          <a:lstStyle/>
+          <a:p>
+            <a:pPr algn="l" indent="0" marL="0">
+              <a:lnSpc>
+                <a:spcPct val="120000"/>
+              </a:lnSpc>
+              <a:buNone/>
+            </a:pPr>
+            <a:r>
+              <a:rPr lang="en-US" sz="1200" dirty="0">
+                <a:solidFill>
+                  <a:srgbClr val="121417"/>
+                </a:solidFill>
+              </a:rPr>
+              <a:t>La Baie par Bagotville</a:t>
+            </a:r>
+            <a:endParaRPr lang="en-US" sz="1200" dirty="0"/>
+          </a:p>
+        </p:txBody>
+      </p:sp>
+      <p:sp>
+        <p:nvSpPr>
+          <p:cNvPr id="21" name="Text 18"/>
+          <p:cNvSpPr txBox="1"/>
+          <p:nvPr/>
+        </p:nvSpPr>
+        <p:spPr>
+          <a:xfrm>
+            <a:off x="10236200" y="3302000"/>
+            <a:ext cx="889000" cy="292100"/>
+          </a:xfrm>
+          <a:prstGeom prst="rect">
+            <a:avLst/>
+          </a:prstGeom>
+          <a:noFill/>
+          <a:ln/>
+        </p:spPr>
+        <p:txBody>
+          <a:bodyPr wrap="square" lIns="0" tIns="0" rIns="0" bIns="0" rtlCol="0" anchor="ctr"/>
+          <a:lstStyle/>
+          <a:p>
+            <a:pPr algn="r" indent="0" marL="0">
+              <a:lnSpc>
+                <a:spcPct val="120000"/>
+              </a:lnSpc>
+              <a:buNone/>
+            </a:pPr>
+            <a:r>
+              <a:rPr lang="en-US" sz="1600" b="1" dirty="0">
+                <a:solidFill>
+                  <a:srgbClr val="121417"/>
+                </a:solidFill>
+              </a:rPr>
+              <a:t>8 h 16</a:t>
+            </a:r>
+            <a:endParaRPr lang="en-US" sz="1600" dirty="0"/>
+          </a:p>
+        </p:txBody>
+      </p:sp>
+      <p:sp>
+        <p:nvSpPr>
+          <p:cNvPr id="22" name="Text 19"/>
+          <p:cNvSpPr txBox="1"/>
+          <p:nvPr/>
+        </p:nvSpPr>
+        <p:spPr>
+          <a:xfrm>
+            <a:off x="7823200" y="3810000"/>
+            <a:ext cx="3302000" cy="381000"/>
+          </a:xfrm>
+          <a:prstGeom prst="rect">
+            <a:avLst/>
+          </a:prstGeom>
+          <a:noFill/>
+          <a:ln/>
+        </p:spPr>
+        <p:txBody>
+          <a:bodyPr wrap="square" lIns="0" tIns="0" rIns="0" bIns="0" rtlCol="0" anchor="t"/>
+          <a:lstStyle/>
+          <a:p>
+            <a:pPr algn="l" indent="0" marL="0">
+              <a:lnSpc>
+                <a:spcPct val="130000"/>
+              </a:lnSpc>
+              <a:buNone/>
+            </a:pPr>
+            <a:r>
+              <a:rPr lang="en-US" sz="1200" dirty="0">
+                <a:solidFill>
+                  <a:srgbClr val="868C92"/>
+                </a:solidFill>
+              </a:rPr>
+              <a:t>Mercredi 18 novembre. Heures tirées de votre flux public.</a:t>
+            </a:r>
+            <a:endParaRPr lang="en-US" sz="1200" dirty="0"/>
+          </a:p>
+        </p:txBody>
+      </p:sp>
+      <p:sp>
+        <p:nvSpPr>
+          <p:cNvPr id="23" name="Text 20"/>
+          <p:cNvSpPr txBox="1"/>
+          <p:nvPr/>
+        </p:nvSpPr>
+        <p:spPr>
+          <a:xfrm>
+            <a:off x="1041400" y="6286500"/>
+            <a:ext cx="5080000" cy="190500"/>
+          </a:xfrm>
+          <a:prstGeom prst="rect">
+            <a:avLst/>
+          </a:prstGeom>
+          <a:noFill/>
+          <a:ln/>
+        </p:spPr>
+        <p:txBody>
+          <a:bodyPr wrap="square" lIns="0" tIns="0" rIns="0" bIns="0" rtlCol="0" anchor="t"/>
+          <a:lstStyle/>
+          <a:p>
+            <a:pPr algn="l" indent="0" marL="0">
+              <a:lnSpc>
+                <a:spcPct val="120000"/>
+              </a:lnSpc>
+              <a:buNone/>
+            </a:pPr>
+            <a:r>
+              <a:rPr lang="en-US" sz="1200" dirty="0">
+                <a:solidFill>
+                  <a:srgbClr val="868C92"/>
+                </a:solidFill>
+              </a:rPr>
+              <a:t>· sts@stsaguenay.com</a:t>
+            </a:r>
+            <a:endParaRPr lang="en-US" sz="1200" dirty="0"/>
           </a:p>
         </p:txBody>
       </p:sp>
@@ -6012,7 +6386,7 @@
                   <a:srgbClr val="121417"/>
                 </a:solidFill>
               </a:rPr>
-              <a:t>La suite</a:t>
+              <a:t>D’autres coups de main</a:t>
             </a:r>
             <a:endParaRPr lang="en-US" sz="3600" dirty="0"/>
           </a:p>
@@ -6020,20 +6394,22 @@
       </p:sp>
       <p:sp>
         <p:nvSpPr>
-          <p:cNvPr id="4" name="repère 1"/>
+          <p:cNvPr id="4" name="Promotion Saguenay"/>
           <p:cNvSpPr/>
           <p:nvPr/>
         </p:nvSpPr>
         <p:spPr>
           <a:xfrm>
-            <a:off x="812800" y="1651000"/>
-            <a:ext cx="2489200" cy="38100"/>
-          </a:xfrm>
-          <a:prstGeom prst="rect">
-            <a:avLst/>
+            <a:off x="812800" y="1574800"/>
+            <a:ext cx="3403600" cy="2032000"/>
+          </a:xfrm>
+          <a:prstGeom prst="roundRect">
+            <a:avLst>
+              <a:gd name="adj" fmla="val 10000"/>
+            </a:avLst>
           </a:prstGeom>
           <a:solidFill>
-            <a:srgbClr val="FFD02B"/>
+            <a:srgbClr val="F1F2EF"/>
           </a:solidFill>
           <a:ln/>
         </p:spPr>
@@ -6046,8 +6422,8 @@
         </p:nvSpPr>
         <p:spPr>
           <a:xfrm>
-            <a:off x="812800" y="1841500"/>
-            <a:ext cx="2489200" cy="355600"/>
+            <a:off x="1066800" y="1828800"/>
+            <a:ext cx="2895600" cy="279400"/>
           </a:xfrm>
           <a:prstGeom prst="rect">
             <a:avLst/>
@@ -6066,14 +6442,14 @@
               <a:buNone/>
             </a:pPr>
             <a:r>
-              <a:rPr lang="en-US" sz="2200" b="1" dirty="0">
+              <a:rPr lang="en-US" sz="1600" b="1" dirty="0">
                 <a:solidFill>
                   <a:srgbClr val="121417"/>
                 </a:solidFill>
               </a:rPr>
-              <a:t>Fin octobre</a:t>
-            </a:r>
-            <a:endParaRPr lang="en-US" sz="2200" dirty="0"/>
+              <a:t>Promotion Saguenay</a:t>
+            </a:r>
+            <a:endParaRPr lang="en-US" sz="1600" dirty="0"/>
           </a:p>
         </p:txBody>
       </p:sp>
@@ -6085,8 +6461,8 @@
         </p:nvSpPr>
         <p:spPr>
           <a:xfrm>
-            <a:off x="812800" y="2260600"/>
-            <a:ext cx="2489200" cy="1270000"/>
+            <a:off x="1066800" y="2197100"/>
+            <a:ext cx="2895600" cy="1206500"/>
           </a:xfrm>
           <a:prstGeom prst="rect">
             <a:avLst/>
@@ -6110,7 +6486,7 @@
                   <a:srgbClr val="4A5056"/>
                 </a:solidFill>
               </a:rPr>
-              <a:t>Je présente le projet et j’envoie les demandes.</a:t>
+              <a:t>Ses fonds numériques pourraient payer le développement et des tests avec des citoyens. L’admissibilité reste à vérifier.</a:t>
             </a:r>
             <a:endParaRPr lang="en-US" sz="1400" dirty="0"/>
           </a:p>
@@ -6118,20 +6494,22 @@
       </p:sp>
       <p:sp>
         <p:nvSpPr>
-          <p:cNvPr id="7" name="repère 2"/>
+          <p:cNvPr id="7" name="UQAC et cégeps"/>
           <p:cNvSpPr/>
           <p:nvPr/>
         </p:nvSpPr>
         <p:spPr>
           <a:xfrm>
-            <a:off x="3505200" y="1651000"/>
-            <a:ext cx="2489200" cy="38100"/>
-          </a:xfrm>
-          <a:prstGeom prst="rect">
-            <a:avLst/>
+            <a:off x="4394200" y="1574800"/>
+            <a:ext cx="3403600" cy="2032000"/>
+          </a:xfrm>
+          <a:prstGeom prst="roundRect">
+            <a:avLst>
+              <a:gd name="adj" fmla="val 10000"/>
+            </a:avLst>
           </a:prstGeom>
           <a:solidFill>
-            <a:srgbClr val="121417"/>
+            <a:srgbClr val="F1F2EF"/>
           </a:solidFill>
           <a:ln/>
         </p:spPr>
@@ -6144,8 +6522,8 @@
         </p:nvSpPr>
         <p:spPr>
           <a:xfrm>
-            <a:off x="3505200" y="1841500"/>
-            <a:ext cx="2489200" cy="355600"/>
+            <a:off x="4648200" y="1828800"/>
+            <a:ext cx="2895600" cy="279400"/>
           </a:xfrm>
           <a:prstGeom prst="rect">
             <a:avLst/>
@@ -6164,14 +6542,14 @@
               <a:buNone/>
             </a:pPr>
             <a:r>
-              <a:rPr lang="en-US" sz="2200" b="1" dirty="0">
+              <a:rPr lang="en-US" sz="1600" b="1" dirty="0">
                 <a:solidFill>
                   <a:srgbClr val="121417"/>
                 </a:solidFill>
               </a:rPr>
-              <a:t>Mi-décembre</a:t>
-            </a:r>
-            <a:endParaRPr lang="en-US" sz="2200" dirty="0"/>
+              <a:t>UQAC et cégeps</a:t>
+            </a:r>
+            <a:endParaRPr lang="en-US" sz="1600" dirty="0"/>
           </a:p>
         </p:txBody>
       </p:sp>
@@ -6183,8 +6561,8 @@
         </p:nvSpPr>
         <p:spPr>
           <a:xfrm>
-            <a:off x="3505200" y="2260600"/>
-            <a:ext cx="2489200" cy="1270000"/>
+            <a:off x="4648200" y="2197100"/>
+            <a:ext cx="2895600" cy="1206500"/>
           </a:xfrm>
           <a:prstGeom prst="rect">
             <a:avLst/>
@@ -6208,7 +6586,7 @@
                   <a:srgbClr val="4A5056"/>
                 </a:solidFill>
               </a:rPr>
-              <a:t>Première version publique, avec les sources ouvertes et celles que vous aurez acceptées.</a:t>
+              <a:t>Des projets étudiants : tests d’accessibilité, qualité des données, essais avec de vrais usagers.</a:t>
             </a:r>
             <a:endParaRPr lang="en-US" sz="1400" dirty="0"/>
           </a:p>
@@ -6216,20 +6594,22 @@
       </p:sp>
       <p:sp>
         <p:nvSpPr>
-          <p:cNvPr id="10" name="repère 3"/>
+          <p:cNvPr id="10" name="SaguenayCollecte"/>
           <p:cNvSpPr/>
           <p:nvPr/>
         </p:nvSpPr>
         <p:spPr>
           <a:xfrm>
-            <a:off x="6197600" y="1651000"/>
-            <a:ext cx="2489200" cy="38100"/>
-          </a:xfrm>
-          <a:prstGeom prst="rect">
-            <a:avLst/>
+            <a:off x="7975600" y="1574800"/>
+            <a:ext cx="3403600" cy="2032000"/>
+          </a:xfrm>
+          <a:prstGeom prst="roundRect">
+            <a:avLst>
+              <a:gd name="adj" fmla="val 10000"/>
+            </a:avLst>
           </a:prstGeom>
           <a:solidFill>
-            <a:srgbClr val="121417"/>
+            <a:srgbClr val="F1F2EF"/>
           </a:solidFill>
           <a:ln/>
         </p:spPr>
@@ -6242,8 +6622,8 @@
         </p:nvSpPr>
         <p:spPr>
           <a:xfrm>
-            <a:off x="6197600" y="1841500"/>
-            <a:ext cx="2489200" cy="355600"/>
+            <a:off x="8229600" y="1828800"/>
+            <a:ext cx="2895600" cy="279400"/>
           </a:xfrm>
           <a:prstGeom prst="rect">
             <a:avLst/>
@@ -6262,14 +6642,14 @@
               <a:buNone/>
             </a:pPr>
             <a:r>
-              <a:rPr lang="en-US" sz="2200" b="1" dirty="0">
+              <a:rPr lang="en-US" sz="1600" b="1" dirty="0">
                 <a:solidFill>
                   <a:srgbClr val="121417"/>
                 </a:solidFill>
               </a:rPr>
-              <a:t>Janvier</a:t>
-            </a:r>
-            <a:endParaRPr lang="en-US" sz="2200" dirty="0"/>
+              <a:t>SaguenayCollecte</a:t>
+            </a:r>
+            <a:endParaRPr lang="en-US" sz="1600" dirty="0"/>
           </a:p>
         </p:txBody>
       </p:sp>
@@ -6281,8 +6661,8 @@
         </p:nvSpPr>
         <p:spPr>
           <a:xfrm>
-            <a:off x="6197600" y="2260600"/>
-            <a:ext cx="2489200" cy="1270000"/>
+            <a:off x="8229600" y="2197100"/>
+            <a:ext cx="2895600" cy="1206500"/>
           </a:xfrm>
           <a:prstGeom prst="rect">
             <a:avLst/>
@@ -6306,105 +6686,7 @@
                   <a:srgbClr val="4A5056"/>
                 </a:solidFill>
               </a:rPr>
-              <a:t>Le reste dès les accords, et la version web.</a:t>
-            </a:r>
-            <a:endParaRPr lang="en-US" sz="1400" dirty="0"/>
-          </a:p>
-        </p:txBody>
-      </p:sp>
-      <p:sp>
-        <p:nvSpPr>
-          <p:cNvPr id="13" name="repère 4"/>
-          <p:cNvSpPr/>
-          <p:nvPr/>
-        </p:nvSpPr>
-        <p:spPr>
-          <a:xfrm>
-            <a:off x="8890000" y="1651000"/>
-            <a:ext cx="2489200" cy="38100"/>
-          </a:xfrm>
-          <a:prstGeom prst="rect">
-            <a:avLst/>
-          </a:prstGeom>
-          <a:solidFill>
-            <a:srgbClr val="121417"/>
-          </a:solidFill>
-          <a:ln/>
-        </p:spPr>
-      </p:sp>
-      <p:sp>
-        <p:nvSpPr>
-          <p:cNvPr id="14" name="Text 11"/>
-          <p:cNvSpPr txBox="1"/>
-          <p:nvPr/>
-        </p:nvSpPr>
-        <p:spPr>
-          <a:xfrm>
-            <a:off x="8890000" y="1841500"/>
-            <a:ext cx="2489200" cy="355600"/>
-          </a:xfrm>
-          <a:prstGeom prst="rect">
-            <a:avLst/>
-          </a:prstGeom>
-          <a:noFill/>
-          <a:ln/>
-        </p:spPr>
-        <p:txBody>
-          <a:bodyPr wrap="square" lIns="0" tIns="0" rIns="0" bIns="0" rtlCol="0" anchor="t"/>
-          <a:lstStyle/>
-          <a:p>
-            <a:pPr algn="l" indent="0" marL="0">
-              <a:lnSpc>
-                <a:spcPct val="120000"/>
-              </a:lnSpc>
-              <a:buNone/>
-            </a:pPr>
-            <a:r>
-              <a:rPr lang="en-US" sz="2200" b="1" dirty="0">
-                <a:solidFill>
-                  <a:srgbClr val="121417"/>
-                </a:solidFill>
-              </a:rPr>
-              <a:t>Avril</a:t>
-            </a:r>
-            <a:endParaRPr lang="en-US" sz="2200" dirty="0"/>
-          </a:p>
-        </p:txBody>
-      </p:sp>
-      <p:sp>
-        <p:nvSpPr>
-          <p:cNvPr id="15" name="Text 12"/>
-          <p:cNvSpPr txBox="1"/>
-          <p:nvPr/>
-        </p:nvSpPr>
-        <p:spPr>
-          <a:xfrm>
-            <a:off x="8890000" y="2260600"/>
-            <a:ext cx="2489200" cy="1270000"/>
-          </a:xfrm>
-          <a:prstGeom prst="rect">
-            <a:avLst/>
-          </a:prstGeom>
-          <a:noFill/>
-          <a:ln/>
-        </p:spPr>
-        <p:txBody>
-          <a:bodyPr wrap="square" lIns="0" tIns="0" rIns="0" bIns="0" rtlCol="0" anchor="t"/>
-          <a:lstStyle/>
-          <a:p>
-            <a:pPr algn="l" indent="0" marL="0">
-              <a:lnSpc>
-                <a:spcPct val="135000"/>
-              </a:lnSpc>
-              <a:buNone/>
-            </a:pPr>
-            <a:r>
-              <a:rPr lang="en-US" sz="1400" dirty="0">
-                <a:solidFill>
-                  <a:srgbClr val="4A5056"/>
-                </a:solidFill>
-              </a:rPr>
-              <a:t>Bilan de l’hiver, partagé avec la Ville.</a:t>
+              <a:t>Leur app fait déjà très bien les collectes. On se renvoie les usagers au lieu de se faire concurrence.</a:t>
             </a:r>
             <a:endParaRPr lang="en-US" sz="1400" dirty="0"/>
           </a:p>
@@ -6490,6 +6772,509 @@
         </p:nvSpPr>
         <p:spPr>
           <a:xfrm>
+            <a:off x="812800" y="762000"/>
+            <a:ext cx="10566400" cy="635000"/>
+          </a:xfrm>
+          <a:prstGeom prst="rect">
+            <a:avLst/>
+          </a:prstGeom>
+          <a:noFill/>
+          <a:ln/>
+        </p:spPr>
+        <p:txBody>
+          <a:bodyPr wrap="square" lIns="0" tIns="0" rIns="0" bIns="0" rtlCol="0" anchor="t"/>
+          <a:lstStyle/>
+          <a:p>
+            <a:pPr algn="l" indent="0" marL="0">
+              <a:lnSpc>
+                <a:spcPct val="102000"/>
+              </a:lnSpc>
+              <a:buNone/>
+            </a:pPr>
+            <a:r>
+              <a:rPr lang="en-US" sz="3600" b="1" dirty="0">
+                <a:solidFill>
+                  <a:srgbClr val="121417"/>
+                </a:solidFill>
+              </a:rPr>
+              <a:t>La suite</a:t>
+            </a:r>
+            <a:endParaRPr lang="en-US" sz="3600" dirty="0"/>
+          </a:p>
+        </p:txBody>
+      </p:sp>
+      <p:sp>
+        <p:nvSpPr>
+          <p:cNvPr id="4" name="repère 1"/>
+          <p:cNvSpPr/>
+          <p:nvPr/>
+        </p:nvSpPr>
+        <p:spPr>
+          <a:xfrm>
+            <a:off x="812800" y="1651000"/>
+            <a:ext cx="2489200" cy="38100"/>
+          </a:xfrm>
+          <a:prstGeom prst="rect">
+            <a:avLst/>
+          </a:prstGeom>
+          <a:solidFill>
+            <a:srgbClr val="FFD02B"/>
+          </a:solidFill>
+          <a:ln/>
+        </p:spPr>
+      </p:sp>
+      <p:sp>
+        <p:nvSpPr>
+          <p:cNvPr id="5" name="Text 2"/>
+          <p:cNvSpPr txBox="1"/>
+          <p:nvPr/>
+        </p:nvSpPr>
+        <p:spPr>
+          <a:xfrm>
+            <a:off x="812800" y="1841500"/>
+            <a:ext cx="2489200" cy="355600"/>
+          </a:xfrm>
+          <a:prstGeom prst="rect">
+            <a:avLst/>
+          </a:prstGeom>
+          <a:noFill/>
+          <a:ln/>
+        </p:spPr>
+        <p:txBody>
+          <a:bodyPr wrap="square" lIns="0" tIns="0" rIns="0" bIns="0" rtlCol="0" anchor="t"/>
+          <a:lstStyle/>
+          <a:p>
+            <a:pPr algn="l" indent="0" marL="0">
+              <a:lnSpc>
+                <a:spcPct val="120000"/>
+              </a:lnSpc>
+              <a:buNone/>
+            </a:pPr>
+            <a:r>
+              <a:rPr lang="en-US" sz="2200" b="1" dirty="0">
+                <a:solidFill>
+                  <a:srgbClr val="121417"/>
+                </a:solidFill>
+              </a:rPr>
+              <a:t>Fin octobre</a:t>
+            </a:r>
+            <a:endParaRPr lang="en-US" sz="2200" dirty="0"/>
+          </a:p>
+        </p:txBody>
+      </p:sp>
+      <p:sp>
+        <p:nvSpPr>
+          <p:cNvPr id="6" name="Text 3"/>
+          <p:cNvSpPr txBox="1"/>
+          <p:nvPr/>
+        </p:nvSpPr>
+        <p:spPr>
+          <a:xfrm>
+            <a:off x="812800" y="2260600"/>
+            <a:ext cx="2489200" cy="1270000"/>
+          </a:xfrm>
+          <a:prstGeom prst="rect">
+            <a:avLst/>
+          </a:prstGeom>
+          <a:noFill/>
+          <a:ln/>
+        </p:spPr>
+        <p:txBody>
+          <a:bodyPr wrap="square" lIns="0" tIns="0" rIns="0" bIns="0" rtlCol="0" anchor="t"/>
+          <a:lstStyle/>
+          <a:p>
+            <a:pPr algn="l" indent="0" marL="0">
+              <a:lnSpc>
+                <a:spcPct val="135000"/>
+              </a:lnSpc>
+              <a:buNone/>
+            </a:pPr>
+            <a:r>
+              <a:rPr lang="en-US" sz="1400" dirty="0">
+                <a:solidFill>
+                  <a:srgbClr val="4A5056"/>
+                </a:solidFill>
+              </a:rPr>
+              <a:t>Je présente le projet et j’envoie les demandes.</a:t>
+            </a:r>
+            <a:endParaRPr lang="en-US" sz="1400" dirty="0"/>
+          </a:p>
+        </p:txBody>
+      </p:sp>
+      <p:sp>
+        <p:nvSpPr>
+          <p:cNvPr id="7" name="repère 2"/>
+          <p:cNvSpPr/>
+          <p:nvPr/>
+        </p:nvSpPr>
+        <p:spPr>
+          <a:xfrm>
+            <a:off x="3505200" y="1651000"/>
+            <a:ext cx="2489200" cy="38100"/>
+          </a:xfrm>
+          <a:prstGeom prst="rect">
+            <a:avLst/>
+          </a:prstGeom>
+          <a:solidFill>
+            <a:srgbClr val="121417"/>
+          </a:solidFill>
+          <a:ln/>
+        </p:spPr>
+      </p:sp>
+      <p:sp>
+        <p:nvSpPr>
+          <p:cNvPr id="8" name="Text 5"/>
+          <p:cNvSpPr txBox="1"/>
+          <p:nvPr/>
+        </p:nvSpPr>
+        <p:spPr>
+          <a:xfrm>
+            <a:off x="3505200" y="1841500"/>
+            <a:ext cx="2489200" cy="355600"/>
+          </a:xfrm>
+          <a:prstGeom prst="rect">
+            <a:avLst/>
+          </a:prstGeom>
+          <a:noFill/>
+          <a:ln/>
+        </p:spPr>
+        <p:txBody>
+          <a:bodyPr wrap="square" lIns="0" tIns="0" rIns="0" bIns="0" rtlCol="0" anchor="t"/>
+          <a:lstStyle/>
+          <a:p>
+            <a:pPr algn="l" indent="0" marL="0">
+              <a:lnSpc>
+                <a:spcPct val="120000"/>
+              </a:lnSpc>
+              <a:buNone/>
+            </a:pPr>
+            <a:r>
+              <a:rPr lang="en-US" sz="2200" b="1" dirty="0">
+                <a:solidFill>
+                  <a:srgbClr val="121417"/>
+                </a:solidFill>
+              </a:rPr>
+              <a:t>Mi-décembre</a:t>
+            </a:r>
+            <a:endParaRPr lang="en-US" sz="2200" dirty="0"/>
+          </a:p>
+        </p:txBody>
+      </p:sp>
+      <p:sp>
+        <p:nvSpPr>
+          <p:cNvPr id="9" name="Text 6"/>
+          <p:cNvSpPr txBox="1"/>
+          <p:nvPr/>
+        </p:nvSpPr>
+        <p:spPr>
+          <a:xfrm>
+            <a:off x="3505200" y="2260600"/>
+            <a:ext cx="2489200" cy="1270000"/>
+          </a:xfrm>
+          <a:prstGeom prst="rect">
+            <a:avLst/>
+          </a:prstGeom>
+          <a:noFill/>
+          <a:ln/>
+        </p:spPr>
+        <p:txBody>
+          <a:bodyPr wrap="square" lIns="0" tIns="0" rIns="0" bIns="0" rtlCol="0" anchor="t"/>
+          <a:lstStyle/>
+          <a:p>
+            <a:pPr algn="l" indent="0" marL="0">
+              <a:lnSpc>
+                <a:spcPct val="135000"/>
+              </a:lnSpc>
+              <a:buNone/>
+            </a:pPr>
+            <a:r>
+              <a:rPr lang="en-US" sz="1400" dirty="0">
+                <a:solidFill>
+                  <a:srgbClr val="4A5056"/>
+                </a:solidFill>
+              </a:rPr>
+              <a:t>Première version publique, avec les sources ouvertes et celles que vous aurez acceptées.</a:t>
+            </a:r>
+            <a:endParaRPr lang="en-US" sz="1400" dirty="0"/>
+          </a:p>
+        </p:txBody>
+      </p:sp>
+      <p:sp>
+        <p:nvSpPr>
+          <p:cNvPr id="10" name="repère 3"/>
+          <p:cNvSpPr/>
+          <p:nvPr/>
+        </p:nvSpPr>
+        <p:spPr>
+          <a:xfrm>
+            <a:off x="6197600" y="1651000"/>
+            <a:ext cx="2489200" cy="38100"/>
+          </a:xfrm>
+          <a:prstGeom prst="rect">
+            <a:avLst/>
+          </a:prstGeom>
+          <a:solidFill>
+            <a:srgbClr val="121417"/>
+          </a:solidFill>
+          <a:ln/>
+        </p:spPr>
+      </p:sp>
+      <p:sp>
+        <p:nvSpPr>
+          <p:cNvPr id="11" name="Text 8"/>
+          <p:cNvSpPr txBox="1"/>
+          <p:nvPr/>
+        </p:nvSpPr>
+        <p:spPr>
+          <a:xfrm>
+            <a:off x="6197600" y="1841500"/>
+            <a:ext cx="2489200" cy="355600"/>
+          </a:xfrm>
+          <a:prstGeom prst="rect">
+            <a:avLst/>
+          </a:prstGeom>
+          <a:noFill/>
+          <a:ln/>
+        </p:spPr>
+        <p:txBody>
+          <a:bodyPr wrap="square" lIns="0" tIns="0" rIns="0" bIns="0" rtlCol="0" anchor="t"/>
+          <a:lstStyle/>
+          <a:p>
+            <a:pPr algn="l" indent="0" marL="0">
+              <a:lnSpc>
+                <a:spcPct val="120000"/>
+              </a:lnSpc>
+              <a:buNone/>
+            </a:pPr>
+            <a:r>
+              <a:rPr lang="en-US" sz="2200" b="1" dirty="0">
+                <a:solidFill>
+                  <a:srgbClr val="121417"/>
+                </a:solidFill>
+              </a:rPr>
+              <a:t>Janvier</a:t>
+            </a:r>
+            <a:endParaRPr lang="en-US" sz="2200" dirty="0"/>
+          </a:p>
+        </p:txBody>
+      </p:sp>
+      <p:sp>
+        <p:nvSpPr>
+          <p:cNvPr id="12" name="Text 9"/>
+          <p:cNvSpPr txBox="1"/>
+          <p:nvPr/>
+        </p:nvSpPr>
+        <p:spPr>
+          <a:xfrm>
+            <a:off x="6197600" y="2260600"/>
+            <a:ext cx="2489200" cy="1270000"/>
+          </a:xfrm>
+          <a:prstGeom prst="rect">
+            <a:avLst/>
+          </a:prstGeom>
+          <a:noFill/>
+          <a:ln/>
+        </p:spPr>
+        <p:txBody>
+          <a:bodyPr wrap="square" lIns="0" tIns="0" rIns="0" bIns="0" rtlCol="0" anchor="t"/>
+          <a:lstStyle/>
+          <a:p>
+            <a:pPr algn="l" indent="0" marL="0">
+              <a:lnSpc>
+                <a:spcPct val="135000"/>
+              </a:lnSpc>
+              <a:buNone/>
+            </a:pPr>
+            <a:r>
+              <a:rPr lang="en-US" sz="1400" dirty="0">
+                <a:solidFill>
+                  <a:srgbClr val="4A5056"/>
+                </a:solidFill>
+              </a:rPr>
+              <a:t>Le reste dès les accords, et la version web.</a:t>
+            </a:r>
+            <a:endParaRPr lang="en-US" sz="1400" dirty="0"/>
+          </a:p>
+        </p:txBody>
+      </p:sp>
+      <p:sp>
+        <p:nvSpPr>
+          <p:cNvPr id="13" name="repère 4"/>
+          <p:cNvSpPr/>
+          <p:nvPr/>
+        </p:nvSpPr>
+        <p:spPr>
+          <a:xfrm>
+            <a:off x="8890000" y="1651000"/>
+            <a:ext cx="2489200" cy="38100"/>
+          </a:xfrm>
+          <a:prstGeom prst="rect">
+            <a:avLst/>
+          </a:prstGeom>
+          <a:solidFill>
+            <a:srgbClr val="121417"/>
+          </a:solidFill>
+          <a:ln/>
+        </p:spPr>
+      </p:sp>
+      <p:sp>
+        <p:nvSpPr>
+          <p:cNvPr id="14" name="Text 11"/>
+          <p:cNvSpPr txBox="1"/>
+          <p:nvPr/>
+        </p:nvSpPr>
+        <p:spPr>
+          <a:xfrm>
+            <a:off x="8890000" y="1841500"/>
+            <a:ext cx="2489200" cy="355600"/>
+          </a:xfrm>
+          <a:prstGeom prst="rect">
+            <a:avLst/>
+          </a:prstGeom>
+          <a:noFill/>
+          <a:ln/>
+        </p:spPr>
+        <p:txBody>
+          <a:bodyPr wrap="square" lIns="0" tIns="0" rIns="0" bIns="0" rtlCol="0" anchor="t"/>
+          <a:lstStyle/>
+          <a:p>
+            <a:pPr algn="l" indent="0" marL="0">
+              <a:lnSpc>
+                <a:spcPct val="120000"/>
+              </a:lnSpc>
+              <a:buNone/>
+            </a:pPr>
+            <a:r>
+              <a:rPr lang="en-US" sz="2200" b="1" dirty="0">
+                <a:solidFill>
+                  <a:srgbClr val="121417"/>
+                </a:solidFill>
+              </a:rPr>
+              <a:t>Avril</a:t>
+            </a:r>
+            <a:endParaRPr lang="en-US" sz="2200" dirty="0"/>
+          </a:p>
+        </p:txBody>
+      </p:sp>
+      <p:sp>
+        <p:nvSpPr>
+          <p:cNvPr id="15" name="Text 12"/>
+          <p:cNvSpPr txBox="1"/>
+          <p:nvPr/>
+        </p:nvSpPr>
+        <p:spPr>
+          <a:xfrm>
+            <a:off x="8890000" y="2260600"/>
+            <a:ext cx="2489200" cy="1270000"/>
+          </a:xfrm>
+          <a:prstGeom prst="rect">
+            <a:avLst/>
+          </a:prstGeom>
+          <a:noFill/>
+          <a:ln/>
+        </p:spPr>
+        <p:txBody>
+          <a:bodyPr wrap="square" lIns="0" tIns="0" rIns="0" bIns="0" rtlCol="0" anchor="t"/>
+          <a:lstStyle/>
+          <a:p>
+            <a:pPr algn="l" indent="0" marL="0">
+              <a:lnSpc>
+                <a:spcPct val="135000"/>
+              </a:lnSpc>
+              <a:buNone/>
+            </a:pPr>
+            <a:r>
+              <a:rPr lang="en-US" sz="1400" dirty="0">
+                <a:solidFill>
+                  <a:srgbClr val="4A5056"/>
+                </a:solidFill>
+              </a:rPr>
+              <a:t>Bilan de l’hiver, partagé avec la Ville.</a:t>
+            </a:r>
+            <a:endParaRPr lang="en-US" sz="1400" dirty="0"/>
+          </a:p>
+        </p:txBody>
+      </p:sp>
+      <p:sp>
+        <p:nvSpPr>
+          <p:cNvPr id="25" name="Slide Number Placeholder 0"/>
+          <p:cNvSpPr>
+            <a:spLocks noGrp="1"/>
+          </p:cNvSpPr>
+          <p:nvPr>
+            <p:ph type="sldNum" sz="quarter" idx="4294967295"/>
+          </p:nvPr>
+        </p:nvSpPr>
+        <p:spPr>
+          <a:xfrm>
+            <a:off x="812800" y="6286500"/>
+            <a:ext cx="762000" cy="190500"/>
+          </a:xfrm>
+          <a:prstGeom prst="rect">
+            <a:avLst/>
+          </a:prstGeom>
+          <a:extLst>
+            <a:ext uri="{C572A759-6A51-4108-AA02-DFA0A04FC94B}">
+              <ma14:wrappingTextBoxFlag xmlns:ma14="http://schemas.microsoft.com/office/mac/drawingml/2011/main" val="0"/>
+            </a:ext>
+          </a:extLst>
+        </p:spPr>
+        <p:txBody>
+          <a:bodyPr lIns="0" tIns="0" rIns="0" bIns="0"/>
+          <a:lstStyle>
+            <a:lvl1pPr>
+              <a:defRPr sz="1200">
+                <a:solidFill>
+                  <a:srgbClr val="868C92"/>
+                </a:solidFill>
+              </a:defRPr>
+            </a:lvl1pPr>
+          </a:lstStyle>
+          <a:p>
+            <a:pPr algn="l"/>
+            <a:fld id="{F7021451-1387-4CA6-816F-3879F97B5CBC}" type="slidenum">
+              <a:rPr b="0" lang="en-US"/>
+              <a:t>15</a:t>
+            </a:fld>
+            <a:endParaRPr lang="en-US"/>
+          </a:p>
+        </p:txBody>
+      </p:sp>
+    </p:spTree>
+  </p:cSld>
+  <p:clrMapOvr>
+    <a:masterClrMapping/>
+  </p:clrMapOvr>
+</p:sld>
+</file>
+
+<file path=ppt/slides/slide16.xml><?xml version="1.0" encoding="utf-8"?>
+<p:sld xmlns:a="http://schemas.openxmlformats.org/drawingml/2006/main" xmlns:r="http://schemas.openxmlformats.org/officeDocument/2006/relationships" xmlns:p="http://schemas.openxmlformats.org/presentationml/2006/main">
+  <p:cSld name="Slide 16">
+    <p:spTree>
+      <p:nvGrpSpPr>
+        <p:cNvPr id="1" name=""/>
+        <p:cNvGrpSpPr/>
+        <p:nvPr/>
+      </p:nvGrpSpPr>
+      <p:grpSpPr>
+        <a:xfrm>
+          <a:off x="0" y="0"/>
+          <a:ext cx="0" cy="0"/>
+          <a:chOff x="0" y="0"/>
+          <a:chExt cx="0" cy="0"/>
+        </a:xfrm>
+      </p:grpSpPr>
+      <p:sp>
+        <p:nvSpPr>
+          <p:cNvPr id="2" name="Text 0"/>
+          <p:cNvSpPr/>
+          <p:nvPr>
+            <p:ph idx="100" type="title" hasCustomPrompt="1"/>
+          </p:nvPr>
+        </p:nvSpPr>
+        <p:spPr>
+          <a:xfrm>
             <a:off x="812800" y="2425700"/>
             <a:ext cx="10566400" cy="825500"/>
           </a:xfrm>
@@ -7850,7 +8635,7 @@
                   <a:srgbClr val="121417"/>
                 </a:solidFill>
               </a:rPr>
-              <a:t>Neuf sources, une seule app</a:t>
+              <a:t>Douze sources, une seule app</a:t>
             </a:r>
             <a:endParaRPr lang="en-US" sz="3600" dirty="0"/>
           </a:p>
@@ -7889,7 +8674,7 @@
                   <a:srgbClr val="4A5056"/>
                 </a:solidFill>
               </a:rPr>
-              <a:t>Avant, il fallait les consulter une par une. L’app les lit en direct, pour ton adresse.</a:t>
+              <a:t>L’app les lit en direct, pour ton adresse. Certaines ne se montrent que quand elles comptent.</a:t>
             </a:r>
             <a:endParaRPr lang="en-US" sz="1600" dirty="0"/>
           </a:p>
@@ -7903,12 +8688,12 @@
         </p:nvSpPr>
         <p:spPr>
           <a:xfrm>
-            <a:off x="812800" y="1841500"/>
-            <a:ext cx="3435350" cy="1047750"/>
+            <a:off x="812800" y="1778000"/>
+            <a:ext cx="2546350" cy="1117600"/>
           </a:xfrm>
           <a:prstGeom prst="roundRect">
             <a:avLst>
-              <a:gd name="adj" fmla="val 16970"/>
+              <a:gd name="adj" fmla="val 15909"/>
             </a:avLst>
           </a:prstGeom>
           <a:solidFill>
@@ -7925,7 +8710,7 @@
         </p:nvSpPr>
         <p:spPr>
           <a:xfrm>
-            <a:off x="1016000" y="2019300"/>
+            <a:off x="990600" y="1917700"/>
             <a:ext cx="127000" cy="127000"/>
           </a:xfrm>
           <a:prstGeom prst="ellipse">
@@ -7945,8 +8730,8 @@
         </p:nvSpPr>
         <p:spPr>
           <a:xfrm>
-            <a:off x="1016000" y="2197100"/>
-            <a:ext cx="3028950" cy="254000"/>
+            <a:off x="990600" y="2095500"/>
+            <a:ext cx="2190750" cy="254000"/>
           </a:xfrm>
           <a:prstGeom prst="rect">
             <a:avLst/>
@@ -7984,8 +8769,8 @@
         </p:nvSpPr>
         <p:spPr>
           <a:xfrm>
-            <a:off x="1016000" y="2489200"/>
-            <a:ext cx="3028950" cy="254000"/>
+            <a:off x="990600" y="2374900"/>
+            <a:ext cx="2190750" cy="406400"/>
           </a:xfrm>
           <a:prstGeom prst="rect">
             <a:avLst/>
@@ -8023,12 +8808,12 @@
         </p:nvSpPr>
         <p:spPr>
           <a:xfrm>
-            <a:off x="4375150" y="1841500"/>
-            <a:ext cx="3435350" cy="1047750"/>
+            <a:off x="3486150" y="1778000"/>
+            <a:ext cx="2546350" cy="1117600"/>
           </a:xfrm>
           <a:prstGeom prst="roundRect">
             <a:avLst>
-              <a:gd name="adj" fmla="val 16970"/>
+              <a:gd name="adj" fmla="val 15909"/>
             </a:avLst>
           </a:prstGeom>
           <a:solidFill>
@@ -8045,7 +8830,7 @@
         </p:nvSpPr>
         <p:spPr>
           <a:xfrm>
-            <a:off x="4578350" y="2019300"/>
+            <a:off x="3663950" y="1917700"/>
             <a:ext cx="127000" cy="127000"/>
           </a:xfrm>
           <a:prstGeom prst="ellipse">
@@ -8065,8 +8850,8 @@
         </p:nvSpPr>
         <p:spPr>
           <a:xfrm>
-            <a:off x="4578350" y="2197100"/>
-            <a:ext cx="3028950" cy="254000"/>
+            <a:off x="3663950" y="2095500"/>
+            <a:ext cx="2190750" cy="254000"/>
           </a:xfrm>
           <a:prstGeom prst="rect">
             <a:avLst/>
@@ -8104,8 +8889,8 @@
         </p:nvSpPr>
         <p:spPr>
           <a:xfrm>
-            <a:off x="4578350" y="2489200"/>
-            <a:ext cx="3028950" cy="254000"/>
+            <a:off x="3663950" y="2374900"/>
+            <a:ext cx="2190750" cy="406400"/>
           </a:xfrm>
           <a:prstGeom prst="rect">
             <a:avLst/>
@@ -8143,12 +8928,12 @@
         </p:nvSpPr>
         <p:spPr>
           <a:xfrm>
-            <a:off x="7937500" y="1841500"/>
-            <a:ext cx="3435350" cy="1047750"/>
+            <a:off x="6159500" y="1778000"/>
+            <a:ext cx="2546350" cy="1117600"/>
           </a:xfrm>
           <a:prstGeom prst="roundRect">
             <a:avLst>
-              <a:gd name="adj" fmla="val 16970"/>
+              <a:gd name="adj" fmla="val 15909"/>
             </a:avLst>
           </a:prstGeom>
           <a:solidFill>
@@ -8165,7 +8950,7 @@
         </p:nvSpPr>
         <p:spPr>
           <a:xfrm>
-            <a:off x="8140700" y="2019300"/>
+            <a:off x="6337300" y="1917700"/>
             <a:ext cx="127000" cy="127000"/>
           </a:xfrm>
           <a:prstGeom prst="ellipse">
@@ -8185,8 +8970,8 @@
         </p:nvSpPr>
         <p:spPr>
           <a:xfrm>
-            <a:off x="8140700" y="2197100"/>
-            <a:ext cx="3028950" cy="254000"/>
+            <a:off x="6337300" y="2095500"/>
+            <a:ext cx="2190750" cy="254000"/>
           </a:xfrm>
           <a:prstGeom prst="rect">
             <a:avLst/>
@@ -8224,8 +9009,8 @@
         </p:nvSpPr>
         <p:spPr>
           <a:xfrm>
-            <a:off x="8140700" y="2489200"/>
-            <a:ext cx="3028950" cy="254000"/>
+            <a:off x="6337300" y="2374900"/>
+            <a:ext cx="2190750" cy="406400"/>
           </a:xfrm>
           <a:prstGeom prst="rect">
             <a:avLst/>
@@ -8263,12 +9048,12 @@
         </p:nvSpPr>
         <p:spPr>
           <a:xfrm>
-            <a:off x="812800" y="3016250"/>
-            <a:ext cx="3435350" cy="1047750"/>
+            <a:off x="8832850" y="1778000"/>
+            <a:ext cx="2546350" cy="1117600"/>
           </a:xfrm>
           <a:prstGeom prst="roundRect">
             <a:avLst>
-              <a:gd name="adj" fmla="val 16970"/>
+              <a:gd name="adj" fmla="val 15909"/>
             </a:avLst>
           </a:prstGeom>
           <a:solidFill>
@@ -8285,7 +9070,7 @@
         </p:nvSpPr>
         <p:spPr>
           <a:xfrm>
-            <a:off x="1016000" y="3194050"/>
+            <a:off x="9010650" y="1917700"/>
             <a:ext cx="127000" cy="127000"/>
           </a:xfrm>
           <a:prstGeom prst="ellipse">
@@ -8305,8 +9090,8 @@
         </p:nvSpPr>
         <p:spPr>
           <a:xfrm>
-            <a:off x="1016000" y="3371850"/>
-            <a:ext cx="3028950" cy="254000"/>
+            <a:off x="9010650" y="2095500"/>
+            <a:ext cx="2190750" cy="254000"/>
           </a:xfrm>
           <a:prstGeom prst="rect">
             <a:avLst/>
@@ -8344,8 +9129,8 @@
         </p:nvSpPr>
         <p:spPr>
           <a:xfrm>
-            <a:off x="1016000" y="3663950"/>
-            <a:ext cx="3028950" cy="254000"/>
+            <a:off x="9010650" y="2374900"/>
+            <a:ext cx="2190750" cy="406400"/>
           </a:xfrm>
           <a:prstGeom prst="rect">
             <a:avLst/>
@@ -8383,12 +9168,12 @@
         </p:nvSpPr>
         <p:spPr>
           <a:xfrm>
-            <a:off x="4375150" y="3016250"/>
-            <a:ext cx="3435350" cy="1047750"/>
+            <a:off x="812800" y="2997200"/>
+            <a:ext cx="2546350" cy="1117600"/>
           </a:xfrm>
           <a:prstGeom prst="roundRect">
             <a:avLst>
-              <a:gd name="adj" fmla="val 16970"/>
+              <a:gd name="adj" fmla="val 15909"/>
             </a:avLst>
           </a:prstGeom>
           <a:solidFill>
@@ -8405,7 +9190,7 @@
         </p:nvSpPr>
         <p:spPr>
           <a:xfrm>
-            <a:off x="4578350" y="3194050"/>
+            <a:off x="990600" y="3136900"/>
             <a:ext cx="127000" cy="127000"/>
           </a:xfrm>
           <a:prstGeom prst="ellipse">
@@ -8425,8 +9210,8 @@
         </p:nvSpPr>
         <p:spPr>
           <a:xfrm>
-            <a:off x="4578350" y="3371850"/>
-            <a:ext cx="3028950" cy="254000"/>
+            <a:off x="990600" y="3314700"/>
+            <a:ext cx="2190750" cy="254000"/>
           </a:xfrm>
           <a:prstGeom prst="rect">
             <a:avLst/>
@@ -8464,8 +9249,8 @@
         </p:nvSpPr>
         <p:spPr>
           <a:xfrm>
-            <a:off x="4578350" y="3663950"/>
-            <a:ext cx="3028950" cy="254000"/>
+            <a:off x="990600" y="3594100"/>
+            <a:ext cx="2190750" cy="406400"/>
           </a:xfrm>
           <a:prstGeom prst="rect">
             <a:avLst/>
@@ -8503,12 +9288,12 @@
         </p:nvSpPr>
         <p:spPr>
           <a:xfrm>
-            <a:off x="7937500" y="3016250"/>
-            <a:ext cx="3435350" cy="1047750"/>
+            <a:off x="3486150" y="2997200"/>
+            <a:ext cx="2546350" cy="1117600"/>
           </a:xfrm>
           <a:prstGeom prst="roundRect">
             <a:avLst>
-              <a:gd name="adj" fmla="val 16970"/>
+              <a:gd name="adj" fmla="val 15909"/>
             </a:avLst>
           </a:prstGeom>
           <a:solidFill>
@@ -8525,7 +9310,7 @@
         </p:nvSpPr>
         <p:spPr>
           <a:xfrm>
-            <a:off x="8140700" y="3194050"/>
+            <a:off x="3663950" y="3136900"/>
             <a:ext cx="127000" cy="127000"/>
           </a:xfrm>
           <a:prstGeom prst="ellipse">
@@ -8545,8 +9330,8 @@
         </p:nvSpPr>
         <p:spPr>
           <a:xfrm>
-            <a:off x="8140700" y="3371850"/>
-            <a:ext cx="3028950" cy="254000"/>
+            <a:off x="3663950" y="3314700"/>
+            <a:ext cx="2190750" cy="254000"/>
           </a:xfrm>
           <a:prstGeom prst="rect">
             <a:avLst/>
@@ -8584,8 +9369,8 @@
         </p:nvSpPr>
         <p:spPr>
           <a:xfrm>
-            <a:off x="8140700" y="3663950"/>
-            <a:ext cx="3028950" cy="254000"/>
+            <a:off x="3663950" y="3594100"/>
+            <a:ext cx="2190750" cy="406400"/>
           </a:xfrm>
           <a:prstGeom prst="rect">
             <a:avLst/>
@@ -8623,12 +9408,12 @@
         </p:nvSpPr>
         <p:spPr>
           <a:xfrm>
-            <a:off x="812800" y="4191000"/>
-            <a:ext cx="3435350" cy="1047750"/>
+            <a:off x="6159500" y="2997200"/>
+            <a:ext cx="2546350" cy="1117600"/>
           </a:xfrm>
           <a:prstGeom prst="roundRect">
             <a:avLst>
-              <a:gd name="adj" fmla="val 16970"/>
+              <a:gd name="adj" fmla="val 15909"/>
             </a:avLst>
           </a:prstGeom>
           <a:solidFill>
@@ -8645,7 +9430,7 @@
         </p:nvSpPr>
         <p:spPr>
           <a:xfrm>
-            <a:off x="1016000" y="4368800"/>
+            <a:off x="6337300" y="3136900"/>
             <a:ext cx="127000" cy="127000"/>
           </a:xfrm>
           <a:prstGeom prst="ellipse">
@@ -8665,8 +9450,8 @@
         </p:nvSpPr>
         <p:spPr>
           <a:xfrm>
-            <a:off x="1016000" y="4546600"/>
-            <a:ext cx="3028950" cy="254000"/>
+            <a:off x="6337300" y="3314700"/>
+            <a:ext cx="2190750" cy="254000"/>
           </a:xfrm>
           <a:prstGeom prst="rect">
             <a:avLst/>
@@ -8704,8 +9489,8 @@
         </p:nvSpPr>
         <p:spPr>
           <a:xfrm>
-            <a:off x="1016000" y="4838700"/>
-            <a:ext cx="3028950" cy="254000"/>
+            <a:off x="6337300" y="3594100"/>
+            <a:ext cx="2190750" cy="406400"/>
           </a:xfrm>
           <a:prstGeom prst="rect">
             <a:avLst/>
@@ -8743,12 +9528,12 @@
         </p:nvSpPr>
         <p:spPr>
           <a:xfrm>
-            <a:off x="4375150" y="4191000"/>
-            <a:ext cx="3435350" cy="1047750"/>
+            <a:off x="8832850" y="2997200"/>
+            <a:ext cx="2546350" cy="1117600"/>
           </a:xfrm>
           <a:prstGeom prst="roundRect">
             <a:avLst>
-              <a:gd name="adj" fmla="val 16970"/>
+              <a:gd name="adj" fmla="val 15909"/>
             </a:avLst>
           </a:prstGeom>
           <a:solidFill>
@@ -8765,7 +9550,7 @@
         </p:nvSpPr>
         <p:spPr>
           <a:xfrm>
-            <a:off x="4578350" y="4368800"/>
+            <a:off x="9010650" y="3136900"/>
             <a:ext cx="127000" cy="127000"/>
           </a:xfrm>
           <a:prstGeom prst="ellipse">
@@ -8785,8 +9570,8 @@
         </p:nvSpPr>
         <p:spPr>
           <a:xfrm>
-            <a:off x="4578350" y="4546600"/>
-            <a:ext cx="3028950" cy="254000"/>
+            <a:off x="9010650" y="3314700"/>
+            <a:ext cx="2190750" cy="254000"/>
           </a:xfrm>
           <a:prstGeom prst="rect">
             <a:avLst/>
@@ -8824,8 +9609,8 @@
         </p:nvSpPr>
         <p:spPr>
           <a:xfrm>
-            <a:off x="4578350" y="4838700"/>
-            <a:ext cx="3028950" cy="254000"/>
+            <a:off x="9010650" y="3594100"/>
+            <a:ext cx="2190750" cy="406400"/>
           </a:xfrm>
           <a:prstGeom prst="rect">
             <a:avLst/>
@@ -8863,12 +9648,12 @@
         </p:nvSpPr>
         <p:spPr>
           <a:xfrm>
-            <a:off x="7937500" y="4191000"/>
-            <a:ext cx="3435350" cy="1047750"/>
+            <a:off x="812800" y="4216400"/>
+            <a:ext cx="2546350" cy="1117600"/>
           </a:xfrm>
           <a:prstGeom prst="roundRect">
             <a:avLst>
-              <a:gd name="adj" fmla="val 16970"/>
+              <a:gd name="adj" fmla="val 15909"/>
             </a:avLst>
           </a:prstGeom>
           <a:solidFill>
@@ -8885,7 +9670,7 @@
         </p:nvSpPr>
         <p:spPr>
           <a:xfrm>
-            <a:off x="8140700" y="4368800"/>
+            <a:off x="990600" y="4356100"/>
             <a:ext cx="127000" cy="127000"/>
           </a:xfrm>
           <a:prstGeom prst="ellipse">
@@ -8905,8 +9690,8 @@
         </p:nvSpPr>
         <p:spPr>
           <a:xfrm>
-            <a:off x="8140700" y="4546600"/>
-            <a:ext cx="3028950" cy="254000"/>
+            <a:off x="990600" y="4533900"/>
+            <a:ext cx="2190750" cy="254000"/>
           </a:xfrm>
           <a:prstGeom prst="rect">
             <a:avLst/>
@@ -8944,8 +9729,8 @@
         </p:nvSpPr>
         <p:spPr>
           <a:xfrm>
-            <a:off x="8140700" y="4838700"/>
-            <a:ext cx="3028950" cy="254000"/>
+            <a:off x="990600" y="4813300"/>
+            <a:ext cx="2190750" cy="406400"/>
           </a:xfrm>
           <a:prstGeom prst="rect">
             <a:avLst/>
@@ -8977,7 +9762,367 @@
       </p:sp>
       <p:sp>
         <p:nvSpPr>
-          <p:cNvPr id="41" name="Text 38"/>
+          <p:cNvPr id="41" name="source Qualité de l’air"/>
+          <p:cNvSpPr/>
+          <p:nvPr/>
+        </p:nvSpPr>
+        <p:spPr>
+          <a:xfrm>
+            <a:off x="3486150" y="4216400"/>
+            <a:ext cx="2546350" cy="1117600"/>
+          </a:xfrm>
+          <a:prstGeom prst="roundRect">
+            <a:avLst>
+              <a:gd name="adj" fmla="val 15909"/>
+            </a:avLst>
+          </a:prstGeom>
+          <a:solidFill>
+            <a:srgbClr val="F1F2EF"/>
+          </a:solidFill>
+          <a:ln/>
+        </p:spPr>
+      </p:sp>
+      <p:sp>
+        <p:nvSpPr>
+          <p:cNvPr id="42" name="Shape 39"/>
+          <p:cNvSpPr/>
+          <p:nvPr/>
+        </p:nvSpPr>
+        <p:spPr>
+          <a:xfrm>
+            <a:off x="3663950" y="4356100"/>
+            <a:ext cx="127000" cy="127000"/>
+          </a:xfrm>
+          <a:prstGeom prst="ellipse">
+            <a:avLst/>
+          </a:prstGeom>
+          <a:solidFill>
+            <a:srgbClr val="3E8E7E"/>
+          </a:solidFill>
+          <a:ln/>
+        </p:spPr>
+      </p:sp>
+      <p:sp>
+        <p:nvSpPr>
+          <p:cNvPr id="43" name="Text 40"/>
+          <p:cNvSpPr txBox="1"/>
+          <p:nvPr/>
+        </p:nvSpPr>
+        <p:spPr>
+          <a:xfrm>
+            <a:off x="3663950" y="4533900"/>
+            <a:ext cx="2190750" cy="254000"/>
+          </a:xfrm>
+          <a:prstGeom prst="rect">
+            <a:avLst/>
+          </a:prstGeom>
+          <a:noFill/>
+          <a:ln/>
+        </p:spPr>
+        <p:txBody>
+          <a:bodyPr wrap="square" lIns="0" tIns="0" rIns="0" bIns="0" rtlCol="0" anchor="t"/>
+          <a:lstStyle/>
+          <a:p>
+            <a:pPr algn="l" indent="0" marL="0">
+              <a:lnSpc>
+                <a:spcPct val="120000"/>
+              </a:lnSpc>
+              <a:buNone/>
+            </a:pPr>
+            <a:r>
+              <a:rPr lang="en-US" sz="1600" b="1" dirty="0">
+                <a:solidFill>
+                  <a:srgbClr val="121417"/>
+                </a:solidFill>
+              </a:rPr>
+              <a:t>Qualité de l’air</a:t>
+            </a:r>
+            <a:endParaRPr lang="en-US" sz="1600" dirty="0"/>
+          </a:p>
+        </p:txBody>
+      </p:sp>
+      <p:sp>
+        <p:nvSpPr>
+          <p:cNvPr id="44" name="Text 41"/>
+          <p:cNvSpPr txBox="1"/>
+          <p:nvPr/>
+        </p:nvSpPr>
+        <p:spPr>
+          <a:xfrm>
+            <a:off x="3663950" y="4813300"/>
+            <a:ext cx="2190750" cy="406400"/>
+          </a:xfrm>
+          <a:prstGeom prst="rect">
+            <a:avLst/>
+          </a:prstGeom>
+          <a:noFill/>
+          <a:ln/>
+        </p:spPr>
+        <p:txBody>
+          <a:bodyPr wrap="square" lIns="0" tIns="0" rIns="0" bIns="0" rtlCol="0" anchor="t"/>
+          <a:lstStyle/>
+          <a:p>
+            <a:pPr algn="l" indent="0" marL="0">
+              <a:lnSpc>
+                <a:spcPct val="120000"/>
+              </a:lnSpc>
+              <a:buNone/>
+            </a:pPr>
+            <a:r>
+              <a:rPr lang="en-US" sz="1200" dirty="0">
+                <a:solidFill>
+                  <a:srgbClr val="4A5056"/>
+                </a:solidFill>
+              </a:rPr>
+              <a:t>Stations Parc Powell et UQAC, si l’air est mauvais</a:t>
+            </a:r>
+            <a:endParaRPr lang="en-US" sz="1200" dirty="0"/>
+          </a:p>
+        </p:txBody>
+      </p:sp>
+      <p:sp>
+        <p:nvSpPr>
+          <p:cNvPr id="45" name="source Feux à ciel ouvert"/>
+          <p:cNvSpPr/>
+          <p:nvPr/>
+        </p:nvSpPr>
+        <p:spPr>
+          <a:xfrm>
+            <a:off x="6159500" y="4216400"/>
+            <a:ext cx="2546350" cy="1117600"/>
+          </a:xfrm>
+          <a:prstGeom prst="roundRect">
+            <a:avLst>
+              <a:gd name="adj" fmla="val 15909"/>
+            </a:avLst>
+          </a:prstGeom>
+          <a:solidFill>
+            <a:srgbClr val="F1F2EF"/>
+          </a:solidFill>
+          <a:ln/>
+        </p:spPr>
+      </p:sp>
+      <p:sp>
+        <p:nvSpPr>
+          <p:cNvPr id="46" name="Shape 43"/>
+          <p:cNvSpPr/>
+          <p:nvPr/>
+        </p:nvSpPr>
+        <p:spPr>
+          <a:xfrm>
+            <a:off x="6337300" y="4356100"/>
+            <a:ext cx="127000" cy="127000"/>
+          </a:xfrm>
+          <a:prstGeom prst="ellipse">
+            <a:avLst/>
+          </a:prstGeom>
+          <a:solidFill>
+            <a:srgbClr val="C8553D"/>
+          </a:solidFill>
+          <a:ln/>
+        </p:spPr>
+      </p:sp>
+      <p:sp>
+        <p:nvSpPr>
+          <p:cNvPr id="47" name="Text 44"/>
+          <p:cNvSpPr txBox="1"/>
+          <p:nvPr/>
+        </p:nvSpPr>
+        <p:spPr>
+          <a:xfrm>
+            <a:off x="6337300" y="4533900"/>
+            <a:ext cx="2190750" cy="254000"/>
+          </a:xfrm>
+          <a:prstGeom prst="rect">
+            <a:avLst/>
+          </a:prstGeom>
+          <a:noFill/>
+          <a:ln/>
+        </p:spPr>
+        <p:txBody>
+          <a:bodyPr wrap="square" lIns="0" tIns="0" rIns="0" bIns="0" rtlCol="0" anchor="t"/>
+          <a:lstStyle/>
+          <a:p>
+            <a:pPr algn="l" indent="0" marL="0">
+              <a:lnSpc>
+                <a:spcPct val="120000"/>
+              </a:lnSpc>
+              <a:buNone/>
+            </a:pPr>
+            <a:r>
+              <a:rPr lang="en-US" sz="1600" b="1" dirty="0">
+                <a:solidFill>
+                  <a:srgbClr val="121417"/>
+                </a:solidFill>
+              </a:rPr>
+              <a:t>Feux à ciel ouvert</a:t>
+            </a:r>
+            <a:endParaRPr lang="en-US" sz="1600" dirty="0"/>
+          </a:p>
+        </p:txBody>
+      </p:sp>
+      <p:sp>
+        <p:nvSpPr>
+          <p:cNvPr id="48" name="Text 45"/>
+          <p:cNvSpPr txBox="1"/>
+          <p:nvPr/>
+        </p:nvSpPr>
+        <p:spPr>
+          <a:xfrm>
+            <a:off x="6337300" y="4813300"/>
+            <a:ext cx="2190750" cy="406400"/>
+          </a:xfrm>
+          <a:prstGeom prst="rect">
+            <a:avLst/>
+          </a:prstGeom>
+          <a:noFill/>
+          <a:ln/>
+        </p:spPr>
+        <p:txBody>
+          <a:bodyPr wrap="square" lIns="0" tIns="0" rIns="0" bIns="0" rtlCol="0" anchor="t"/>
+          <a:lstStyle/>
+          <a:p>
+            <a:pPr algn="l" indent="0" marL="0">
+              <a:lnSpc>
+                <a:spcPct val="120000"/>
+              </a:lnSpc>
+              <a:buNone/>
+            </a:pPr>
+            <a:r>
+              <a:rPr lang="en-US" sz="1200" dirty="0">
+                <a:solidFill>
+                  <a:srgbClr val="4A5056"/>
+                </a:solidFill>
+              </a:rPr>
+              <a:t>Interdictions de la SOPFEU, si l’adresse est visée</a:t>
+            </a:r>
+            <a:endParaRPr lang="en-US" sz="1200" dirty="0"/>
+          </a:p>
+        </p:txBody>
+      </p:sp>
+      <p:sp>
+        <p:nvSpPr>
+          <p:cNvPr id="49" name="source Pointes d’hiver"/>
+          <p:cNvSpPr/>
+          <p:nvPr/>
+        </p:nvSpPr>
+        <p:spPr>
+          <a:xfrm>
+            <a:off x="8832850" y="4216400"/>
+            <a:ext cx="2546350" cy="1117600"/>
+          </a:xfrm>
+          <a:prstGeom prst="roundRect">
+            <a:avLst>
+              <a:gd name="adj" fmla="val 15909"/>
+            </a:avLst>
+          </a:prstGeom>
+          <a:solidFill>
+            <a:srgbClr val="F1F2EF"/>
+          </a:solidFill>
+          <a:ln/>
+        </p:spPr>
+      </p:sp>
+      <p:sp>
+        <p:nvSpPr>
+          <p:cNvPr id="50" name="Shape 47"/>
+          <p:cNvSpPr/>
+          <p:nvPr/>
+        </p:nvSpPr>
+        <p:spPr>
+          <a:xfrm>
+            <a:off x="9010650" y="4356100"/>
+            <a:ext cx="127000" cy="127000"/>
+          </a:xfrm>
+          <a:prstGeom prst="ellipse">
+            <a:avLst/>
+          </a:prstGeom>
+          <a:solidFill>
+            <a:srgbClr val="8E5BB5"/>
+          </a:solidFill>
+          <a:ln/>
+        </p:spPr>
+      </p:sp>
+      <p:sp>
+        <p:nvSpPr>
+          <p:cNvPr id="51" name="Text 48"/>
+          <p:cNvSpPr txBox="1"/>
+          <p:nvPr/>
+        </p:nvSpPr>
+        <p:spPr>
+          <a:xfrm>
+            <a:off x="9010650" y="4533900"/>
+            <a:ext cx="2190750" cy="254000"/>
+          </a:xfrm>
+          <a:prstGeom prst="rect">
+            <a:avLst/>
+          </a:prstGeom>
+          <a:noFill/>
+          <a:ln/>
+        </p:spPr>
+        <p:txBody>
+          <a:bodyPr wrap="square" lIns="0" tIns="0" rIns="0" bIns="0" rtlCol="0" anchor="t"/>
+          <a:lstStyle/>
+          <a:p>
+            <a:pPr algn="l" indent="0" marL="0">
+              <a:lnSpc>
+                <a:spcPct val="120000"/>
+              </a:lnSpc>
+              <a:buNone/>
+            </a:pPr>
+            <a:r>
+              <a:rPr lang="en-US" sz="1600" b="1" dirty="0">
+                <a:solidFill>
+                  <a:srgbClr val="121417"/>
+                </a:solidFill>
+              </a:rPr>
+              <a:t>Pointes d’hiver</a:t>
+            </a:r>
+            <a:endParaRPr lang="en-US" sz="1600" dirty="0"/>
+          </a:p>
+        </p:txBody>
+      </p:sp>
+      <p:sp>
+        <p:nvSpPr>
+          <p:cNvPr id="52" name="Text 49"/>
+          <p:cNvSpPr txBox="1"/>
+          <p:nvPr/>
+        </p:nvSpPr>
+        <p:spPr>
+          <a:xfrm>
+            <a:off x="9010650" y="4813300"/>
+            <a:ext cx="2190750" cy="406400"/>
+          </a:xfrm>
+          <a:prstGeom prst="rect">
+            <a:avLst/>
+          </a:prstGeom>
+          <a:noFill/>
+          <a:ln/>
+        </p:spPr>
+        <p:txBody>
+          <a:bodyPr wrap="square" lIns="0" tIns="0" rIns="0" bIns="0" rtlCol="0" anchor="t"/>
+          <a:lstStyle/>
+          <a:p>
+            <a:pPr algn="l" indent="0" marL="0">
+              <a:lnSpc>
+                <a:spcPct val="120000"/>
+              </a:lnSpc>
+              <a:buNone/>
+            </a:pPr>
+            <a:r>
+              <a:rPr lang="en-US" sz="1200" dirty="0">
+                <a:solidFill>
+                  <a:srgbClr val="4A5056"/>
+                </a:solidFill>
+              </a:rPr>
+              <a:t>Hydro-Québec, la veille, pour le Crédit hivernal ou Flex D</a:t>
+            </a:r>
+            <a:endParaRPr lang="en-US" sz="1200" dirty="0"/>
+          </a:p>
+        </p:txBody>
+      </p:sp>
+      <p:sp>
+        <p:nvSpPr>
+          <p:cNvPr id="53" name="Text 50"/>
           <p:cNvSpPr txBox="1"/>
           <p:nvPr/>
         </p:nvSpPr>
@@ -12225,10 +13370,10 @@
             <a:r>
               <a:rPr lang="en-US" sz="3600" b="1" dirty="0">
                 <a:solidFill>
-                  <a:srgbClr val="F1F2F3"/>
-                </a:solidFill>
-              </a:rPr>
-              <a:t>Fiable, même sans réseau</a:t>
+                  <a:srgbClr val="121417"/>
+                </a:solidFill>
+              </a:rPr>
+              <a:t>Et pour ceux qu’on aime</a:t>
             </a:r>
             <a:endParaRPr lang="en-US" sz="3600" dirty="0"/>
           </a:p>
@@ -12236,14 +13381,36 @@
       </p:sp>
       <p:sp>
         <p:nvSpPr>
-          <p:cNvPr id="4" name="Text 1"/>
-          <p:cNvSpPr txBox="1"/>
-          <p:nvPr/>
-        </p:nvSpPr>
-        <p:spPr>
-          <a:xfrm>
-            <a:off x="812800" y="1600200"/>
-            <a:ext cx="2997200" cy="254000"/>
+          <p:cNvPr id="4" name="carte 1"/>
+          <p:cNvSpPr/>
+          <p:nvPr/>
+        </p:nvSpPr>
+        <p:spPr>
+          <a:xfrm>
+            <a:off x="812800" y="1574800"/>
+            <a:ext cx="3403600" cy="2984500"/>
+          </a:xfrm>
+          <a:prstGeom prst="roundRect">
+            <a:avLst>
+              <a:gd name="adj" fmla="val 6809"/>
+            </a:avLst>
+          </a:prstGeom>
+          <a:solidFill>
+            <a:srgbClr val="F1F2EF"/>
+          </a:solidFill>
+          <a:ln/>
+        </p:spPr>
+      </p:sp>
+      <p:sp>
+        <p:nvSpPr>
+          <p:cNvPr id="5" name="Text 2"/>
+          <p:cNvSpPr txBox="1"/>
+          <p:nvPr/>
+        </p:nvSpPr>
+        <p:spPr>
+          <a:xfrm>
+            <a:off x="1066800" y="1828800"/>
+            <a:ext cx="2895600" cy="215900"/>
           </a:xfrm>
           <a:prstGeom prst="rect">
             <a:avLst/>
@@ -12262,557 +13429,524 @@
               <a:buNone/>
             </a:pPr>
             <a:r>
-              <a:rPr lang="en-US" sz="1600" b="1" dirty="0">
-                <a:solidFill>
-                  <a:srgbClr val="FFD02B"/>
-                </a:solidFill>
-              </a:rPr>
-              <a:t>Marche sans réseau</a:t>
-            </a:r>
-            <a:endParaRPr lang="en-US" sz="1600" dirty="0"/>
-          </a:p>
-        </p:txBody>
-      </p:sp>
-      <p:sp>
-        <p:nvSpPr>
-          <p:cNvPr id="5" name="Text 2"/>
-          <p:cNvSpPr txBox="1"/>
-          <p:nvPr/>
-        </p:nvSpPr>
-        <p:spPr>
-          <a:xfrm>
-            <a:off x="812800" y="1955800"/>
-            <a:ext cx="2997200" cy="2032000"/>
-          </a:xfrm>
-          <a:prstGeom prst="rect">
-            <a:avLst/>
-          </a:prstGeom>
-          <a:noFill/>
-          <a:ln/>
-        </p:spPr>
-        <p:txBody>
-          <a:bodyPr wrap="square" lIns="0" tIns="0" rIns="0" bIns="0" rtlCol="0" anchor="t"/>
-          <a:lstStyle/>
-          <a:p>
-            <a:pPr marL="228600" indent="-228600">
-              <a:lnSpc>
-                <a:spcPct val="125000"/>
-              </a:lnSpc>
-              <a:spcAft>
-                <a:spcPts val="400"/>
-              </a:spcAft>
-              <a:buSzPct val="100000"/>
-              <a:buChar char="•"/>
+              <a:rPr lang="en-US" sz="1200" b="1" dirty="0">
+                <a:solidFill>
+                  <a:srgbClr val="1A8FC4"/>
+                </a:solidFill>
+              </a:rPr>
+              <a:t>Veiller sur un proche</a:t>
+            </a:r>
+            <a:endParaRPr lang="en-US" sz="1200" dirty="0"/>
+          </a:p>
+        </p:txBody>
+      </p:sp>
+      <p:sp>
+        <p:nvSpPr>
+          <p:cNvPr id="6" name="Text 3"/>
+          <p:cNvSpPr txBox="1"/>
+          <p:nvPr/>
+        </p:nvSpPr>
+        <p:spPr>
+          <a:xfrm>
+            <a:off x="1066800" y="2120900"/>
+            <a:ext cx="2895600" cy="635000"/>
+          </a:xfrm>
+          <a:prstGeom prst="rect">
+            <a:avLst/>
+          </a:prstGeom>
+          <a:noFill/>
+          <a:ln/>
+        </p:spPr>
+        <p:txBody>
+          <a:bodyPr wrap="square" lIns="0" tIns="0" rIns="0" bIns="0" rtlCol="0" anchor="t"/>
+          <a:lstStyle/>
+          <a:p>
+            <a:pPr algn="l" indent="0" marL="0">
+              <a:lnSpc>
+                <a:spcPct val="105000"/>
+              </a:lnSpc>
+              <a:buNone/>
+            </a:pPr>
+            <a:r>
+              <a:rPr lang="en-US" sz="2200" b="1" dirty="0">
+                <a:solidFill>
+                  <a:srgbClr val="121417"/>
+                </a:solidFill>
+              </a:rPr>
+              <a:t>« Chez maman : avis d’ébullition »</a:t>
+            </a:r>
+            <a:endParaRPr lang="en-US" sz="2200" dirty="0"/>
+          </a:p>
+        </p:txBody>
+      </p:sp>
+      <p:sp>
+        <p:nvSpPr>
+          <p:cNvPr id="7" name="Text 4"/>
+          <p:cNvSpPr txBox="1"/>
+          <p:nvPr/>
+        </p:nvSpPr>
+        <p:spPr>
+          <a:xfrm>
+            <a:off x="1066800" y="2832100"/>
+            <a:ext cx="2895600" cy="1206500"/>
+          </a:xfrm>
+          <a:prstGeom prst="rect">
+            <a:avLst/>
+          </a:prstGeom>
+          <a:noFill/>
+          <a:ln/>
+        </p:spPr>
+        <p:txBody>
+          <a:bodyPr wrap="square" lIns="0" tIns="0" rIns="0" bIns="0" rtlCol="0" anchor="t"/>
+          <a:lstStyle/>
+          <a:p>
+            <a:pPr algn="l" indent="0" marL="0">
+              <a:lnSpc>
+                <a:spcPct val="135000"/>
+              </a:lnSpc>
+              <a:buNone/>
             </a:pPr>
             <a:r>
               <a:rPr lang="en-US" sz="1400" dirty="0">
                 <a:solidFill>
-                  <a:srgbClr val="D6DADE"/>
-                </a:solidFill>
-              </a:rPr>
-              <a:t>Stationnement et collectes</a:t>
+                  <a:srgbClr val="4A5056"/>
+                </a:solidFill>
+              </a:rPr>
+              <a:t>Chaque adresse gardée porte un nom. Son eau et ses pannes arrivent sous ce nom, sans rien ouvrir.</a:t>
             </a:r>
             <a:endParaRPr lang="en-US" sz="1400" dirty="0"/>
           </a:p>
-          <a:p>
-            <a:pPr marL="228600" indent="-228600">
-              <a:lnSpc>
-                <a:spcPct val="125000"/>
-              </a:lnSpc>
-              <a:spcAft>
-                <a:spcPts val="400"/>
-              </a:spcAft>
-              <a:buSzPct val="100000"/>
-              <a:buChar char="•"/>
+        </p:txBody>
+      </p:sp>
+      <p:sp>
+        <p:nvSpPr>
+          <p:cNvPr id="8" name="Text 5"/>
+          <p:cNvSpPr txBox="1"/>
+          <p:nvPr/>
+        </p:nvSpPr>
+        <p:spPr>
+          <a:xfrm>
+            <a:off x="1066800" y="4089400"/>
+            <a:ext cx="2895600" cy="215900"/>
+          </a:xfrm>
+          <a:prstGeom prst="rect">
+            <a:avLst/>
+          </a:prstGeom>
+          <a:noFill/>
+          <a:ln/>
+        </p:spPr>
+        <p:txBody>
+          <a:bodyPr wrap="square" lIns="0" tIns="0" rIns="0" bIns="0" rtlCol="0" anchor="t"/>
+          <a:lstStyle/>
+          <a:p>
+            <a:pPr algn="l" indent="0" marL="0">
+              <a:lnSpc>
+                <a:spcPct val="120000"/>
+              </a:lnSpc>
+              <a:buNone/>
+            </a:pPr>
+            <a:r>
+              <a:rPr lang="en-US" sz="1200" dirty="0">
+                <a:solidFill>
+                  <a:srgbClr val="4A5056"/>
+                </a:solidFill>
+              </a:rPr>
+              <a:t>Fait en arrière-plan, toutes les heures</a:t>
+            </a:r>
+            <a:endParaRPr lang="en-US" sz="1200" dirty="0"/>
+          </a:p>
+        </p:txBody>
+      </p:sp>
+      <p:sp>
+        <p:nvSpPr>
+          <p:cNvPr id="9" name="carte 2"/>
+          <p:cNvSpPr/>
+          <p:nvPr/>
+        </p:nvSpPr>
+        <p:spPr>
+          <a:xfrm>
+            <a:off x="4394200" y="1574800"/>
+            <a:ext cx="3403600" cy="2984500"/>
+          </a:xfrm>
+          <a:prstGeom prst="roundRect">
+            <a:avLst>
+              <a:gd name="adj" fmla="val 6809"/>
+            </a:avLst>
+          </a:prstGeom>
+          <a:solidFill>
+            <a:srgbClr val="F1F2EF"/>
+          </a:solidFill>
+          <a:ln/>
+        </p:spPr>
+      </p:sp>
+      <p:sp>
+        <p:nvSpPr>
+          <p:cNvPr id="10" name="Text 7"/>
+          <p:cNvSpPr txBox="1"/>
+          <p:nvPr/>
+        </p:nvSpPr>
+        <p:spPr>
+          <a:xfrm>
+            <a:off x="4648200" y="1828800"/>
+            <a:ext cx="2895600" cy="215900"/>
+          </a:xfrm>
+          <a:prstGeom prst="rect">
+            <a:avLst/>
+          </a:prstGeom>
+          <a:noFill/>
+          <a:ln/>
+        </p:spPr>
+        <p:txBody>
+          <a:bodyPr wrap="square" lIns="0" tIns="0" rIns="0" bIns="0" rtlCol="0" anchor="t"/>
+          <a:lstStyle/>
+          <a:p>
+            <a:pPr algn="l" indent="0" marL="0">
+              <a:lnSpc>
+                <a:spcPct val="120000"/>
+              </a:lnSpc>
+              <a:buNone/>
+            </a:pPr>
+            <a:r>
+              <a:rPr lang="en-US" sz="1200" b="1" dirty="0">
+                <a:solidFill>
+                  <a:srgbClr val="157A4A"/>
+                </a:solidFill>
+              </a:rPr>
+              <a:t>Partager, sans compte</a:t>
+            </a:r>
+            <a:endParaRPr lang="en-US" sz="1200" dirty="0"/>
+          </a:p>
+        </p:txBody>
+      </p:sp>
+      <p:sp>
+        <p:nvSpPr>
+          <p:cNvPr id="11" name="Text 8"/>
+          <p:cNvSpPr txBox="1"/>
+          <p:nvPr/>
+        </p:nvSpPr>
+        <p:spPr>
+          <a:xfrm>
+            <a:off x="4648200" y="2120900"/>
+            <a:ext cx="2895600" cy="635000"/>
+          </a:xfrm>
+          <a:prstGeom prst="rect">
+            <a:avLst/>
+          </a:prstGeom>
+          <a:noFill/>
+          <a:ln/>
+        </p:spPr>
+        <p:txBody>
+          <a:bodyPr wrap="square" lIns="0" tIns="0" rIns="0" bIns="0" rtlCol="0" anchor="t"/>
+          <a:lstStyle/>
+          <a:p>
+            <a:pPr algn="l" indent="0" marL="0">
+              <a:lnSpc>
+                <a:spcPct val="105000"/>
+              </a:lnSpc>
+              <a:buNone/>
+            </a:pPr>
+            <a:r>
+              <a:rPr lang="en-US" sz="2200" b="1" dirty="0">
+                <a:solidFill>
+                  <a:srgbClr val="121417"/>
+                </a:solidFill>
+              </a:rPr>
+              <a:t>Un lien, et toute la maison suit</a:t>
+            </a:r>
+            <a:endParaRPr lang="en-US" sz="2200" dirty="0"/>
+          </a:p>
+        </p:txBody>
+      </p:sp>
+      <p:sp>
+        <p:nvSpPr>
+          <p:cNvPr id="12" name="Text 9"/>
+          <p:cNvSpPr txBox="1"/>
+          <p:nvPr/>
+        </p:nvSpPr>
+        <p:spPr>
+          <a:xfrm>
+            <a:off x="4648200" y="2832100"/>
+            <a:ext cx="2895600" cy="1206500"/>
+          </a:xfrm>
+          <a:prstGeom prst="rect">
+            <a:avLst/>
+          </a:prstGeom>
+          <a:noFill/>
+          <a:ln/>
+        </p:spPr>
+        <p:txBody>
+          <a:bodyPr wrap="square" lIns="0" tIns="0" rIns="0" bIns="0" rtlCol="0" anchor="t"/>
+          <a:lstStyle/>
+          <a:p>
+            <a:pPr algn="l" indent="0" marL="0">
+              <a:lnSpc>
+                <a:spcPct val="135000"/>
+              </a:lnSpc>
+              <a:buNone/>
             </a:pPr>
             <a:r>
               <a:rPr lang="en-US" sz="1400" dirty="0">
                 <a:solidFill>
-                  <a:srgbClr val="D6DADE"/>
-                </a:solidFill>
-              </a:rPr>
-              <a:t>Trois semaines d’horaire du bus</a:t>
+                  <a:srgbClr val="4A5056"/>
+                </a:solidFill>
+              </a:rPr>
+              <a:t>On envoie l’adresse par texto. Chez l’autre, l’app demande avant de l’ajouter.</a:t>
             </a:r>
             <a:endParaRPr lang="en-US" sz="1400" dirty="0"/>
           </a:p>
-          <a:p>
-            <a:pPr marL="228600" indent="-228600">
-              <a:lnSpc>
-                <a:spcPct val="125000"/>
-              </a:lnSpc>
-              <a:spcAft>
-                <a:spcPts val="400"/>
-              </a:spcAft>
-              <a:buSzPct val="100000"/>
-              <a:buChar char="•"/>
+        </p:txBody>
+      </p:sp>
+      <p:sp>
+        <p:nvSpPr>
+          <p:cNvPr id="13" name="Text 10"/>
+          <p:cNvSpPr txBox="1"/>
+          <p:nvPr/>
+        </p:nvSpPr>
+        <p:spPr>
+          <a:xfrm>
+            <a:off x="4648200" y="4089400"/>
+            <a:ext cx="2895600" cy="215900"/>
+          </a:xfrm>
+          <a:prstGeom prst="rect">
+            <a:avLst/>
+          </a:prstGeom>
+          <a:noFill/>
+          <a:ln/>
+        </p:spPr>
+        <p:txBody>
+          <a:bodyPr wrap="square" lIns="0" tIns="0" rIns="0" bIns="0" rtlCol="0" anchor="t"/>
+          <a:lstStyle/>
+          <a:p>
+            <a:pPr algn="l" indent="0" marL="0">
+              <a:lnSpc>
+                <a:spcPct val="120000"/>
+              </a:lnSpc>
+              <a:buNone/>
+            </a:pPr>
+            <a:r>
+              <a:rPr lang="en-US" sz="1200" dirty="0">
+                <a:solidFill>
+                  <a:srgbClr val="4A5056"/>
+                </a:solidFill>
+              </a:rPr>
+              <a:t>Le nom donné reste chez soi</a:t>
+            </a:r>
+            <a:endParaRPr lang="en-US" sz="1200" dirty="0"/>
+          </a:p>
+        </p:txBody>
+      </p:sp>
+      <p:sp>
+        <p:nvSpPr>
+          <p:cNvPr id="14" name="carte 3"/>
+          <p:cNvSpPr/>
+          <p:nvPr/>
+        </p:nvSpPr>
+        <p:spPr>
+          <a:xfrm>
+            <a:off x="7975600" y="1574800"/>
+            <a:ext cx="3403600" cy="2984500"/>
+          </a:xfrm>
+          <a:prstGeom prst="roundRect">
+            <a:avLst>
+              <a:gd name="adj" fmla="val 6809"/>
+            </a:avLst>
+          </a:prstGeom>
+          <a:solidFill>
+            <a:srgbClr val="F1F2EF"/>
+          </a:solidFill>
+          <a:ln/>
+        </p:spPr>
+      </p:sp>
+      <p:sp>
+        <p:nvSpPr>
+          <p:cNvPr id="15" name="Text 12"/>
+          <p:cNvSpPr txBox="1"/>
+          <p:nvPr/>
+        </p:nvSpPr>
+        <p:spPr>
+          <a:xfrm>
+            <a:off x="8229600" y="1828800"/>
+            <a:ext cx="2895600" cy="215900"/>
+          </a:xfrm>
+          <a:prstGeom prst="rect">
+            <a:avLst/>
+          </a:prstGeom>
+          <a:noFill/>
+          <a:ln/>
+        </p:spPr>
+        <p:txBody>
+          <a:bodyPr wrap="square" lIns="0" tIns="0" rIns="0" bIns="0" rtlCol="0" anchor="t"/>
+          <a:lstStyle/>
+          <a:p>
+            <a:pPr algn="l" indent="0" marL="0">
+              <a:lnSpc>
+                <a:spcPct val="120000"/>
+              </a:lnSpc>
+              <a:buNone/>
+            </a:pPr>
+            <a:r>
+              <a:rPr lang="en-US" sz="1200" b="1" dirty="0">
+                <a:solidFill>
+                  <a:srgbClr val="B7791F"/>
+                </a:solidFill>
+              </a:rPr>
+              <a:t>Sans téléphone intelligent</a:t>
+            </a:r>
+            <a:endParaRPr lang="en-US" sz="1200" dirty="0"/>
+          </a:p>
+        </p:txBody>
+      </p:sp>
+      <p:sp>
+        <p:nvSpPr>
+          <p:cNvPr id="16" name="Text 13"/>
+          <p:cNvSpPr txBox="1"/>
+          <p:nvPr/>
+        </p:nvSpPr>
+        <p:spPr>
+          <a:xfrm>
+            <a:off x="8229600" y="2120900"/>
+            <a:ext cx="2895600" cy="635000"/>
+          </a:xfrm>
+          <a:prstGeom prst="rect">
+            <a:avLst/>
+          </a:prstGeom>
+          <a:noFill/>
+          <a:ln/>
+        </p:spPr>
+        <p:txBody>
+          <a:bodyPr wrap="square" lIns="0" tIns="0" rIns="0" bIns="0" rtlCol="0" anchor="t"/>
+          <a:lstStyle/>
+          <a:p>
+            <a:pPr algn="l" indent="0" marL="0">
+              <a:lnSpc>
+                <a:spcPct val="105000"/>
+              </a:lnSpc>
+              <a:buNone/>
+            </a:pPr>
+            <a:r>
+              <a:rPr lang="en-US" sz="2200" b="1" dirty="0">
+                <a:solidFill>
+                  <a:srgbClr val="121417"/>
+                </a:solidFill>
+              </a:rPr>
+              <a:t>Un texto, la journée en retour</a:t>
+            </a:r>
+            <a:endParaRPr lang="en-US" sz="2200" dirty="0"/>
+          </a:p>
+        </p:txBody>
+      </p:sp>
+      <p:sp>
+        <p:nvSpPr>
+          <p:cNvPr id="17" name="Text 14"/>
+          <p:cNvSpPr txBox="1"/>
+          <p:nvPr/>
+        </p:nvSpPr>
+        <p:spPr>
+          <a:xfrm>
+            <a:off x="8229600" y="2832100"/>
+            <a:ext cx="2895600" cy="1206500"/>
+          </a:xfrm>
+          <a:prstGeom prst="rect">
+            <a:avLst/>
+          </a:prstGeom>
+          <a:noFill/>
+          <a:ln/>
+        </p:spPr>
+        <p:txBody>
+          <a:bodyPr wrap="square" lIns="0" tIns="0" rIns="0" bIns="0" rtlCol="0" anchor="t"/>
+          <a:lstStyle/>
+          <a:p>
+            <a:pPr algn="l" indent="0" marL="0">
+              <a:lnSpc>
+                <a:spcPct val="135000"/>
+              </a:lnSpc>
+              <a:buNone/>
             </a:pPr>
             <a:r>
               <a:rPr lang="en-US" sz="1400" dirty="0">
                 <a:solidFill>
-                  <a:srgbClr val="D6DADE"/>
-                </a:solidFill>
-              </a:rPr>
-              <a:t>Avis et coupures déjà connus</a:t>
+                  <a:srgbClr val="4A5056"/>
+                </a:solidFill>
+              </a:rPr>
+              <a:t>On écrit son adresse, ou on la dit au téléphone : l’eau, le stationnement, la collecte, une panne.</a:t>
             </a:r>
             <a:endParaRPr lang="en-US" sz="1400" dirty="0"/>
           </a:p>
-          <a:p>
-            <a:pPr marL="228600" indent="-228600">
-              <a:lnSpc>
-                <a:spcPct val="125000"/>
-              </a:lnSpc>
-              <a:spcAft>
-                <a:spcPts val="400"/>
-              </a:spcAft>
-              <a:buSzPct val="100000"/>
-              <a:buChar char="•"/>
+        </p:txBody>
+      </p:sp>
+      <p:sp>
+        <p:nvSpPr>
+          <p:cNvPr id="18" name="Text 15"/>
+          <p:cNvSpPr txBox="1"/>
+          <p:nvPr/>
+        </p:nvSpPr>
+        <p:spPr>
+          <a:xfrm>
+            <a:off x="8229600" y="4089400"/>
+            <a:ext cx="2895600" cy="215900"/>
+          </a:xfrm>
+          <a:prstGeom prst="rect">
+            <a:avLst/>
+          </a:prstGeom>
+          <a:noFill/>
+          <a:ln/>
+        </p:spPr>
+        <p:txBody>
+          <a:bodyPr wrap="square" lIns="0" tIns="0" rIns="0" bIns="0" rtlCol="0" anchor="t"/>
+          <a:lstStyle/>
+          <a:p>
+            <a:pPr algn="l" indent="0" marL="0">
+              <a:lnSpc>
+                <a:spcPct val="120000"/>
+              </a:lnSpc>
+              <a:buNone/>
+            </a:pPr>
+            <a:r>
+              <a:rPr lang="en-US" sz="1200" dirty="0">
+                <a:solidFill>
+                  <a:srgbClr val="4A5056"/>
+                </a:solidFill>
+              </a:rPr>
+              <a:t>Ni le numéro ni l’adresse ne sont gardés</a:t>
+            </a:r>
+            <a:endParaRPr lang="en-US" sz="1200" dirty="0"/>
+          </a:p>
+        </p:txBody>
+      </p:sp>
+      <p:sp>
+        <p:nvSpPr>
+          <p:cNvPr id="19" name="Text 16"/>
+          <p:cNvSpPr txBox="1"/>
+          <p:nvPr/>
+        </p:nvSpPr>
+        <p:spPr>
+          <a:xfrm>
+            <a:off x="812800" y="4826000"/>
+            <a:ext cx="10566400" cy="533400"/>
+          </a:xfrm>
+          <a:prstGeom prst="rect">
+            <a:avLst/>
+          </a:prstGeom>
+          <a:noFill/>
+          <a:ln/>
+        </p:spPr>
+        <p:txBody>
+          <a:bodyPr wrap="square" lIns="0" tIns="0" rIns="0" bIns="0" rtlCol="0" anchor="t"/>
+          <a:lstStyle/>
+          <a:p>
+            <a:pPr algn="l" indent="0" marL="0">
+              <a:lnSpc>
+                <a:spcPct val="135000"/>
+              </a:lnSpc>
+              <a:buNone/>
             </a:pPr>
             <a:r>
               <a:rPr lang="en-US" sz="1400" dirty="0">
                 <a:solidFill>
-                  <a:srgbClr val="D6DADE"/>
-                </a:solidFill>
-              </a:rPr>
-              <a:t>Le widget, pour sept jours</a:t>
-            </a:r>
-            <a:endParaRPr lang="en-US" sz="1400" dirty="0"/>
-          </a:p>
-          <a:p>
-            <a:pPr marL="228600" indent="-228600">
-              <a:lnSpc>
-                <a:spcPct val="125000"/>
-              </a:lnSpc>
-              <a:spcAft>
-                <a:spcPts val="400"/>
-              </a:spcAft>
-              <a:buSzPct val="100000"/>
-              <a:buChar char="•"/>
-            </a:pPr>
-            <a:r>
-              <a:rPr lang="en-US" sz="1400" dirty="0">
-                <a:solidFill>
-                  <a:srgbClr val="D6DADE"/>
-                </a:solidFill>
-              </a:rPr>
-              <a:t>Les rappels et les réponses de l’app</a:t>
-            </a:r>
-            <a:endParaRPr lang="en-US" sz="1400" dirty="0"/>
-          </a:p>
-        </p:txBody>
-      </p:sp>
-      <p:sp>
-        <p:nvSpPr>
-          <p:cNvPr id="6" name="Text 3"/>
-          <p:cNvSpPr txBox="1"/>
-          <p:nvPr/>
-        </p:nvSpPr>
-        <p:spPr>
-          <a:xfrm>
-            <a:off x="4064000" y="1600200"/>
-            <a:ext cx="2997200" cy="254000"/>
-          </a:xfrm>
-          <a:prstGeom prst="rect">
-            <a:avLst/>
-          </a:prstGeom>
-          <a:noFill/>
-          <a:ln/>
-        </p:spPr>
-        <p:txBody>
-          <a:bodyPr wrap="square" lIns="0" tIns="0" rIns="0" bIns="0" rtlCol="0" anchor="t"/>
-          <a:lstStyle/>
-          <a:p>
-            <a:pPr algn="l" indent="0" marL="0">
-              <a:lnSpc>
-                <a:spcPct val="120000"/>
-              </a:lnSpc>
-              <a:buNone/>
-            </a:pPr>
-            <a:r>
-              <a:rPr lang="en-US" sz="1600" b="1" dirty="0">
-                <a:solidFill>
-                  <a:srgbClr val="B3B9BF"/>
-                </a:solidFill>
-              </a:rPr>
-              <a:t>A besoin du réseau</a:t>
-            </a:r>
-            <a:endParaRPr lang="en-US" sz="1600" dirty="0"/>
-          </a:p>
-        </p:txBody>
-      </p:sp>
-      <p:sp>
-        <p:nvSpPr>
-          <p:cNvPr id="7" name="Text 4"/>
-          <p:cNvSpPr txBox="1"/>
-          <p:nvPr/>
-        </p:nvSpPr>
-        <p:spPr>
-          <a:xfrm>
-            <a:off x="4064000" y="1955800"/>
-            <a:ext cx="2997200" cy="1587500"/>
-          </a:xfrm>
-          <a:prstGeom prst="rect">
-            <a:avLst/>
-          </a:prstGeom>
-          <a:noFill/>
-          <a:ln/>
-        </p:spPr>
-        <p:txBody>
-          <a:bodyPr wrap="square" lIns="0" tIns="0" rIns="0" bIns="0" rtlCol="0" anchor="t"/>
-          <a:lstStyle/>
-          <a:p>
-            <a:pPr marL="228600" indent="-228600">
-              <a:lnSpc>
-                <a:spcPct val="125000"/>
-              </a:lnSpc>
-              <a:spcAft>
-                <a:spcPts val="400"/>
-              </a:spcAft>
-              <a:buSzPct val="100000"/>
-              <a:buChar char="•"/>
-            </a:pPr>
-            <a:r>
-              <a:rPr lang="en-US" sz="1400" dirty="0">
-                <a:solidFill>
-                  <a:srgbClr val="D6DADE"/>
-                </a:solidFill>
-              </a:rPr>
-              <a:t>Météo et alertes</a:t>
-            </a:r>
-            <a:endParaRPr lang="en-US" sz="1400" dirty="0"/>
-          </a:p>
-          <a:p>
-            <a:pPr marL="228600" indent="-228600">
-              <a:lnSpc>
-                <a:spcPct val="125000"/>
-              </a:lnSpc>
-              <a:spcAft>
-                <a:spcPts val="400"/>
-              </a:spcAft>
-              <a:buSzPct val="100000"/>
-              <a:buChar char="•"/>
-            </a:pPr>
-            <a:r>
-              <a:rPr lang="en-US" sz="1400" dirty="0">
-                <a:solidFill>
-                  <a:srgbClr val="D6DADE"/>
-                </a:solidFill>
-              </a:rPr>
-              <a:t>Pannes, routes, urgences</a:t>
-            </a:r>
-            <a:endParaRPr lang="en-US" sz="1400" dirty="0"/>
-          </a:p>
-          <a:p>
-            <a:pPr marL="228600" indent="-228600">
-              <a:lnSpc>
-                <a:spcPct val="125000"/>
-              </a:lnSpc>
-              <a:spcAft>
-                <a:spcPts val="400"/>
-              </a:spcAft>
-              <a:buSzPct val="100000"/>
-              <a:buChar char="•"/>
-            </a:pPr>
-            <a:r>
-              <a:rPr lang="en-US" sz="1400" dirty="0">
-                <a:solidFill>
-                  <a:srgbClr val="D6DADE"/>
-                </a:solidFill>
-              </a:rPr>
-              <a:t>Retards du bus</a:t>
-            </a:r>
-            <a:endParaRPr lang="en-US" sz="1400" dirty="0"/>
-          </a:p>
-          <a:p>
-            <a:pPr marL="228600" indent="-228600">
-              <a:lnSpc>
-                <a:spcPct val="125000"/>
-              </a:lnSpc>
-              <a:spcAft>
-                <a:spcPts val="400"/>
-              </a:spcAft>
-              <a:buSzPct val="100000"/>
-              <a:buChar char="•"/>
-            </a:pPr>
-            <a:r>
-              <a:rPr lang="en-US" sz="1400" dirty="0">
-                <a:solidFill>
-                  <a:srgbClr val="D6DADE"/>
-                </a:solidFill>
-              </a:rPr>
-              <a:t>Assistant en ligne</a:t>
-            </a:r>
-            <a:endParaRPr lang="en-US" sz="1400" dirty="0"/>
-          </a:p>
-        </p:txBody>
-      </p:sp>
-      <p:sp>
-        <p:nvSpPr>
-          <p:cNvPr id="8" name="Text 5"/>
-          <p:cNvSpPr txBox="1"/>
-          <p:nvPr/>
-        </p:nvSpPr>
-        <p:spPr>
-          <a:xfrm>
-            <a:off x="4064000" y="3644900"/>
-            <a:ext cx="2997200" cy="444500"/>
-          </a:xfrm>
-          <a:prstGeom prst="rect">
-            <a:avLst/>
-          </a:prstGeom>
-          <a:noFill/>
-          <a:ln/>
-        </p:spPr>
-        <p:txBody>
-          <a:bodyPr wrap="square" lIns="0" tIns="0" rIns="0" bIns="0" rtlCol="0" anchor="t"/>
-          <a:lstStyle/>
-          <a:p>
-            <a:pPr algn="l" indent="0" marL="0">
-              <a:lnSpc>
-                <a:spcPct val="135000"/>
-              </a:lnSpc>
-              <a:buNone/>
-            </a:pPr>
-            <a:r>
-              <a:rPr lang="en-US" sz="1200" dirty="0">
-                <a:solidFill>
-                  <a:srgbClr val="B3B9BF"/>
-                </a:solidFill>
-              </a:rPr>
-              <a:t>Sans réseau, l’app montre le dernier relevé et son heure.</a:t>
-            </a:r>
-            <a:endParaRPr lang="en-US" sz="1200" dirty="0"/>
-          </a:p>
-        </p:txBody>
-      </p:sp>
-      <p:sp>
-        <p:nvSpPr>
-          <p:cNvPr id="9" name="Text 6"/>
-          <p:cNvSpPr txBox="1"/>
-          <p:nvPr/>
-        </p:nvSpPr>
-        <p:spPr>
-          <a:xfrm>
-            <a:off x="7315200" y="1600200"/>
-            <a:ext cx="4064000" cy="508000"/>
-          </a:xfrm>
-          <a:prstGeom prst="rect">
-            <a:avLst/>
-          </a:prstGeom>
-          <a:noFill/>
-          <a:ln/>
-        </p:spPr>
-        <p:txBody>
-          <a:bodyPr wrap="square" lIns="0" tIns="0" rIns="0" bIns="0" rtlCol="0" anchor="t"/>
-          <a:lstStyle/>
-          <a:p>
-            <a:pPr algn="l" indent="0" marL="0">
-              <a:lnSpc>
-                <a:spcPct val="100000"/>
-              </a:lnSpc>
-              <a:buNone/>
-            </a:pPr>
-            <a:r>
-              <a:rPr lang="en-US" sz="3600" b="1" dirty="0">
-                <a:solidFill>
-                  <a:srgbClr val="FFD02B"/>
-                </a:solidFill>
-              </a:rPr>
-              <a:t>296</a:t>
-            </a:r>
-            <a:endParaRPr lang="en-US" sz="3600" dirty="0"/>
-          </a:p>
-        </p:txBody>
-      </p:sp>
-      <p:sp>
-        <p:nvSpPr>
-          <p:cNvPr id="10" name="Text 7"/>
-          <p:cNvSpPr txBox="1"/>
-          <p:nvPr/>
-        </p:nvSpPr>
-        <p:spPr>
-          <a:xfrm>
-            <a:off x="7315200" y="2146300"/>
-            <a:ext cx="4064000" cy="508000"/>
-          </a:xfrm>
-          <a:prstGeom prst="rect">
-            <a:avLst/>
-          </a:prstGeom>
-          <a:noFill/>
-          <a:ln/>
-        </p:spPr>
-        <p:txBody>
-          <a:bodyPr wrap="square" lIns="0" tIns="0" rIns="0" bIns="0" rtlCol="0" anchor="t"/>
-          <a:lstStyle/>
-          <a:p>
-            <a:pPr algn="l" indent="0" marL="0">
-              <a:lnSpc>
-                <a:spcPct val="130000"/>
-              </a:lnSpc>
-              <a:buNone/>
-            </a:pPr>
-            <a:r>
-              <a:rPr lang="en-US" sz="1400" dirty="0">
-                <a:solidFill>
-                  <a:srgbClr val="D6DADE"/>
-                </a:solidFill>
-              </a:rPr>
-              <a:t>tests automatiques, dont les vraies réponses de chaque source</a:t>
-            </a:r>
-            <a:endParaRPr lang="en-US" sz="1400" dirty="0"/>
-          </a:p>
-        </p:txBody>
-      </p:sp>
-      <p:sp>
-        <p:nvSpPr>
-          <p:cNvPr id="11" name="Text 8"/>
-          <p:cNvSpPr txBox="1"/>
-          <p:nvPr/>
-        </p:nvSpPr>
-        <p:spPr>
-          <a:xfrm>
-            <a:off x="7315200" y="2870200"/>
-            <a:ext cx="4064000" cy="330200"/>
-          </a:xfrm>
-          <a:prstGeom prst="rect">
-            <a:avLst/>
-          </a:prstGeom>
-          <a:noFill/>
-          <a:ln/>
-        </p:spPr>
-        <p:txBody>
-          <a:bodyPr wrap="square" lIns="0" tIns="0" rIns="0" bIns="0" rtlCol="0" anchor="t"/>
-          <a:lstStyle/>
-          <a:p>
-            <a:pPr algn="l" indent="0" marL="0">
-              <a:lnSpc>
-                <a:spcPct val="100000"/>
-              </a:lnSpc>
-              <a:buNone/>
-            </a:pPr>
-            <a:r>
-              <a:rPr lang="en-US" sz="2200" b="1" dirty="0">
-                <a:solidFill>
-                  <a:srgbClr val="F1F2F3"/>
-                </a:solidFill>
-              </a:rPr>
-              <a:t>Vérifiée sur Android</a:t>
-            </a:r>
-            <a:endParaRPr lang="en-US" sz="2200" dirty="0"/>
-          </a:p>
-        </p:txBody>
-      </p:sp>
-      <p:sp>
-        <p:nvSpPr>
-          <p:cNvPr id="12" name="Text 9"/>
-          <p:cNvSpPr txBox="1"/>
-          <p:nvPr/>
-        </p:nvSpPr>
-        <p:spPr>
-          <a:xfrm>
-            <a:off x="7315200" y="3238500"/>
-            <a:ext cx="4064000" cy="508000"/>
-          </a:xfrm>
-          <a:prstGeom prst="rect">
-            <a:avLst/>
-          </a:prstGeom>
-          <a:noFill/>
-          <a:ln/>
-        </p:spPr>
-        <p:txBody>
-          <a:bodyPr wrap="square" lIns="0" tIns="0" rIns="0" bIns="0" rtlCol="0" anchor="t"/>
-          <a:lstStyle/>
-          <a:p>
-            <a:pPr algn="l" indent="0" marL="0">
-              <a:lnSpc>
-                <a:spcPct val="130000"/>
-              </a:lnSpc>
-              <a:buNone/>
-            </a:pPr>
-            <a:r>
-              <a:rPr lang="en-US" sz="1400" dirty="0">
-                <a:solidFill>
-                  <a:srgbClr val="D6DADE"/>
-                </a:solidFill>
-              </a:rPr>
-              <a:t>en version finale : widget, alertes même app fermée</a:t>
-            </a:r>
-            <a:endParaRPr lang="en-US" sz="1400" dirty="0"/>
-          </a:p>
-        </p:txBody>
-      </p:sp>
-      <p:sp>
-        <p:nvSpPr>
-          <p:cNvPr id="13" name="Text 10"/>
-          <p:cNvSpPr txBox="1"/>
-          <p:nvPr/>
-        </p:nvSpPr>
-        <p:spPr>
-          <a:xfrm>
-            <a:off x="7315200" y="3911600"/>
-            <a:ext cx="4064000" cy="330200"/>
-          </a:xfrm>
-          <a:prstGeom prst="rect">
-            <a:avLst/>
-          </a:prstGeom>
-          <a:noFill/>
-          <a:ln/>
-        </p:spPr>
-        <p:txBody>
-          <a:bodyPr wrap="square" lIns="0" tIns="0" rIns="0" bIns="0" rtlCol="0" anchor="t"/>
-          <a:lstStyle/>
-          <a:p>
-            <a:pPr algn="l" indent="0" marL="0">
-              <a:lnSpc>
-                <a:spcPct val="100000"/>
-              </a:lnSpc>
-              <a:buNone/>
-            </a:pPr>
-            <a:r>
-              <a:rPr lang="en-US" sz="2200" b="1" dirty="0">
-                <a:solidFill>
-                  <a:srgbClr val="F1F2F3"/>
-                </a:solidFill>
-              </a:rPr>
-              <a:t>Rien ne sort</a:t>
-            </a:r>
-            <a:endParaRPr lang="en-US" sz="2200" dirty="0"/>
-          </a:p>
-        </p:txBody>
-      </p:sp>
-      <p:sp>
-        <p:nvSpPr>
-          <p:cNvPr id="14" name="Text 11"/>
-          <p:cNvSpPr txBox="1"/>
-          <p:nvPr/>
-        </p:nvSpPr>
-        <p:spPr>
-          <a:xfrm>
-            <a:off x="7315200" y="4279900"/>
-            <a:ext cx="4064000" cy="508000"/>
-          </a:xfrm>
-          <a:prstGeom prst="rect">
-            <a:avLst/>
-          </a:prstGeom>
-          <a:noFill/>
-          <a:ln/>
-        </p:spPr>
-        <p:txBody>
-          <a:bodyPr wrap="square" lIns="0" tIns="0" rIns="0" bIns="0" rtlCol="0" anchor="t"/>
-          <a:lstStyle/>
-          <a:p>
-            <a:pPr algn="l" indent="0" marL="0">
-              <a:lnSpc>
-                <a:spcPct val="130000"/>
-              </a:lnSpc>
-              <a:buNone/>
-            </a:pPr>
-            <a:r>
-              <a:rPr lang="en-US" sz="1400" dirty="0">
-                <a:solidFill>
-                  <a:srgbClr val="D6DADE"/>
-                </a:solidFill>
-              </a:rPr>
-              <a:t>l’adresse reste sur le téléphone, sans compte ni nuage</a:t>
+                  <a:srgbClr val="4A5056"/>
+                </a:solidFill>
+              </a:rPr>
+              <a:t>En 2025, les appels automatisés de la Ville ont joint 64,7 % des résidences visées par un avis d’eau. Un avis doit aussi atteindre ceux qui ne sont pas à la maison.</a:t>
             </a:r>
             <a:endParaRPr lang="en-US" sz="1400" dirty="0"/>
           </a:p>
@@ -12848,7 +13982,7 @@
             <a:lvl1pPr>
               <a:defRPr sz="1200">
                 <a:solidFill>
-                  <a:srgbClr val="8A9198"/>
+                  <a:srgbClr val="868C92"/>
                 </a:solidFill>
               </a:defRPr>
             </a:lvl1pPr>

--- a/Saguenay-Aujourdhui.pptx
+++ b/Saguenay-Aujourdhui.pptx
@@ -122,20 +122,20 @@
   <p:extLst>
     <p:ext uri="{521415D9-36F7-43E2-AB2F-B90AF26B5E84}">
       <p14:sectionLst xmlns:p14="http://schemas.microsoft.com/office/powerpoint/2010/main">
-        <p14:section name="Le problème" id="{873b2929-70af-fc57-b55a-fd517a1abe11}">
+        <p14:section name="Le problème" id="{b8fa0849-2a81-47df-ebeb-f093cba05795}">
           <p14:sldIdLst>
             <p14:sldId id="256"/>
             <p14:sldId id="257"/>
           </p14:sldIdLst>
         </p14:section>
-        <p14:section name="L’idée" id="{4d5bb290-77dd-25b6-b44b-2780edf1f81e}">
+        <p14:section name="L’idée" id="{50cc2b86-2d88-80bf-3191-cd20f6d7a443}">
           <p14:sldIdLst>
             <p14:sldId id="258"/>
             <p14:sldId id="259"/>
             <p14:sldId id="260"/>
           </p14:sldIdLst>
         </p14:section>
-        <p14:section name="Au quotidien" id="{38107ba2-2ada-367a-9fed-a3abe7907e74}">
+        <p14:section name="Au quotidien" id="{c10b61ce-5dd3-a8f2-7a33-c6e1f3af244c}">
           <p14:sldIdLst>
             <p14:sldId id="261"/>
             <p14:sldId id="262"/>
@@ -145,14 +145,14 @@
             <p14:sldId id="266"/>
           </p14:sldIdLst>
         </p14:section>
-        <p14:section name="Les partenaires" id="{b013ed42-765f-ff66-73a9-5362449ad24e}">
+        <p14:section name="Les partenaires" id="{15f973b3-7e75-eba0-6bfa-b716dcca7304}">
           <p14:sldIdLst>
             <p14:sldId id="267"/>
             <p14:sldId id="268"/>
             <p14:sldId id="269"/>
           </p14:sldIdLst>
         </p14:section>
-        <p14:section name="La suite" id="{ba4e04fb-bbeb-7f6b-323d-46b770103afa}">
+        <p14:section name="La suite" id="{b50753a6-8e76-5311-4950-6811716fb7e8}">
           <p14:sldIdLst>
             <p14:sldId id="270"/>
             <p14:sldId id="271"/>
@@ -1794,7 +1794,7 @@
           <a:p>
             <a:r>
               <a:rPr lang="en-US" dirty="0"/>
-              <a:t>Quand on a une question, on peut la poser à l’app. La plupart des réponses sont calculées sur le téléphone, sans réseau : par exemple, une boîte de pizza va au bac brun, et la réponse vient directement des pages de tri de la Ville. Pour un objet que l’app ne connaît pas, on peut prendre une photo : un assistant en ligne, qui passe par notre serveur, répond en suivant les mêmes règles et dit franchement quand il déduit. Il reçoit seulement le secteur, jamais l’adresse. Le même assistant lit les communiqués de la Ville, qui sont publiés en PDF, et dit en deux phrases ce que ça change pour les gens. L’app aide aussi à signaler un problème à la Ville, met les collectes dans le calendrier du téléphone, garde plusieurs adresses, et attend 7 h pour les alertes qui ne pressent pas la nuit.</a:t>
+              <a:t>Quand on a une question, on peut la poser à l’app. La plupart des réponses sont calculées sur le téléphone, sans réseau : par exemple, une boîte de pizza va au bac brun, et la réponse vient directement des pages de tri de la Ville. Pour un objet que l’app ne connaît pas, on peut prendre une photo : un assistant en ligne, qui passe par notre serveur, répond en suivant les mêmes règles et dit franchement quand il déduit. Il reçoit seulement le secteur, jamais l’adresse. Le même assistant lit les communiqués de la Ville, qui sont publiés en PDF, et dit en deux phrases ce que ça change pour les gens. Hors de chez soi, l’app peut aussi montrer le bus de l’arrêt le plus proche, si on le choisit : la position reste sur le téléphone. Elle aide aussi à signaler un problème à la Ville, met les collectes dans le calendrier du téléphone, garde plusieurs adresses, et attend 7 h pour les alertes qui ne pressent pas la nuit.</a:t>
             </a:r>
             <a:endParaRPr lang="en-US" dirty="0"/>
           </a:p>
@@ -13262,7 +13262,7 @@
                   <a:srgbClr val="4A5056"/>
                 </a:solidFill>
               </a:rPr>
-              <a:t>Aussi : signaler un problème à la Ville, tes collectes dans ton calendrier, plusieurs adresses, et des heures calmes la nuit.</a:t>
+              <a:t>Aussi : le bus de l’arrêt le plus proche quand tu n’es pas chez toi, signaler un problème à la Ville, tes collectes dans ton calendrier et des heures calmes la nuit.</a:t>
             </a:r>
             <a:endParaRPr lang="en-US" sz="1400" dirty="0"/>
           </a:p>

--- a/Saguenay-Aujourdhui.pptx
+++ b/Saguenay-Aujourdhui.pptx
@@ -124,7 +124,7 @@
   <p:extLst>
     <p:ext uri="{521415D9-36F7-43E2-AB2F-B90AF26B5E84}">
       <p14:sectionLst xmlns:p14="http://schemas.microsoft.com/office/powerpoint/2010/main">
-        <p14:section name="Le problème" id="{8E04B96B-5697-0E8E-CB30-780756598984}">
+        <p14:section name="Le problème" id="{9269DF2F-5E41-E921-2001-078AAC745E96}">
           <p14:sldIdLst>
             <p14:sldId id="256"/>
             <p14:sldId id="257"/>
@@ -132,14 +132,14 @@
             <p14:sldId id="259"/>
           </p14:sldIdLst>
         </p14:section>
-        <p14:section name="L’idée" id="{0863A01E-DB24-6597-FF98-B4AE137C210F}">
+        <p14:section name="L’idée" id="{F06B3263-7227-41DE-C21C-4B2232519830}">
           <p14:sldIdLst>
             <p14:sldId id="260"/>
             <p14:sldId id="261"/>
             <p14:sldId id="262"/>
           </p14:sldIdLst>
         </p14:section>
-        <p14:section name="Au quotidien" id="{DEB3AD87-C37D-8491-C964-94822FB8A0E1}">
+        <p14:section name="Au quotidien" id="{EAAB7E11-813B-012D-8D72-6D4CE01F9CCE}">
           <p14:sldIdLst>
             <p14:sldId id="263"/>
             <p14:sldId id="264"/>
@@ -149,14 +149,14 @@
             <p14:sldId id="268"/>
           </p14:sldIdLst>
         </p14:section>
-        <p14:section name="Les partenaires" id="{159DBD61-851A-63C8-7596-C6B7F48D998C}">
+        <p14:section name="Les partenaires" id="{5C54DA1E-9662-B0DE-C171-54F7A5F2CA0A}">
           <p14:sldIdLst>
             <p14:sldId id="269"/>
             <p14:sldId id="270"/>
             <p14:sldId id="271"/>
           </p14:sldIdLst>
         </p14:section>
-        <p14:section name="La suite" id="{772FD5C4-A084-C451-2504-1473E97C8096}">
+        <p14:section name="La suite" id="{17075622-FD56-8A60-39BB-71E94347923E}">
           <p14:sldIdLst>
             <p14:sldId id="272"/>
             <p14:sldId id="273"/>
@@ -196,7 +196,7 @@
     </p:spTree>
     <p:extLst>
       <p:ext uri="{BB962C8B-B14F-4D97-AF65-F5344CB8AC3E}">
-        <p14:creationId xmlns:p14="http://schemas.microsoft.com/office/powerpoint/2010/main" val="119666382"/>
+        <p14:creationId xmlns:p14="http://schemas.microsoft.com/office/powerpoint/2010/main" val="1609520208"/>
       </p:ext>
     </p:extLst>
   </p:cSld>
@@ -8736,7 +8736,7 @@
                   <a:srgbClr val="1A1906"/>
                 </a:solidFill>
               </a:rPr>
-              <a:t>claude.ai/artifact/31KE2xS6d1MEQ6GWKCCGBh</a:t>
+              <a:t>saguenay-aujourdhui.netlify.app</a:t>
             </a:r>
             <a:endParaRPr lang="en-US" sz="1600" dirty="0"/>
           </a:p>
@@ -9168,7 +9168,7 @@
           <p:cNvPr id="6" name="m_base">
             <a:extLst>
               <a:ext uri="{FF2B5EF4-FFF2-40B4-BE49-F238E27FC236}">
-                <a16:creationId xmlns:a16="http://schemas.microsoft.com/office/drawing/2014/main" id="{53D9DEBF-5651-CB77-8C3C-B98EC0F0E92E}"/>
+                <a16:creationId xmlns:a16="http://schemas.microsoft.com/office/drawing/2014/main" id="{004E2B09-7CC7-B20B-4466-806206D89076}"/>
               </a:ext>
             </a:extLst>
           </p:cNvPr>
@@ -9204,7 +9204,7 @@
           <p:cNvPr id="8" name="m_gestes">
             <a:extLst>
               <a:ext uri="{FF2B5EF4-FFF2-40B4-BE49-F238E27FC236}">
-                <a16:creationId xmlns:a16="http://schemas.microsoft.com/office/drawing/2014/main" id="{3A17B15A-1230-EFD5-65A9-450161FCE514}"/>
+                <a16:creationId xmlns:a16="http://schemas.microsoft.com/office/drawing/2014/main" id="{74612E0E-988E-A902-D0A6-D5262937F65A}"/>
               </a:ext>
             </a:extLst>
           </p:cNvPr>
@@ -9240,7 +9240,7 @@
           <p:cNvPr id="10" name="m_sources">
             <a:extLst>
               <a:ext uri="{FF2B5EF4-FFF2-40B4-BE49-F238E27FC236}">
-                <a16:creationId xmlns:a16="http://schemas.microsoft.com/office/drawing/2014/main" id="{F1CE247C-62E1-687A-3C50-59B9FEB4D56D}"/>
+                <a16:creationId xmlns:a16="http://schemas.microsoft.com/office/drawing/2014/main" id="{B2E4CA49-47FE-4046-1421-7EAA1556D409}"/>
               </a:ext>
             </a:extLst>
           </p:cNvPr>
@@ -9276,7 +9276,7 @@
           <p:cNvPr id="12" name="m_alerte">
             <a:extLst>
               <a:ext uri="{FF2B5EF4-FFF2-40B4-BE49-F238E27FC236}">
-                <a16:creationId xmlns:a16="http://schemas.microsoft.com/office/drawing/2014/main" id="{C6FD9435-764C-EE0C-47B2-7703EDFB4018}"/>
+                <a16:creationId xmlns:a16="http://schemas.microsoft.com/office/drawing/2014/main" id="{E2A71B0C-9FCC-1F6D-D5F6-938A8ADD89C8}"/>
               </a:ext>
             </a:extLst>
           </p:cNvPr>
@@ -9312,7 +9312,7 @@
           <p:cNvPr id="14" name="m_personne">
             <a:extLst>
               <a:ext uri="{FF2B5EF4-FFF2-40B4-BE49-F238E27FC236}">
-                <a16:creationId xmlns:a16="http://schemas.microsoft.com/office/drawing/2014/main" id="{409AD9CC-F179-6E78-6D51-DB2E4EDB5C44}"/>
+                <a16:creationId xmlns:a16="http://schemas.microsoft.com/office/drawing/2014/main" id="{778821C8-4DE8-ABF7-B192-EB0A4DCBB30E}"/>
               </a:ext>
             </a:extLst>
           </p:cNvPr>
@@ -9377,9 +9377,9 @@
                                     <p:cond delay="600"/>
                                   </p:stCondLst>
                                   <p:childTnLst>
-                                    <p:animMotion origin="layout" path="M 0.0000 0 L 0.1208 0 L 0.2415 0 L 0.3623 0 L 0.4831 0 L 0.6038 0 E" pathEditMode="relative" ptsTypes="">
+                                    <p:animMotion origin="layout" path="M 0 0 C 0.0473 0.0156 0.0610 -0.1788 0.1408 -0.2183 C 0.1567 -0.0897 0.2023 0.0318 0.2770 -0.0216 C 0.3344 -0.0654 0.3344 -0.2274 0.3944 -0.2557 C 0.4256 -0.1464 0.4483 -0.0087 0.5175 -0.0546 C 0.5760 -0.0897 0.5668 -0.2274 0.6098 -0.2591 E" pathEditMode="relative" ptsTypes="">
                                       <p:cBhvr>
-                                        <p:cTn id="6" dur="5500" fill="hold"/>
+                                        <p:cTn id="6" dur="7000" fill="hold"/>
                                         <p:tgtEl>
                                           <p:spTgt spid="14"/>
                                         </p:tgtEl>
@@ -9743,7 +9743,7 @@
           <p:cNvPr id="6" name="u_fond">
             <a:extLst>
               <a:ext uri="{FF2B5EF4-FFF2-40B4-BE49-F238E27FC236}">
-                <a16:creationId xmlns:a16="http://schemas.microsoft.com/office/drawing/2014/main" id="{E10E05D9-4C56-5C78-DF99-AC7664D3CC9E}"/>
+                <a16:creationId xmlns:a16="http://schemas.microsoft.com/office/drawing/2014/main" id="{B8BB426D-7241-2097-42C2-3183AAFB2094}"/>
               </a:ext>
             </a:extLst>
           </p:cNvPr>
@@ -9779,7 +9779,7 @@
           <p:cNvPr id="8" name="u_flux">
             <a:extLst>
               <a:ext uri="{FF2B5EF4-FFF2-40B4-BE49-F238E27FC236}">
-                <a16:creationId xmlns:a16="http://schemas.microsoft.com/office/drawing/2014/main" id="{0110FA8C-A239-A656-4D80-3561F23CA278}"/>
+                <a16:creationId xmlns:a16="http://schemas.microsoft.com/office/drawing/2014/main" id="{C22CD14A-701E-4819-2FDA-F742EBB48A08}"/>
               </a:ext>
             </a:extLst>
           </p:cNvPr>
@@ -9815,7 +9815,7 @@
           <p:cNvPr id="10" name="u_sources">
             <a:extLst>
               <a:ext uri="{FF2B5EF4-FFF2-40B4-BE49-F238E27FC236}">
-                <a16:creationId xmlns:a16="http://schemas.microsoft.com/office/drawing/2014/main" id="{5689E7D3-B5BB-7AAC-5D91-D438DCC04135}"/>
+                <a16:creationId xmlns:a16="http://schemas.microsoft.com/office/drawing/2014/main" id="{2ACCE153-1FBC-A253-6B7D-4D621BA25B86}"/>
               </a:ext>
             </a:extLst>
           </p:cNvPr>
@@ -9851,7 +9851,7 @@
           <p:cNvPr id="12" name="u_maison">
             <a:extLst>
               <a:ext uri="{FF2B5EF4-FFF2-40B4-BE49-F238E27FC236}">
-                <a16:creationId xmlns:a16="http://schemas.microsoft.com/office/drawing/2014/main" id="{3D2D8456-B81D-17CB-02DA-51EA9AE04425}"/>
+                <a16:creationId xmlns:a16="http://schemas.microsoft.com/office/drawing/2014/main" id="{4E885E2F-DE5E-7EB9-C23E-E74078F0F2AA}"/>
               </a:ext>
             </a:extLst>
           </p:cNvPr>
@@ -9887,7 +9887,7 @@
           <p:cNvPr id="14" name="u_personne">
             <a:extLst>
               <a:ext uri="{FF2B5EF4-FFF2-40B4-BE49-F238E27FC236}">
-                <a16:creationId xmlns:a16="http://schemas.microsoft.com/office/drawing/2014/main" id="{1EBB4048-5206-966C-87D3-A6FAB8835DDD}"/>
+                <a16:creationId xmlns:a16="http://schemas.microsoft.com/office/drawing/2014/main" id="{9FDE2160-80E7-951F-3034-36FADB833938}"/>
               </a:ext>
             </a:extLst>
           </p:cNvPr>
@@ -9923,7 +9923,7 @@
           <p:cNvPr id="16" name="u_bulle0">
             <a:extLst>
               <a:ext uri="{FF2B5EF4-FFF2-40B4-BE49-F238E27FC236}">
-                <a16:creationId xmlns:a16="http://schemas.microsoft.com/office/drawing/2014/main" id="{5AE03AB6-63CE-15DD-2DEC-66123077BFE6}"/>
+                <a16:creationId xmlns:a16="http://schemas.microsoft.com/office/drawing/2014/main" id="{CC8E6775-40A5-360D-9365-71D2D1D26E15}"/>
               </a:ext>
             </a:extLst>
           </p:cNvPr>
@@ -9959,7 +9959,7 @@
           <p:cNvPr id="18" name="u_bulle1">
             <a:extLst>
               <a:ext uri="{FF2B5EF4-FFF2-40B4-BE49-F238E27FC236}">
-                <a16:creationId xmlns:a16="http://schemas.microsoft.com/office/drawing/2014/main" id="{A9392523-33FD-943C-701B-7BD5E7F859D3}"/>
+                <a16:creationId xmlns:a16="http://schemas.microsoft.com/office/drawing/2014/main" id="{0E3B07E0-C630-0333-F75F-EB377B2161BB}"/>
               </a:ext>
             </a:extLst>
           </p:cNvPr>
@@ -9995,7 +9995,7 @@
           <p:cNvPr id="20" name="u_bulle2">
             <a:extLst>
               <a:ext uri="{FF2B5EF4-FFF2-40B4-BE49-F238E27FC236}">
-                <a16:creationId xmlns:a16="http://schemas.microsoft.com/office/drawing/2014/main" id="{5EBCDD9E-E5E2-5716-AE25-8EB7636002F2}"/>
+                <a16:creationId xmlns:a16="http://schemas.microsoft.com/office/drawing/2014/main" id="{BD983AF2-8DEB-9F1E-EF7B-4248E318C547}"/>
               </a:ext>
             </a:extLst>
           </p:cNvPr>
